--- a/exports/pptx/lessons/middle-module-15-project-implementation/day-09-rehearse.pptx
+++ b/exports/pptx/lessons/middle-module-15-project-implementation/day-09-rehearse.pptx
@@ -16,9 +16,18 @@
     <p:sldId id="264" r:id="rId10"/>
     <p:sldId id="265" r:id="rId11"/>
     <p:sldId id="266" r:id="rId12"/>
+    <p:sldId id="267" r:id="rId13"/>
+    <p:sldId id="268" r:id="rId14"/>
+    <p:sldId id="269" r:id="rId15"/>
+    <p:sldId id="270" r:id="rId16"/>
+    <p:sldId id="271" r:id="rId17"/>
+    <p:sldId id="272" r:id="rId18"/>
+    <p:sldId id="273" r:id="rId19"/>
+    <p:sldId id="274" r:id="rId20"/>
+    <p:sldId id="275" r:id="rId21"/>
   </p:sldIdLst>
   <p:notesMasterIdLst>
-    <p:notesMasterId r:id="rId13"/>
+    <p:notesMasterId r:id="rId22"/>
   </p:notesMasterIdLst>
   <p:sldSz cx="9144000" cy="5143500"/>
   <p:notesSz cx="5143500" cy="9144000"/>
@@ -730,6 +739,710 @@
 </p:notes>
 </file>
 
+<file path=ppt/notesSlides/notesSlide12.xml><?xml version="1.0" encoding="utf-8"?>
+<p:notes xmlns:a="http://schemas.openxmlformats.org/drawingml/2006/main" xmlns:r="http://schemas.openxmlformats.org/officeDocument/2006/relationships" xmlns:p="http://schemas.openxmlformats.org/presentationml/2006/main">
+  <p:cSld>
+    <p:spTree>
+      <p:nvGrpSpPr>
+        <p:cNvPr id="1" name=""/>
+        <p:cNvGrpSpPr/>
+        <p:nvPr/>
+      </p:nvGrpSpPr>
+      <p:grpSpPr>
+        <a:xfrm>
+          <a:off x="0" y="0"/>
+          <a:ext cx="0" cy="0"/>
+          <a:chOff x="0" y="0"/>
+          <a:chExt cx="0" cy="0"/>
+        </a:xfrm>
+      </p:grpSpPr>
+      <p:sp>
+        <p:nvSpPr>
+          <p:cNvPr id="2" name="Slide Image Placeholder 1"/>
+          <p:cNvSpPr>
+            <a:spLocks noGrp="1" noRot="1" noChangeAspect="1"/>
+          </p:cNvSpPr>
+          <p:nvPr>
+            <p:ph type="sldImg"/>
+          </p:nvPr>
+        </p:nvSpPr>
+        <p:spPr/>
+      </p:sp>
+      <p:sp>
+        <p:nvSpPr>
+          <p:cNvPr id="3" name="Notes Placeholder 2"/>
+          <p:cNvSpPr>
+            <a:spLocks noGrp="1"/>
+          </p:cNvSpPr>
+          <p:nvPr>
+            <p:ph type="body" idx="1"/>
+          </p:nvPr>
+        </p:nvSpPr>
+        <p:spPr/>
+        <p:txBody>
+          <a:bodyPr/>
+          <a:lstStyle/>
+          <a:p>
+            <a:r>
+              <a:rPr lang="en-US" dirty="0"/>
+              <a:t/>
+            </a:r>
+            <a:endParaRPr lang="en-US" dirty="0"/>
+          </a:p>
+        </p:txBody>
+      </p:sp>
+      <p:sp>
+        <p:nvSpPr>
+          <p:cNvPr id="4" name="Slide Number Placeholder 3"/>
+          <p:cNvSpPr>
+            <a:spLocks noGrp="1"/>
+          </p:cNvSpPr>
+          <p:nvPr>
+            <p:ph type="sldNum" sz="quarter" idx="10"/>
+          </p:nvPr>
+        </p:nvSpPr>
+        <p:spPr/>
+        <p:txBody>
+          <a:bodyPr/>
+          <a:lstStyle/>
+          <a:p>
+            <a:fld id="{F7021451-1387-4CA6-816F-3879F97B5CBC}" type="slidenum">
+              <a:rPr lang="en-US"/>
+              <a:t>12</a:t>
+            </a:fld>
+            <a:endParaRPr lang="en-US"/>
+          </a:p>
+        </p:txBody>
+      </p:sp>
+    </p:spTree>
+    <p:extLst>
+      <p:ext uri="{BB962C8B-B14F-4D97-AF65-F5344CB8AC3E}">
+        <p14:creationId xmlns:p14="http://schemas.microsoft.com/office/powerpoint/2010/main" val="1024086991"/>
+      </p:ext>
+    </p:extLst>
+  </p:cSld>
+  <p:clrMapOvr>
+    <a:masterClrMapping/>
+  </p:clrMapOvr>
+</p:notes>
+</file>
+
+<file path=ppt/notesSlides/notesSlide13.xml><?xml version="1.0" encoding="utf-8"?>
+<p:notes xmlns:a="http://schemas.openxmlformats.org/drawingml/2006/main" xmlns:r="http://schemas.openxmlformats.org/officeDocument/2006/relationships" xmlns:p="http://schemas.openxmlformats.org/presentationml/2006/main">
+  <p:cSld>
+    <p:spTree>
+      <p:nvGrpSpPr>
+        <p:cNvPr id="1" name=""/>
+        <p:cNvGrpSpPr/>
+        <p:nvPr/>
+      </p:nvGrpSpPr>
+      <p:grpSpPr>
+        <a:xfrm>
+          <a:off x="0" y="0"/>
+          <a:ext cx="0" cy="0"/>
+          <a:chOff x="0" y="0"/>
+          <a:chExt cx="0" cy="0"/>
+        </a:xfrm>
+      </p:grpSpPr>
+      <p:sp>
+        <p:nvSpPr>
+          <p:cNvPr id="2" name="Slide Image Placeholder 1"/>
+          <p:cNvSpPr>
+            <a:spLocks noGrp="1" noRot="1" noChangeAspect="1"/>
+          </p:cNvSpPr>
+          <p:nvPr>
+            <p:ph type="sldImg"/>
+          </p:nvPr>
+        </p:nvSpPr>
+        <p:spPr/>
+      </p:sp>
+      <p:sp>
+        <p:nvSpPr>
+          <p:cNvPr id="3" name="Notes Placeholder 2"/>
+          <p:cNvSpPr>
+            <a:spLocks noGrp="1"/>
+          </p:cNvSpPr>
+          <p:nvPr>
+            <p:ph type="body" idx="1"/>
+          </p:nvPr>
+        </p:nvSpPr>
+        <p:spPr/>
+        <p:txBody>
+          <a:bodyPr/>
+          <a:lstStyle/>
+          <a:p>
+            <a:r>
+              <a:rPr lang="en-US" dirty="0"/>
+              <a:t/>
+            </a:r>
+            <a:endParaRPr lang="en-US" dirty="0"/>
+          </a:p>
+        </p:txBody>
+      </p:sp>
+      <p:sp>
+        <p:nvSpPr>
+          <p:cNvPr id="4" name="Slide Number Placeholder 3"/>
+          <p:cNvSpPr>
+            <a:spLocks noGrp="1"/>
+          </p:cNvSpPr>
+          <p:nvPr>
+            <p:ph type="sldNum" sz="quarter" idx="10"/>
+          </p:nvPr>
+        </p:nvSpPr>
+        <p:spPr/>
+        <p:txBody>
+          <a:bodyPr/>
+          <a:lstStyle/>
+          <a:p>
+            <a:fld id="{F7021451-1387-4CA6-816F-3879F97B5CBC}" type="slidenum">
+              <a:rPr lang="en-US"/>
+              <a:t>13</a:t>
+            </a:fld>
+            <a:endParaRPr lang="en-US"/>
+          </a:p>
+        </p:txBody>
+      </p:sp>
+    </p:spTree>
+    <p:extLst>
+      <p:ext uri="{BB962C8B-B14F-4D97-AF65-F5344CB8AC3E}">
+        <p14:creationId xmlns:p14="http://schemas.microsoft.com/office/powerpoint/2010/main" val="1024086991"/>
+      </p:ext>
+    </p:extLst>
+  </p:cSld>
+  <p:clrMapOvr>
+    <a:masterClrMapping/>
+  </p:clrMapOvr>
+</p:notes>
+</file>
+
+<file path=ppt/notesSlides/notesSlide14.xml><?xml version="1.0" encoding="utf-8"?>
+<p:notes xmlns:a="http://schemas.openxmlformats.org/drawingml/2006/main" xmlns:r="http://schemas.openxmlformats.org/officeDocument/2006/relationships" xmlns:p="http://schemas.openxmlformats.org/presentationml/2006/main">
+  <p:cSld>
+    <p:spTree>
+      <p:nvGrpSpPr>
+        <p:cNvPr id="1" name=""/>
+        <p:cNvGrpSpPr/>
+        <p:nvPr/>
+      </p:nvGrpSpPr>
+      <p:grpSpPr>
+        <a:xfrm>
+          <a:off x="0" y="0"/>
+          <a:ext cx="0" cy="0"/>
+          <a:chOff x="0" y="0"/>
+          <a:chExt cx="0" cy="0"/>
+        </a:xfrm>
+      </p:grpSpPr>
+      <p:sp>
+        <p:nvSpPr>
+          <p:cNvPr id="2" name="Slide Image Placeholder 1"/>
+          <p:cNvSpPr>
+            <a:spLocks noGrp="1" noRot="1" noChangeAspect="1"/>
+          </p:cNvSpPr>
+          <p:nvPr>
+            <p:ph type="sldImg"/>
+          </p:nvPr>
+        </p:nvSpPr>
+        <p:spPr/>
+      </p:sp>
+      <p:sp>
+        <p:nvSpPr>
+          <p:cNvPr id="3" name="Notes Placeholder 2"/>
+          <p:cNvSpPr>
+            <a:spLocks noGrp="1"/>
+          </p:cNvSpPr>
+          <p:nvPr>
+            <p:ph type="body" idx="1"/>
+          </p:nvPr>
+        </p:nvSpPr>
+        <p:spPr/>
+        <p:txBody>
+          <a:bodyPr/>
+          <a:lstStyle/>
+          <a:p>
+            <a:r>
+              <a:rPr lang="en-US" dirty="0"/>
+              <a:t/>
+            </a:r>
+            <a:endParaRPr lang="en-US" dirty="0"/>
+          </a:p>
+        </p:txBody>
+      </p:sp>
+      <p:sp>
+        <p:nvSpPr>
+          <p:cNvPr id="4" name="Slide Number Placeholder 3"/>
+          <p:cNvSpPr>
+            <a:spLocks noGrp="1"/>
+          </p:cNvSpPr>
+          <p:nvPr>
+            <p:ph type="sldNum" sz="quarter" idx="10"/>
+          </p:nvPr>
+        </p:nvSpPr>
+        <p:spPr/>
+        <p:txBody>
+          <a:bodyPr/>
+          <a:lstStyle/>
+          <a:p>
+            <a:fld id="{F7021451-1387-4CA6-816F-3879F97B5CBC}" type="slidenum">
+              <a:rPr lang="en-US"/>
+              <a:t>14</a:t>
+            </a:fld>
+            <a:endParaRPr lang="en-US"/>
+          </a:p>
+        </p:txBody>
+      </p:sp>
+    </p:spTree>
+    <p:extLst>
+      <p:ext uri="{BB962C8B-B14F-4D97-AF65-F5344CB8AC3E}">
+        <p14:creationId xmlns:p14="http://schemas.microsoft.com/office/powerpoint/2010/main" val="1024086991"/>
+      </p:ext>
+    </p:extLst>
+  </p:cSld>
+  <p:clrMapOvr>
+    <a:masterClrMapping/>
+  </p:clrMapOvr>
+</p:notes>
+</file>
+
+<file path=ppt/notesSlides/notesSlide15.xml><?xml version="1.0" encoding="utf-8"?>
+<p:notes xmlns:a="http://schemas.openxmlformats.org/drawingml/2006/main" xmlns:r="http://schemas.openxmlformats.org/officeDocument/2006/relationships" xmlns:p="http://schemas.openxmlformats.org/presentationml/2006/main">
+  <p:cSld>
+    <p:spTree>
+      <p:nvGrpSpPr>
+        <p:cNvPr id="1" name=""/>
+        <p:cNvGrpSpPr/>
+        <p:nvPr/>
+      </p:nvGrpSpPr>
+      <p:grpSpPr>
+        <a:xfrm>
+          <a:off x="0" y="0"/>
+          <a:ext cx="0" cy="0"/>
+          <a:chOff x="0" y="0"/>
+          <a:chExt cx="0" cy="0"/>
+        </a:xfrm>
+      </p:grpSpPr>
+      <p:sp>
+        <p:nvSpPr>
+          <p:cNvPr id="2" name="Slide Image Placeholder 1"/>
+          <p:cNvSpPr>
+            <a:spLocks noGrp="1" noRot="1" noChangeAspect="1"/>
+          </p:cNvSpPr>
+          <p:nvPr>
+            <p:ph type="sldImg"/>
+          </p:nvPr>
+        </p:nvSpPr>
+        <p:spPr/>
+      </p:sp>
+      <p:sp>
+        <p:nvSpPr>
+          <p:cNvPr id="3" name="Notes Placeholder 2"/>
+          <p:cNvSpPr>
+            <a:spLocks noGrp="1"/>
+          </p:cNvSpPr>
+          <p:nvPr>
+            <p:ph type="body" idx="1"/>
+          </p:nvPr>
+        </p:nvSpPr>
+        <p:spPr/>
+        <p:txBody>
+          <a:bodyPr/>
+          <a:lstStyle/>
+          <a:p>
+            <a:r>
+              <a:rPr lang="en-US" dirty="0"/>
+              <a:t/>
+            </a:r>
+            <a:endParaRPr lang="en-US" dirty="0"/>
+          </a:p>
+        </p:txBody>
+      </p:sp>
+      <p:sp>
+        <p:nvSpPr>
+          <p:cNvPr id="4" name="Slide Number Placeholder 3"/>
+          <p:cNvSpPr>
+            <a:spLocks noGrp="1"/>
+          </p:cNvSpPr>
+          <p:nvPr>
+            <p:ph type="sldNum" sz="quarter" idx="10"/>
+          </p:nvPr>
+        </p:nvSpPr>
+        <p:spPr/>
+        <p:txBody>
+          <a:bodyPr/>
+          <a:lstStyle/>
+          <a:p>
+            <a:fld id="{F7021451-1387-4CA6-816F-3879F97B5CBC}" type="slidenum">
+              <a:rPr lang="en-US"/>
+              <a:t>15</a:t>
+            </a:fld>
+            <a:endParaRPr lang="en-US"/>
+          </a:p>
+        </p:txBody>
+      </p:sp>
+    </p:spTree>
+    <p:extLst>
+      <p:ext uri="{BB962C8B-B14F-4D97-AF65-F5344CB8AC3E}">
+        <p14:creationId xmlns:p14="http://schemas.microsoft.com/office/powerpoint/2010/main" val="1024086991"/>
+      </p:ext>
+    </p:extLst>
+  </p:cSld>
+  <p:clrMapOvr>
+    <a:masterClrMapping/>
+  </p:clrMapOvr>
+</p:notes>
+</file>
+
+<file path=ppt/notesSlides/notesSlide16.xml><?xml version="1.0" encoding="utf-8"?>
+<p:notes xmlns:a="http://schemas.openxmlformats.org/drawingml/2006/main" xmlns:r="http://schemas.openxmlformats.org/officeDocument/2006/relationships" xmlns:p="http://schemas.openxmlformats.org/presentationml/2006/main">
+  <p:cSld>
+    <p:spTree>
+      <p:nvGrpSpPr>
+        <p:cNvPr id="1" name=""/>
+        <p:cNvGrpSpPr/>
+        <p:nvPr/>
+      </p:nvGrpSpPr>
+      <p:grpSpPr>
+        <a:xfrm>
+          <a:off x="0" y="0"/>
+          <a:ext cx="0" cy="0"/>
+          <a:chOff x="0" y="0"/>
+          <a:chExt cx="0" cy="0"/>
+        </a:xfrm>
+      </p:grpSpPr>
+      <p:sp>
+        <p:nvSpPr>
+          <p:cNvPr id="2" name="Slide Image Placeholder 1"/>
+          <p:cNvSpPr>
+            <a:spLocks noGrp="1" noRot="1" noChangeAspect="1"/>
+          </p:cNvSpPr>
+          <p:nvPr>
+            <p:ph type="sldImg"/>
+          </p:nvPr>
+        </p:nvSpPr>
+        <p:spPr/>
+      </p:sp>
+      <p:sp>
+        <p:nvSpPr>
+          <p:cNvPr id="3" name="Notes Placeholder 2"/>
+          <p:cNvSpPr>
+            <a:spLocks noGrp="1"/>
+          </p:cNvSpPr>
+          <p:nvPr>
+            <p:ph type="body" idx="1"/>
+          </p:nvPr>
+        </p:nvSpPr>
+        <p:spPr/>
+        <p:txBody>
+          <a:bodyPr/>
+          <a:lstStyle/>
+          <a:p>
+            <a:r>
+              <a:rPr lang="en-US" dirty="0"/>
+              <a:t/>
+            </a:r>
+            <a:endParaRPr lang="en-US" dirty="0"/>
+          </a:p>
+        </p:txBody>
+      </p:sp>
+      <p:sp>
+        <p:nvSpPr>
+          <p:cNvPr id="4" name="Slide Number Placeholder 3"/>
+          <p:cNvSpPr>
+            <a:spLocks noGrp="1"/>
+          </p:cNvSpPr>
+          <p:nvPr>
+            <p:ph type="sldNum" sz="quarter" idx="10"/>
+          </p:nvPr>
+        </p:nvSpPr>
+        <p:spPr/>
+        <p:txBody>
+          <a:bodyPr/>
+          <a:lstStyle/>
+          <a:p>
+            <a:fld id="{F7021451-1387-4CA6-816F-3879F97B5CBC}" type="slidenum">
+              <a:rPr lang="en-US"/>
+              <a:t>16</a:t>
+            </a:fld>
+            <a:endParaRPr lang="en-US"/>
+          </a:p>
+        </p:txBody>
+      </p:sp>
+    </p:spTree>
+    <p:extLst>
+      <p:ext uri="{BB962C8B-B14F-4D97-AF65-F5344CB8AC3E}">
+        <p14:creationId xmlns:p14="http://schemas.microsoft.com/office/powerpoint/2010/main" val="1024086991"/>
+      </p:ext>
+    </p:extLst>
+  </p:cSld>
+  <p:clrMapOvr>
+    <a:masterClrMapping/>
+  </p:clrMapOvr>
+</p:notes>
+</file>
+
+<file path=ppt/notesSlides/notesSlide17.xml><?xml version="1.0" encoding="utf-8"?>
+<p:notes xmlns:a="http://schemas.openxmlformats.org/drawingml/2006/main" xmlns:r="http://schemas.openxmlformats.org/officeDocument/2006/relationships" xmlns:p="http://schemas.openxmlformats.org/presentationml/2006/main">
+  <p:cSld>
+    <p:spTree>
+      <p:nvGrpSpPr>
+        <p:cNvPr id="1" name=""/>
+        <p:cNvGrpSpPr/>
+        <p:nvPr/>
+      </p:nvGrpSpPr>
+      <p:grpSpPr>
+        <a:xfrm>
+          <a:off x="0" y="0"/>
+          <a:ext cx="0" cy="0"/>
+          <a:chOff x="0" y="0"/>
+          <a:chExt cx="0" cy="0"/>
+        </a:xfrm>
+      </p:grpSpPr>
+      <p:sp>
+        <p:nvSpPr>
+          <p:cNvPr id="2" name="Slide Image Placeholder 1"/>
+          <p:cNvSpPr>
+            <a:spLocks noGrp="1" noRot="1" noChangeAspect="1"/>
+          </p:cNvSpPr>
+          <p:nvPr>
+            <p:ph type="sldImg"/>
+          </p:nvPr>
+        </p:nvSpPr>
+        <p:spPr/>
+      </p:sp>
+      <p:sp>
+        <p:nvSpPr>
+          <p:cNvPr id="3" name="Notes Placeholder 2"/>
+          <p:cNvSpPr>
+            <a:spLocks noGrp="1"/>
+          </p:cNvSpPr>
+          <p:nvPr>
+            <p:ph type="body" idx="1"/>
+          </p:nvPr>
+        </p:nvSpPr>
+        <p:spPr/>
+        <p:txBody>
+          <a:bodyPr/>
+          <a:lstStyle/>
+          <a:p>
+            <a:r>
+              <a:rPr lang="en-US" dirty="0"/>
+              <a:t/>
+            </a:r>
+            <a:endParaRPr lang="en-US" dirty="0"/>
+          </a:p>
+        </p:txBody>
+      </p:sp>
+      <p:sp>
+        <p:nvSpPr>
+          <p:cNvPr id="4" name="Slide Number Placeholder 3"/>
+          <p:cNvSpPr>
+            <a:spLocks noGrp="1"/>
+          </p:cNvSpPr>
+          <p:nvPr>
+            <p:ph type="sldNum" sz="quarter" idx="10"/>
+          </p:nvPr>
+        </p:nvSpPr>
+        <p:spPr/>
+        <p:txBody>
+          <a:bodyPr/>
+          <a:lstStyle/>
+          <a:p>
+            <a:fld id="{F7021451-1387-4CA6-816F-3879F97B5CBC}" type="slidenum">
+              <a:rPr lang="en-US"/>
+              <a:t>17</a:t>
+            </a:fld>
+            <a:endParaRPr lang="en-US"/>
+          </a:p>
+        </p:txBody>
+      </p:sp>
+    </p:spTree>
+    <p:extLst>
+      <p:ext uri="{BB962C8B-B14F-4D97-AF65-F5344CB8AC3E}">
+        <p14:creationId xmlns:p14="http://schemas.microsoft.com/office/powerpoint/2010/main" val="1024086991"/>
+      </p:ext>
+    </p:extLst>
+  </p:cSld>
+  <p:clrMapOvr>
+    <a:masterClrMapping/>
+  </p:clrMapOvr>
+</p:notes>
+</file>
+
+<file path=ppt/notesSlides/notesSlide18.xml><?xml version="1.0" encoding="utf-8"?>
+<p:notes xmlns:a="http://schemas.openxmlformats.org/drawingml/2006/main" xmlns:r="http://schemas.openxmlformats.org/officeDocument/2006/relationships" xmlns:p="http://schemas.openxmlformats.org/presentationml/2006/main">
+  <p:cSld>
+    <p:spTree>
+      <p:nvGrpSpPr>
+        <p:cNvPr id="1" name=""/>
+        <p:cNvGrpSpPr/>
+        <p:nvPr/>
+      </p:nvGrpSpPr>
+      <p:grpSpPr>
+        <a:xfrm>
+          <a:off x="0" y="0"/>
+          <a:ext cx="0" cy="0"/>
+          <a:chOff x="0" y="0"/>
+          <a:chExt cx="0" cy="0"/>
+        </a:xfrm>
+      </p:grpSpPr>
+      <p:sp>
+        <p:nvSpPr>
+          <p:cNvPr id="2" name="Slide Image Placeholder 1"/>
+          <p:cNvSpPr>
+            <a:spLocks noGrp="1" noRot="1" noChangeAspect="1"/>
+          </p:cNvSpPr>
+          <p:nvPr>
+            <p:ph type="sldImg"/>
+          </p:nvPr>
+        </p:nvSpPr>
+        <p:spPr/>
+      </p:sp>
+      <p:sp>
+        <p:nvSpPr>
+          <p:cNvPr id="3" name="Notes Placeholder 2"/>
+          <p:cNvSpPr>
+            <a:spLocks noGrp="1"/>
+          </p:cNvSpPr>
+          <p:nvPr>
+            <p:ph type="body" idx="1"/>
+          </p:nvPr>
+        </p:nvSpPr>
+        <p:spPr/>
+        <p:txBody>
+          <a:bodyPr/>
+          <a:lstStyle/>
+          <a:p>
+            <a:r>
+              <a:rPr lang="en-US" dirty="0"/>
+              <a:t/>
+            </a:r>
+            <a:endParaRPr lang="en-US" dirty="0"/>
+          </a:p>
+        </p:txBody>
+      </p:sp>
+      <p:sp>
+        <p:nvSpPr>
+          <p:cNvPr id="4" name="Slide Number Placeholder 3"/>
+          <p:cNvSpPr>
+            <a:spLocks noGrp="1"/>
+          </p:cNvSpPr>
+          <p:nvPr>
+            <p:ph type="sldNum" sz="quarter" idx="10"/>
+          </p:nvPr>
+        </p:nvSpPr>
+        <p:spPr/>
+        <p:txBody>
+          <a:bodyPr/>
+          <a:lstStyle/>
+          <a:p>
+            <a:fld id="{F7021451-1387-4CA6-816F-3879F97B5CBC}" type="slidenum">
+              <a:rPr lang="en-US"/>
+              <a:t>18</a:t>
+            </a:fld>
+            <a:endParaRPr lang="en-US"/>
+          </a:p>
+        </p:txBody>
+      </p:sp>
+    </p:spTree>
+    <p:extLst>
+      <p:ext uri="{BB962C8B-B14F-4D97-AF65-F5344CB8AC3E}">
+        <p14:creationId xmlns:p14="http://schemas.microsoft.com/office/powerpoint/2010/main" val="1024086991"/>
+      </p:ext>
+    </p:extLst>
+  </p:cSld>
+  <p:clrMapOvr>
+    <a:masterClrMapping/>
+  </p:clrMapOvr>
+</p:notes>
+</file>
+
+<file path=ppt/notesSlides/notesSlide19.xml><?xml version="1.0" encoding="utf-8"?>
+<p:notes xmlns:a="http://schemas.openxmlformats.org/drawingml/2006/main" xmlns:r="http://schemas.openxmlformats.org/officeDocument/2006/relationships" xmlns:p="http://schemas.openxmlformats.org/presentationml/2006/main">
+  <p:cSld>
+    <p:spTree>
+      <p:nvGrpSpPr>
+        <p:cNvPr id="1" name=""/>
+        <p:cNvGrpSpPr/>
+        <p:nvPr/>
+      </p:nvGrpSpPr>
+      <p:grpSpPr>
+        <a:xfrm>
+          <a:off x="0" y="0"/>
+          <a:ext cx="0" cy="0"/>
+          <a:chOff x="0" y="0"/>
+          <a:chExt cx="0" cy="0"/>
+        </a:xfrm>
+      </p:grpSpPr>
+      <p:sp>
+        <p:nvSpPr>
+          <p:cNvPr id="2" name="Slide Image Placeholder 1"/>
+          <p:cNvSpPr>
+            <a:spLocks noGrp="1" noRot="1" noChangeAspect="1"/>
+          </p:cNvSpPr>
+          <p:nvPr>
+            <p:ph type="sldImg"/>
+          </p:nvPr>
+        </p:nvSpPr>
+        <p:spPr/>
+      </p:sp>
+      <p:sp>
+        <p:nvSpPr>
+          <p:cNvPr id="3" name="Notes Placeholder 2"/>
+          <p:cNvSpPr>
+            <a:spLocks noGrp="1"/>
+          </p:cNvSpPr>
+          <p:nvPr>
+            <p:ph type="body" idx="1"/>
+          </p:nvPr>
+        </p:nvSpPr>
+        <p:spPr/>
+        <p:txBody>
+          <a:bodyPr/>
+          <a:lstStyle/>
+          <a:p>
+            <a:r>
+              <a:rPr lang="en-US" dirty="0"/>
+              <a:t/>
+            </a:r>
+            <a:endParaRPr lang="en-US" dirty="0"/>
+          </a:p>
+        </p:txBody>
+      </p:sp>
+      <p:sp>
+        <p:nvSpPr>
+          <p:cNvPr id="4" name="Slide Number Placeholder 3"/>
+          <p:cNvSpPr>
+            <a:spLocks noGrp="1"/>
+          </p:cNvSpPr>
+          <p:nvPr>
+            <p:ph type="sldNum" sz="quarter" idx="10"/>
+          </p:nvPr>
+        </p:nvSpPr>
+        <p:spPr/>
+        <p:txBody>
+          <a:bodyPr/>
+          <a:lstStyle/>
+          <a:p>
+            <a:fld id="{F7021451-1387-4CA6-816F-3879F97B5CBC}" type="slidenum">
+              <a:rPr lang="en-US"/>
+              <a:t>19</a:t>
+            </a:fld>
+            <a:endParaRPr lang="en-US"/>
+          </a:p>
+        </p:txBody>
+      </p:sp>
+    </p:spTree>
+    <p:extLst>
+      <p:ext uri="{BB962C8B-B14F-4D97-AF65-F5344CB8AC3E}">
+        <p14:creationId xmlns:p14="http://schemas.microsoft.com/office/powerpoint/2010/main" val="1024086991"/>
+      </p:ext>
+    </p:extLst>
+  </p:cSld>
+  <p:clrMapOvr>
+    <a:masterClrMapping/>
+  </p:clrMapOvr>
+</p:notes>
+</file>
+
 <file path=ppt/notesSlides/notesSlide2.xml><?xml version="1.0" encoding="utf-8"?>
 <p:notes xmlns:a="http://schemas.openxmlformats.org/drawingml/2006/main" xmlns:r="http://schemas.openxmlformats.org/officeDocument/2006/relationships" xmlns:p="http://schemas.openxmlformats.org/presentationml/2006/main">
   <p:cSld>
@@ -800,6 +1513,94 @@
             <a:fld id="{F7021451-1387-4CA6-816F-3879F97B5CBC}" type="slidenum">
               <a:rPr lang="en-US"/>
               <a:t>2</a:t>
+            </a:fld>
+            <a:endParaRPr lang="en-US"/>
+          </a:p>
+        </p:txBody>
+      </p:sp>
+    </p:spTree>
+    <p:extLst>
+      <p:ext uri="{BB962C8B-B14F-4D97-AF65-F5344CB8AC3E}">
+        <p14:creationId xmlns:p14="http://schemas.microsoft.com/office/powerpoint/2010/main" val="1024086991"/>
+      </p:ext>
+    </p:extLst>
+  </p:cSld>
+  <p:clrMapOvr>
+    <a:masterClrMapping/>
+  </p:clrMapOvr>
+</p:notes>
+</file>
+
+<file path=ppt/notesSlides/notesSlide20.xml><?xml version="1.0" encoding="utf-8"?>
+<p:notes xmlns:a="http://schemas.openxmlformats.org/drawingml/2006/main" xmlns:r="http://schemas.openxmlformats.org/officeDocument/2006/relationships" xmlns:p="http://schemas.openxmlformats.org/presentationml/2006/main">
+  <p:cSld>
+    <p:spTree>
+      <p:nvGrpSpPr>
+        <p:cNvPr id="1" name=""/>
+        <p:cNvGrpSpPr/>
+        <p:nvPr/>
+      </p:nvGrpSpPr>
+      <p:grpSpPr>
+        <a:xfrm>
+          <a:off x="0" y="0"/>
+          <a:ext cx="0" cy="0"/>
+          <a:chOff x="0" y="0"/>
+          <a:chExt cx="0" cy="0"/>
+        </a:xfrm>
+      </p:grpSpPr>
+      <p:sp>
+        <p:nvSpPr>
+          <p:cNvPr id="2" name="Slide Image Placeholder 1"/>
+          <p:cNvSpPr>
+            <a:spLocks noGrp="1" noRot="1" noChangeAspect="1"/>
+          </p:cNvSpPr>
+          <p:nvPr>
+            <p:ph type="sldImg"/>
+          </p:nvPr>
+        </p:nvSpPr>
+        <p:spPr/>
+      </p:sp>
+      <p:sp>
+        <p:nvSpPr>
+          <p:cNvPr id="3" name="Notes Placeholder 2"/>
+          <p:cNvSpPr>
+            <a:spLocks noGrp="1"/>
+          </p:cNvSpPr>
+          <p:nvPr>
+            <p:ph type="body" idx="1"/>
+          </p:nvPr>
+        </p:nvSpPr>
+        <p:spPr/>
+        <p:txBody>
+          <a:bodyPr/>
+          <a:lstStyle/>
+          <a:p>
+            <a:r>
+              <a:rPr lang="en-US" dirty="0"/>
+              <a:t/>
+            </a:r>
+            <a:endParaRPr lang="en-US" dirty="0"/>
+          </a:p>
+        </p:txBody>
+      </p:sp>
+      <p:sp>
+        <p:nvSpPr>
+          <p:cNvPr id="4" name="Slide Number Placeholder 3"/>
+          <p:cNvSpPr>
+            <a:spLocks noGrp="1"/>
+          </p:cNvSpPr>
+          <p:nvPr>
+            <p:ph type="sldNum" sz="quarter" idx="10"/>
+          </p:nvPr>
+        </p:nvSpPr>
+        <p:spPr/>
+        <p:txBody>
+          <a:bodyPr/>
+          <a:lstStyle/>
+          <a:p>
+            <a:fld id="{F7021451-1387-4CA6-816F-3879F97B5CBC}" type="slidenum">
+              <a:rPr lang="en-US"/>
+              <a:t>20</a:t>
             </a:fld>
             <a:endParaRPr lang="en-US"/>
           </a:p>
@@ -2011,102 +2812,6 @@
         </p:nvSpPr>
         <p:spPr>
           <a:xfrm>
-            <a:off x="406301" y="1223963"/>
-            <a:ext cx="8498026" cy="274290"/>
-          </a:xfrm>
-          <a:prstGeom prst="rect">
-            <a:avLst/>
-          </a:prstGeom>
-          <a:noFill/>
-          <a:ln/>
-        </p:spPr>
-        <p:txBody>
-          <a:bodyPr wrap="square" lIns="0" tIns="0" rIns="0" bIns="0" rtlCol="0" anchor="t"/>
-          <a:lstStyle/>
-          <a:p>
-            <a:pPr algn="l" indent="0" marL="0">
-              <a:lnSpc>
-                <a:spcPts val="2160"/>
-              </a:lnSpc>
-              <a:spcBef>
-                <a:spcPts val="600"/>
-              </a:spcBef>
-              <a:spcAft>
-                <a:spcPts val="800"/>
-              </a:spcAft>
-              <a:buNone/>
-            </a:pPr>
-            <a:r>
-              <a:rPr lang="en-US" sz="1800" b="1" dirty="0">
-                <a:solidFill>
-                  <a:srgbClr val="FE4447"/>
-                </a:solidFill>
-                <a:latin typeface="Georgia" pitchFamily="34" charset="0"/>
-                <a:ea typeface="Georgia" pitchFamily="34" charset="-122"/>
-                <a:cs typeface="Georgia" pitchFamily="34" charset="-120"/>
-              </a:rPr>
-              <a:t>Learning objective</a:t>
-            </a:r>
-            <a:endParaRPr lang="en-US" sz="1800" dirty="0"/>
-          </a:p>
-        </p:txBody>
-      </p:sp>
-      <p:sp>
-        <p:nvSpPr>
-          <p:cNvPr id="6" name="Text 4"/>
-          <p:cNvSpPr/>
-          <p:nvPr/>
-        </p:nvSpPr>
-        <p:spPr>
-          <a:xfrm>
-            <a:off x="406301" y="1637854"/>
-            <a:ext cx="8498026" cy="426541"/>
-          </a:xfrm>
-          <a:prstGeom prst="rect">
-            <a:avLst/>
-          </a:prstGeom>
-          <a:noFill/>
-          <a:ln/>
-        </p:spPr>
-        <p:txBody>
-          <a:bodyPr wrap="square" lIns="0" tIns="0" rIns="0" bIns="0" rtlCol="0" anchor="t"/>
-          <a:lstStyle/>
-          <a:p>
-            <a:pPr algn="l" indent="0" marL="0">
-              <a:lnSpc>
-                <a:spcPts val="1680"/>
-              </a:lnSpc>
-              <a:spcBef>
-                <a:spcPts val="300"/>
-              </a:spcBef>
-              <a:spcAft>
-                <a:spcPts val="300"/>
-              </a:spcAft>
-              <a:buNone/>
-            </a:pPr>
-            <a:r>
-              <a:rPr lang="en-US" sz="1200" dirty="0">
-                <a:solidFill>
-                  <a:srgbClr val="1C2833"/>
-                </a:solidFill>
-                <a:latin typeface="Arial" pitchFamily="34" charset="0"/>
-                <a:ea typeface="Arial" pitchFamily="34" charset="-122"/>
-                <a:cs typeface="Arial" pitchFamily="34" charset="-120"/>
-              </a:rPr>
-              <a:t>By the end of this lesson, students will have rehearsed their 4-minute share at least once with structured peer feedback, and will have a clear, written list of refinements for the Day 10 presentation.</a:t>
-            </a:r>
-            <a:endParaRPr lang="en-US" sz="1200" dirty="0"/>
-          </a:p>
-        </p:txBody>
-      </p:sp>
-      <p:sp>
-        <p:nvSpPr>
-          <p:cNvPr id="7" name="Text 5"/>
-          <p:cNvSpPr/>
-          <p:nvPr/>
-        </p:nvSpPr>
-        <p:spPr>
-          <a:xfrm>
             <a:off x="406301" y="4434929"/>
             <a:ext cx="8498026" cy="213271"/>
           </a:xfrm>
@@ -2251,7 +2956,7 @@
                 <a:ea typeface="Georgia" pitchFamily="34" charset="-122"/>
                 <a:cs typeface="Georgia" pitchFamily="34" charset="-120"/>
               </a:rPr>
-              <a:t>Teacher notes</a:t>
+              <a:t>Activity (27 min) — Rehearse + feedback</a:t>
             </a:r>
             <a:endParaRPr lang="en-US" sz="1800" dirty="0"/>
           </a:p>
@@ -2266,7 +2971,7 @@
         <p:spPr>
           <a:xfrm>
             <a:off x="406301" y="870942"/>
-            <a:ext cx="8498026" cy="1706166"/>
+            <a:ext cx="8498026" cy="222796"/>
           </a:xfrm>
           <a:prstGeom prst="rect">
             <a:avLst/>
@@ -2299,7 +3004,7 @@
                 <a:ea typeface="Arial" pitchFamily="34" charset="-122"/>
                 <a:cs typeface="Arial" pitchFamily="34" charset="-120"/>
               </a:rPr>
-              <a:t>– The students who most resist rehearsing today are the ones who most need it. Don't permit "I'll wing it." Walk over and say: </a:t>
+              <a:t>See </a:t>
             </a:r>
             <a:pPr algn="l" indent="0" marL="0">
               <a:lnSpc>
@@ -2314,15 +3019,15 @@
               <a:buNone/>
             </a:pPr>
             <a:r>
-              <a:rPr lang="en-US" sz="1200" i="1" dirty="0">
-                <a:solidFill>
-                  <a:srgbClr val="1C2833"/>
-                </a:solidFill>
-                <a:latin typeface="Arial" pitchFamily="34" charset="0"/>
-                <a:ea typeface="Arial" pitchFamily="34" charset="-122"/>
-                <a:cs typeface="Arial" pitchFamily="34" charset="-120"/>
-              </a:rPr>
-              <a:t>"Show me the first sentence. Now the second."</a:t>
+              <a:rPr lang="en-US" sz="1200" dirty="0">
+                <a:solidFill>
+                  <a:srgbClr val="1C2833"/>
+                </a:solidFill>
+                <a:latin typeface="Arial" pitchFamily="34" charset="0"/>
+                <a:ea typeface="Arial" pitchFamily="34" charset="-122"/>
+                <a:cs typeface="Arial" pitchFamily="34" charset="-120"/>
+              </a:rPr>
+              <a:t>activities/activity-03-rehearsal.md</a:t>
             </a:r>
             <a:pPr algn="l" indent="0" marL="0">
               <a:lnSpc>
@@ -2345,30 +3050,7 @@
                 <a:ea typeface="Arial" pitchFamily="34" charset="-122"/>
                 <a:cs typeface="Arial" pitchFamily="34" charset="-120"/>
               </a:rPr>
-              <a:t> – Watch the timing. Most students undershoot on Process and overshoot on Artefact. Re-balance during the feedback step. – The "I don't know" move in Q&amp;A is a real teachable moment. Drop in on a few rehearsals and ask a deliberately hard question to surface how the student handles uncertainty. The handling is part of the rubric. – Permit students who really struggle to record their presentation as a video instead of presenting live. Same rubric. (Send the video by Day 10 morning.) – Final reminder: parents are coming tomorrow. Triple-check your invite went out by Day 5. If it didn't, send a same-day note tonight — </a:t>
-            </a:r>
-            <a:pPr algn="l" indent="0" marL="0">
-              <a:lnSpc>
-                <a:spcPts val="1680"/>
-              </a:lnSpc>
-              <a:spcBef>
-                <a:spcPts val="300"/>
-              </a:spcBef>
-              <a:spcAft>
-                <a:spcPts val="300"/>
-              </a:spcAft>
-              <a:buNone/>
-            </a:pPr>
-            <a:r>
-              <a:rPr lang="en-US" sz="1200" i="1" dirty="0">
-                <a:solidFill>
-                  <a:srgbClr val="1C2833"/>
-                </a:solidFill>
-                <a:latin typeface="Arial" pitchFamily="34" charset="0"/>
-                <a:ea typeface="Arial" pitchFamily="34" charset="-122"/>
-                <a:cs typeface="Arial" pitchFamily="34" charset="-120"/>
-              </a:rPr>
-              <a:t>"Tomorrow is project share day, 11:00–11:45, please join if you can."</a:t>
+              <a:t> for the full activity. Quick summary:</a:t>
             </a:r>
             <a:endParaRPr lang="en-US" sz="1200" dirty="0"/>
           </a:p>
@@ -2526,7 +3208,7 @@
                 <a:ea typeface="Georgia" pitchFamily="34" charset="-122"/>
                 <a:cs typeface="Georgia" pitchFamily="34" charset="-120"/>
               </a:rPr>
-              <a:t>Citation(s) used in this lesson</a:t>
+              <a:t>Activity (27 min) — Rehearse + feedback (cont.)</a:t>
             </a:r>
             <a:endParaRPr lang="en-US" sz="1800" dirty="0"/>
           </a:p>
@@ -2540,7 +3222,205 @@
         </p:nvSpPr>
         <p:spPr>
           <a:xfrm>
-            <a:off x="406301" y="870942"/>
+            <a:off x="634901" y="883593"/>
+            <a:ext cx="8102798" cy="1218902"/>
+          </a:xfrm>
+          <a:prstGeom prst="rect">
+            <a:avLst/>
+          </a:prstGeom>
+          <a:noFill/>
+          <a:ln/>
+        </p:spPr>
+        <p:txBody>
+          <a:bodyPr wrap="square" lIns="0" tIns="0" rIns="0" bIns="0" rtlCol="0" anchor="t"/>
+          <a:lstStyle/>
+          <a:p>
+            <a:pPr algn="l" marL="342900" indent="-342900">
+              <a:lnSpc>
+                <a:spcPts val="1620"/>
+              </a:lnSpc>
+              <a:spcAft>
+                <a:spcPts val="300"/>
+              </a:spcAft>
+              <a:buSzPct val="100000"/>
+              <a:buChar char="•"/>
+            </a:pPr>
+            <a:r>
+              <a:rPr lang="en-US" sz="1200" dirty="0">
+                <a:solidFill>
+                  <a:srgbClr val="1C2833"/>
+                </a:solidFill>
+                <a:latin typeface="Arial" pitchFamily="34" charset="0"/>
+                <a:ea typeface="Arial" pitchFamily="34" charset="-122"/>
+                <a:cs typeface="Arial" pitchFamily="34" charset="-120"/>
+              </a:rPr>
+              <a:t>Same pairs from Day 5 (so the feedback builds on existing rapport).</a:t>
+            </a:r>
+            <a:endParaRPr lang="en-US" sz="1200" dirty="0"/>
+          </a:p>
+          <a:p>
+            <a:pPr algn="l" marL="342900" indent="-342900">
+              <a:lnSpc>
+                <a:spcPts val="1620"/>
+              </a:lnSpc>
+              <a:spcAft>
+                <a:spcPts val="300"/>
+              </a:spcAft>
+              <a:buSzPct val="100000"/>
+              <a:buChar char="•"/>
+            </a:pPr>
+            <a:r>
+              <a:rPr lang="en-US" sz="1200" dirty="0">
+                <a:solidFill>
+                  <a:srgbClr val="1C2833"/>
+                </a:solidFill>
+                <a:latin typeface="Arial" pitchFamily="34" charset="0"/>
+                <a:ea typeface="Arial" pitchFamily="34" charset="-122"/>
+                <a:cs typeface="Arial" pitchFamily="34" charset="-120"/>
+              </a:rPr>
+              <a:t>Each direction: 4-minute share + 1-minute Q&amp;A + 5 minutes feedback. 10 minutes per direction × 2 = 20 minutes. Plus 5 minutes joint refinement.</a:t>
+            </a:r>
+            <a:endParaRPr lang="en-US" sz="1200" dirty="0"/>
+          </a:p>
+          <a:p>
+            <a:pPr algn="l" marL="342900" indent="-342900">
+              <a:lnSpc>
+                <a:spcPts val="1620"/>
+              </a:lnSpc>
+              <a:spcAft>
+                <a:spcPts val="300"/>
+              </a:spcAft>
+              <a:buSzPct val="100000"/>
+              <a:buChar char="•"/>
+            </a:pPr>
+            <a:r>
+              <a:rPr lang="en-US" sz="1200" dirty="0">
+                <a:solidFill>
+                  <a:srgbClr val="1C2833"/>
+                </a:solidFill>
+                <a:latin typeface="Arial" pitchFamily="34" charset="0"/>
+                <a:ea typeface="Arial" pitchFamily="34" charset="-122"/>
+                <a:cs typeface="Arial" pitchFamily="34" charset="-120"/>
+              </a:rPr>
+              <a:t>Both students complete the </a:t>
+            </a:r>
+            <a:pPr algn="l" indent="0" marL="0">
+              <a:lnSpc>
+                <a:spcPts val="1620"/>
+              </a:lnSpc>
+              <a:spcAft>
+                <a:spcPts val="300"/>
+              </a:spcAft>
+              <a:buNone/>
+            </a:pPr>
+            <a:r>
+              <a:rPr lang="en-US" sz="1200" b="1" dirty="0">
+                <a:solidFill>
+                  <a:srgbClr val="1C2833"/>
+                </a:solidFill>
+                <a:latin typeface="Arial" pitchFamily="34" charset="0"/>
+                <a:ea typeface="Arial" pitchFamily="34" charset="-122"/>
+                <a:cs typeface="Arial" pitchFamily="34" charset="-120"/>
+              </a:rPr>
+              <a:t>Rehearsal Feedback Sheet</a:t>
+            </a:r>
+            <a:pPr algn="l" indent="0" marL="0">
+              <a:lnSpc>
+                <a:spcPts val="1620"/>
+              </a:lnSpc>
+              <a:spcAft>
+                <a:spcPts val="300"/>
+              </a:spcAft>
+              <a:buNone/>
+            </a:pPr>
+            <a:r>
+              <a:rPr lang="en-US" sz="1200" dirty="0">
+                <a:solidFill>
+                  <a:srgbClr val="1C2833"/>
+                </a:solidFill>
+                <a:latin typeface="Arial" pitchFamily="34" charset="0"/>
+                <a:ea typeface="Arial" pitchFamily="34" charset="-122"/>
+                <a:cs typeface="Arial" pitchFamily="34" charset="-120"/>
+              </a:rPr>
+              <a:t> for each other.</a:t>
+            </a:r>
+            <a:endParaRPr lang="en-US" sz="1200" dirty="0"/>
+          </a:p>
+          <a:p>
+            <a:pPr algn="l" marL="342900" indent="-342900">
+              <a:lnSpc>
+                <a:spcPts val="1620"/>
+              </a:lnSpc>
+              <a:spcAft>
+                <a:spcPts val="300"/>
+              </a:spcAft>
+              <a:buSzPct val="100000"/>
+              <a:buChar char="•"/>
+            </a:pPr>
+            <a:r>
+              <a:rPr lang="en-US" sz="1200" dirty="0">
+                <a:solidFill>
+                  <a:srgbClr val="1C2833"/>
+                </a:solidFill>
+                <a:latin typeface="Arial" pitchFamily="34" charset="0"/>
+                <a:ea typeface="Arial" pitchFamily="34" charset="-122"/>
+                <a:cs typeface="Arial" pitchFamily="34" charset="-120"/>
+              </a:rPr>
+              <a:t>Last 2 minutes of activity: each student writes </a:t>
+            </a:r>
+            <a:pPr algn="l" indent="0" marL="0">
+              <a:lnSpc>
+                <a:spcPts val="1620"/>
+              </a:lnSpc>
+              <a:spcAft>
+                <a:spcPts val="300"/>
+              </a:spcAft>
+              <a:buNone/>
+            </a:pPr>
+            <a:r>
+              <a:rPr lang="en-US" sz="1200" b="1" dirty="0">
+                <a:solidFill>
+                  <a:srgbClr val="1C2833"/>
+                </a:solidFill>
+                <a:latin typeface="Arial" pitchFamily="34" charset="0"/>
+                <a:ea typeface="Arial" pitchFamily="34" charset="-122"/>
+                <a:cs typeface="Arial" pitchFamily="34" charset="-120"/>
+              </a:rPr>
+              <a:t>three refinements</a:t>
+            </a:r>
+            <a:pPr algn="l" indent="0" marL="0">
+              <a:lnSpc>
+                <a:spcPts val="1620"/>
+              </a:lnSpc>
+              <a:spcAft>
+                <a:spcPts val="300"/>
+              </a:spcAft>
+              <a:buNone/>
+            </a:pPr>
+            <a:r>
+              <a:rPr lang="en-US" sz="1200" dirty="0">
+                <a:solidFill>
+                  <a:srgbClr val="1C2833"/>
+                </a:solidFill>
+                <a:latin typeface="Arial" pitchFamily="34" charset="0"/>
+                <a:ea typeface="Arial" pitchFamily="34" charset="-122"/>
+                <a:cs typeface="Arial" pitchFamily="34" charset="-120"/>
+              </a:rPr>
+              <a:t> for the actual presentation tomorrow.</a:t>
+            </a:r>
+            <a:endParaRPr lang="en-US" sz="1200" dirty="0"/>
+          </a:p>
+        </p:txBody>
+      </p:sp>
+      <p:sp>
+        <p:nvSpPr>
+          <p:cNvPr id="5" name="Text 3"/>
+          <p:cNvSpPr/>
+          <p:nvPr/>
+        </p:nvSpPr>
+        <p:spPr>
+          <a:xfrm>
+            <a:off x="406301" y="4434929"/>
             <a:ext cx="8498026" cy="213271"/>
           </a:xfrm>
           <a:prstGeom prst="rect">
@@ -2574,8 +3454,281 @@
                 <a:ea typeface="Arial" pitchFamily="34" charset="-122"/>
                 <a:cs typeface="Arial" pitchFamily="34" charset="-120"/>
               </a:rPr>
-              <a:t>– No new scripture citation. The rehearsal discipline echoes </a:t>
-            </a:r>
+              <a:t>Middle ·  · IKS Curriculum</a:t>
+            </a:r>
+            <a:endParaRPr lang="en-US" sz="1200" dirty="0"/>
+          </a:p>
+        </p:txBody>
+      </p:sp>
+    </p:spTree>
+  </p:cSld>
+  <p:clrMapOvr>
+    <a:masterClrMapping/>
+  </p:clrMapOvr>
+</p:sld>
+</file>
+
+<file path=ppt/slides/slide12.xml><?xml version="1.0" encoding="utf-8"?>
+<p:sld xmlns:a="http://schemas.openxmlformats.org/drawingml/2006/main" xmlns:r="http://schemas.openxmlformats.org/officeDocument/2006/relationships" xmlns:p="http://schemas.openxmlformats.org/presentationml/2006/main">
+  <p:cSld name="Slide 12">
+    <p:bg>
+      <p:bgPr>
+        <a:solidFill>
+          <a:srgbClr val="FFFFFF"/>
+        </a:solidFill>
+      </p:bgPr>
+    </p:bg>
+    <p:spTree>
+      <p:nvGrpSpPr>
+        <p:cNvPr id="1" name=""/>
+        <p:cNvGrpSpPr/>
+        <p:nvPr/>
+      </p:nvGrpSpPr>
+      <p:grpSpPr>
+        <a:xfrm>
+          <a:off x="0" y="0"/>
+          <a:ext cx="0" cy="0"/>
+          <a:chOff x="0" y="0"/>
+          <a:chExt cx="0" cy="0"/>
+        </a:xfrm>
+      </p:grpSpPr>
+      <p:sp>
+        <p:nvSpPr>
+          <p:cNvPr id="2" name="Text 0"/>
+          <p:cNvSpPr/>
+          <p:nvPr/>
+        </p:nvSpPr>
+        <p:spPr>
+          <a:xfrm>
+            <a:off x="0" y="0"/>
+            <a:ext cx="9144000" cy="101501"/>
+          </a:xfrm>
+          <a:prstGeom prst="rect">
+            <a:avLst/>
+          </a:prstGeom>
+          <a:solidFill>
+            <a:srgbClr val="277884"/>
+          </a:solidFill>
+          <a:ln/>
+        </p:spPr>
+        <p:txBody>
+          <a:bodyPr wrap="square" rtlCol="0" anchor="ctr"/>
+          <a:lstStyle/>
+          <a:p>
+            <a:pPr indent="0" marL="0">
+              <a:buNone/>
+            </a:pPr>
+            <a:endParaRPr lang="en-US" dirty="0"/>
+          </a:p>
+        </p:txBody>
+      </p:sp>
+      <p:sp>
+        <p:nvSpPr>
+          <p:cNvPr id="3" name="Text 1"/>
+          <p:cNvSpPr/>
+          <p:nvPr/>
+        </p:nvSpPr>
+        <p:spPr>
+          <a:xfrm>
+            <a:off x="406301" y="457051"/>
+            <a:ext cx="8498026" cy="274290"/>
+          </a:xfrm>
+          <a:prstGeom prst="rect">
+            <a:avLst/>
+          </a:prstGeom>
+          <a:noFill/>
+          <a:ln/>
+        </p:spPr>
+        <p:txBody>
+          <a:bodyPr wrap="square" lIns="0" tIns="0" rIns="0" bIns="0" rtlCol="0" anchor="t"/>
+          <a:lstStyle/>
+          <a:p>
+            <a:pPr algn="l" indent="0" marL="0">
+              <a:lnSpc>
+                <a:spcPts val="2160"/>
+              </a:lnSpc>
+              <a:spcBef>
+                <a:spcPts val="600"/>
+              </a:spcBef>
+              <a:spcAft>
+                <a:spcPts val="800"/>
+              </a:spcAft>
+              <a:buNone/>
+            </a:pPr>
+            <a:r>
+              <a:rPr lang="en-US" sz="1800" b="1" dirty="0">
+                <a:solidFill>
+                  <a:srgbClr val="FE4447"/>
+                </a:solidFill>
+                <a:latin typeface="Georgia" pitchFamily="34" charset="0"/>
+                <a:ea typeface="Georgia" pitchFamily="34" charset="-122"/>
+                <a:cs typeface="Georgia" pitchFamily="34" charset="-120"/>
+              </a:rPr>
+              <a:t>Wrap-up (5 min)</a:t>
+            </a:r>
+            <a:endParaRPr lang="en-US" sz="1800" dirty="0"/>
+          </a:p>
+        </p:txBody>
+      </p:sp>
+      <p:sp>
+        <p:nvSpPr>
+          <p:cNvPr id="4" name="Text 2"/>
+          <p:cNvSpPr/>
+          <p:nvPr/>
+        </p:nvSpPr>
+        <p:spPr>
+          <a:xfrm>
+            <a:off x="634901" y="883593"/>
+            <a:ext cx="8102798" cy="1013222"/>
+          </a:xfrm>
+          <a:prstGeom prst="rect">
+            <a:avLst/>
+          </a:prstGeom>
+          <a:noFill/>
+          <a:ln/>
+        </p:spPr>
+        <p:txBody>
+          <a:bodyPr wrap="square" lIns="0" tIns="0" rIns="0" bIns="0" rtlCol="0" anchor="t"/>
+          <a:lstStyle/>
+          <a:p>
+            <a:pPr algn="l" marL="342900" indent="-342900">
+              <a:lnSpc>
+                <a:spcPts val="1620"/>
+              </a:lnSpc>
+              <a:spcAft>
+                <a:spcPts val="300"/>
+              </a:spcAft>
+              <a:buSzPct val="100000"/>
+              <a:buChar char="•"/>
+            </a:pPr>
+            <a:r>
+              <a:rPr lang="en-US" sz="1200" b="1" dirty="0">
+                <a:solidFill>
+                  <a:srgbClr val="1C2833"/>
+                </a:solidFill>
+                <a:latin typeface="Arial" pitchFamily="34" charset="0"/>
+                <a:ea typeface="Arial" pitchFamily="34" charset="-122"/>
+                <a:cs typeface="Arial" pitchFamily="34" charset="-120"/>
+              </a:rPr>
+              <a:t>Final pre-Day-10 check</a:t>
+            </a:r>
+            <a:pPr algn="l" indent="0" marL="0">
+              <a:lnSpc>
+                <a:spcPts val="1620"/>
+              </a:lnSpc>
+              <a:spcAft>
+                <a:spcPts val="300"/>
+              </a:spcAft>
+              <a:buNone/>
+            </a:pPr>
+            <a:r>
+              <a:rPr lang="en-US" sz="1200" dirty="0">
+                <a:solidFill>
+                  <a:srgbClr val="1C2833"/>
+                </a:solidFill>
+                <a:latin typeface="Arial" pitchFamily="34" charset="0"/>
+                <a:ea typeface="Arial" pitchFamily="34" charset="-122"/>
+                <a:cs typeface="Arial" pitchFamily="34" charset="-120"/>
+              </a:rPr>
+              <a:t> — show of hands:</a:t>
+            </a:r>
+            <a:endParaRPr lang="en-US" sz="1200" dirty="0"/>
+          </a:p>
+          <a:p>
+            <a:pPr algn="l" marL="342900" indent="-342900">
+              <a:lnSpc>
+                <a:spcPts val="1620"/>
+              </a:lnSpc>
+              <a:spcAft>
+                <a:spcPts val="300"/>
+              </a:spcAft>
+              <a:buSzPct val="100000"/>
+              <a:buChar char="•"/>
+            </a:pPr>
+            <a:r>
+              <a:rPr lang="en-US" sz="1200" dirty="0">
+                <a:solidFill>
+                  <a:srgbClr val="1C2833"/>
+                </a:solidFill>
+                <a:latin typeface="Arial" pitchFamily="34" charset="0"/>
+                <a:ea typeface="Arial" pitchFamily="34" charset="-122"/>
+                <a:cs typeface="Arial" pitchFamily="34" charset="-120"/>
+              </a:rPr>
+              <a:t>"Hands up if your artefact is finished." (Should be all hands.)</a:t>
+            </a:r>
+            <a:endParaRPr lang="en-US" sz="1200" dirty="0"/>
+          </a:p>
+          <a:p>
+            <a:pPr algn="l" marL="342900" indent="-342900">
+              <a:lnSpc>
+                <a:spcPts val="1620"/>
+              </a:lnSpc>
+              <a:spcAft>
+                <a:spcPts val="300"/>
+              </a:spcAft>
+              <a:buSzPct val="100000"/>
+              <a:buChar char="•"/>
+            </a:pPr>
+            <a:r>
+              <a:rPr lang="en-US" sz="1200" dirty="0">
+                <a:solidFill>
+                  <a:srgbClr val="1C2833"/>
+                </a:solidFill>
+                <a:latin typeface="Arial" pitchFamily="34" charset="0"/>
+                <a:ea typeface="Arial" pitchFamily="34" charset="-122"/>
+                <a:cs typeface="Arial" pitchFamily="34" charset="-120"/>
+              </a:rPr>
+              <a:t>"Hands up if your documentation is written." (Should be all hands.)</a:t>
+            </a:r>
+            <a:endParaRPr lang="en-US" sz="1200" dirty="0"/>
+          </a:p>
+          <a:p>
+            <a:pPr algn="l" marL="342900" indent="-342900">
+              <a:lnSpc>
+                <a:spcPts val="1620"/>
+              </a:lnSpc>
+              <a:spcAft>
+                <a:spcPts val="300"/>
+              </a:spcAft>
+              <a:buSzPct val="100000"/>
+              <a:buChar char="•"/>
+            </a:pPr>
+            <a:r>
+              <a:rPr lang="en-US" sz="1200" dirty="0">
+                <a:solidFill>
+                  <a:srgbClr val="1C2833"/>
+                </a:solidFill>
+                <a:latin typeface="Arial" pitchFamily="34" charset="0"/>
+                <a:ea typeface="Arial" pitchFamily="34" charset="-122"/>
+                <a:cs typeface="Arial" pitchFamily="34" charset="-120"/>
+              </a:rPr>
+              <a:t>"Hands up if you've rehearsed at least once." (Should be all hands.)</a:t>
+            </a:r>
+            <a:endParaRPr lang="en-US" sz="1200" dirty="0"/>
+          </a:p>
+        </p:txBody>
+      </p:sp>
+      <p:sp>
+        <p:nvSpPr>
+          <p:cNvPr id="5" name="Text 3"/>
+          <p:cNvSpPr/>
+          <p:nvPr/>
+        </p:nvSpPr>
+        <p:spPr>
+          <a:xfrm>
+            <a:off x="406301" y="1985665"/>
+            <a:ext cx="8498026" cy="213271"/>
+          </a:xfrm>
+          <a:prstGeom prst="rect">
+            <a:avLst/>
+          </a:prstGeom>
+          <a:noFill/>
+          <a:ln/>
+        </p:spPr>
+        <p:txBody>
+          <a:bodyPr wrap="square" lIns="0" tIns="0" rIns="0" bIns="0" rtlCol="0" anchor="t"/>
+          <a:lstStyle/>
+          <a:p>
             <a:pPr algn="l" indent="0" marL="0">
               <a:lnSpc>
                 <a:spcPts val="1680"/>
@@ -2589,6 +3742,254 @@
               <a:buNone/>
             </a:pPr>
             <a:r>
+              <a:rPr lang="en-US" sz="1200" dirty="0">
+                <a:solidFill>
+                  <a:srgbClr val="1C2833"/>
+                </a:solidFill>
+                <a:latin typeface="Arial" pitchFamily="34" charset="0"/>
+                <a:ea typeface="Arial" pitchFamily="34" charset="-122"/>
+                <a:cs typeface="Arial" pitchFamily="34" charset="-120"/>
+              </a:rPr>
+              <a:t>Any hand that stayed down — sit with that student for the next 5 minutes after class.</a:t>
+            </a:r>
+            <a:endParaRPr lang="en-US" sz="1200" dirty="0"/>
+          </a:p>
+        </p:txBody>
+      </p:sp>
+      <p:sp>
+        <p:nvSpPr>
+          <p:cNvPr id="6" name="Text 4"/>
+          <p:cNvSpPr/>
+          <p:nvPr/>
+        </p:nvSpPr>
+        <p:spPr>
+          <a:xfrm>
+            <a:off x="406301" y="4434929"/>
+            <a:ext cx="8498026" cy="213271"/>
+          </a:xfrm>
+          <a:prstGeom prst="rect">
+            <a:avLst/>
+          </a:prstGeom>
+          <a:noFill/>
+          <a:ln/>
+        </p:spPr>
+        <p:txBody>
+          <a:bodyPr wrap="square" lIns="0" tIns="0" rIns="0" bIns="0" rtlCol="0" anchor="t"/>
+          <a:lstStyle/>
+          <a:p>
+            <a:pPr algn="l" indent="0" marL="0">
+              <a:lnSpc>
+                <a:spcPts val="1680"/>
+              </a:lnSpc>
+              <a:spcBef>
+                <a:spcPts val="300"/>
+              </a:spcBef>
+              <a:spcAft>
+                <a:spcPts val="300"/>
+              </a:spcAft>
+              <a:buNone/>
+            </a:pPr>
+            <a:r>
+              <a:rPr lang="en-US" sz="1200" dirty="0">
+                <a:solidFill>
+                  <a:srgbClr val="1C2833"/>
+                </a:solidFill>
+                <a:latin typeface="Arial" pitchFamily="34" charset="0"/>
+                <a:ea typeface="Arial" pitchFamily="34" charset="-122"/>
+                <a:cs typeface="Arial" pitchFamily="34" charset="-120"/>
+              </a:rPr>
+              <a:t>Middle ·  · IKS Curriculum</a:t>
+            </a:r>
+            <a:endParaRPr lang="en-US" sz="1200" dirty="0"/>
+          </a:p>
+        </p:txBody>
+      </p:sp>
+    </p:spTree>
+  </p:cSld>
+  <p:clrMapOvr>
+    <a:masterClrMapping/>
+  </p:clrMapOvr>
+</p:sld>
+</file>
+
+<file path=ppt/slides/slide13.xml><?xml version="1.0" encoding="utf-8"?>
+<p:sld xmlns:a="http://schemas.openxmlformats.org/drawingml/2006/main" xmlns:r="http://schemas.openxmlformats.org/officeDocument/2006/relationships" xmlns:p="http://schemas.openxmlformats.org/presentationml/2006/main">
+  <p:cSld name="Slide 13">
+    <p:bg>
+      <p:bgPr>
+        <a:solidFill>
+          <a:srgbClr val="FFFFFF"/>
+        </a:solidFill>
+      </p:bgPr>
+    </p:bg>
+    <p:spTree>
+      <p:nvGrpSpPr>
+        <p:cNvPr id="1" name=""/>
+        <p:cNvGrpSpPr/>
+        <p:nvPr/>
+      </p:nvGrpSpPr>
+      <p:grpSpPr>
+        <a:xfrm>
+          <a:off x="0" y="0"/>
+          <a:ext cx="0" cy="0"/>
+          <a:chOff x="0" y="0"/>
+          <a:chExt cx="0" cy="0"/>
+        </a:xfrm>
+      </p:grpSpPr>
+      <p:sp>
+        <p:nvSpPr>
+          <p:cNvPr id="2" name="Text 0"/>
+          <p:cNvSpPr/>
+          <p:nvPr/>
+        </p:nvSpPr>
+        <p:spPr>
+          <a:xfrm>
+            <a:off x="0" y="0"/>
+            <a:ext cx="9144000" cy="101501"/>
+          </a:xfrm>
+          <a:prstGeom prst="rect">
+            <a:avLst/>
+          </a:prstGeom>
+          <a:solidFill>
+            <a:srgbClr val="277884"/>
+          </a:solidFill>
+          <a:ln/>
+        </p:spPr>
+        <p:txBody>
+          <a:bodyPr wrap="square" rtlCol="0" anchor="ctr"/>
+          <a:lstStyle/>
+          <a:p>
+            <a:pPr indent="0" marL="0">
+              <a:buNone/>
+            </a:pPr>
+            <a:endParaRPr lang="en-US" dirty="0"/>
+          </a:p>
+        </p:txBody>
+      </p:sp>
+      <p:sp>
+        <p:nvSpPr>
+          <p:cNvPr id="3" name="Text 1"/>
+          <p:cNvSpPr/>
+          <p:nvPr/>
+        </p:nvSpPr>
+        <p:spPr>
+          <a:xfrm>
+            <a:off x="406301" y="457051"/>
+            <a:ext cx="8498026" cy="274290"/>
+          </a:xfrm>
+          <a:prstGeom prst="rect">
+            <a:avLst/>
+          </a:prstGeom>
+          <a:noFill/>
+          <a:ln/>
+        </p:spPr>
+        <p:txBody>
+          <a:bodyPr wrap="square" lIns="0" tIns="0" rIns="0" bIns="0" rtlCol="0" anchor="t"/>
+          <a:lstStyle/>
+          <a:p>
+            <a:pPr algn="l" indent="0" marL="0">
+              <a:lnSpc>
+                <a:spcPts val="2160"/>
+              </a:lnSpc>
+              <a:spcBef>
+                <a:spcPts val="600"/>
+              </a:spcBef>
+              <a:spcAft>
+                <a:spcPts val="800"/>
+              </a:spcAft>
+              <a:buNone/>
+            </a:pPr>
+            <a:r>
+              <a:rPr lang="en-US" sz="1800" b="1" dirty="0">
+                <a:solidFill>
+                  <a:srgbClr val="FE4447"/>
+                </a:solidFill>
+                <a:latin typeface="Georgia" pitchFamily="34" charset="0"/>
+                <a:ea typeface="Georgia" pitchFamily="34" charset="-122"/>
+                <a:cs typeface="Georgia" pitchFamily="34" charset="-120"/>
+              </a:rPr>
+              <a:t>Wrap-up (5 min) (cont.)</a:t>
+            </a:r>
+            <a:endParaRPr lang="en-US" sz="1800" dirty="0"/>
+          </a:p>
+        </p:txBody>
+      </p:sp>
+      <p:sp>
+        <p:nvSpPr>
+          <p:cNvPr id="4" name="Text 2"/>
+          <p:cNvSpPr/>
+          <p:nvPr/>
+        </p:nvSpPr>
+        <p:spPr>
+          <a:xfrm>
+            <a:off x="634901" y="883593"/>
+            <a:ext cx="8102798" cy="731341"/>
+          </a:xfrm>
+          <a:prstGeom prst="rect">
+            <a:avLst/>
+          </a:prstGeom>
+          <a:noFill/>
+          <a:ln/>
+        </p:spPr>
+        <p:txBody>
+          <a:bodyPr wrap="square" lIns="0" tIns="0" rIns="0" bIns="0" rtlCol="0" anchor="t"/>
+          <a:lstStyle/>
+          <a:p>
+            <a:pPr algn="l" marL="342900" indent="-342900">
+              <a:lnSpc>
+                <a:spcPts val="1620"/>
+              </a:lnSpc>
+              <a:spcAft>
+                <a:spcPts val="300"/>
+              </a:spcAft>
+              <a:buSzPct val="100000"/>
+              <a:buChar char="•"/>
+            </a:pPr>
+            <a:r>
+              <a:rPr lang="en-US" sz="1200" dirty="0">
+                <a:solidFill>
+                  <a:srgbClr val="1C2833"/>
+                </a:solidFill>
+                <a:latin typeface="Arial" pitchFamily="34" charset="0"/>
+                <a:ea typeface="Arial" pitchFamily="34" charset="-122"/>
+                <a:cs typeface="Arial" pitchFamily="34" charset="-120"/>
+              </a:rPr>
+              <a:t>Journal entry: "Tomorrow I will start by saying ___. The thing I'm nervous about: ___. The thing I'm proud of: ___."</a:t>
+            </a:r>
+            <a:endParaRPr lang="en-US" sz="1200" dirty="0"/>
+          </a:p>
+          <a:p>
+            <a:pPr algn="l" marL="342900" indent="-342900">
+              <a:lnSpc>
+                <a:spcPts val="1620"/>
+              </a:lnSpc>
+              <a:spcAft>
+                <a:spcPts val="300"/>
+              </a:spcAft>
+              <a:buSzPct val="100000"/>
+              <a:buChar char="•"/>
+            </a:pPr>
+            <a:r>
+              <a:rPr lang="en-US" sz="1200" dirty="0">
+                <a:solidFill>
+                  <a:srgbClr val="1C2833"/>
+                </a:solidFill>
+                <a:latin typeface="Arial" pitchFamily="34" charset="0"/>
+                <a:ea typeface="Arial" pitchFamily="34" charset="-122"/>
+                <a:cs typeface="Arial" pitchFamily="34" charset="-120"/>
+              </a:rPr>
+              <a:t>Preview Day 10: </a:t>
+            </a:r>
+            <a:pPr algn="l" indent="0" marL="0">
+              <a:lnSpc>
+                <a:spcPts val="1620"/>
+              </a:lnSpc>
+              <a:spcAft>
+                <a:spcPts val="300"/>
+              </a:spcAft>
+              <a:buNone/>
+            </a:pPr>
+            <a:r>
               <a:rPr lang="en-US" sz="1200" i="1" dirty="0">
                 <a:solidFill>
                   <a:srgbClr val="1C2833"/>
@@ -2597,8 +3998,33 @@
                 <a:ea typeface="Arial" pitchFamily="34" charset="-122"/>
                 <a:cs typeface="Arial" pitchFamily="34" charset="-120"/>
               </a:rPr>
-              <a:t>abhyāsa</a:t>
-            </a:r>
+              <a:t>"Tomorrow is the share. The audience will include peers and a few parents and staff. You'll have 4 minutes + 1 minute Q&amp;A. Arrive 5 minutes early."</a:t>
+            </a:r>
+            <a:endParaRPr lang="en-US" sz="1200" dirty="0"/>
+          </a:p>
+        </p:txBody>
+      </p:sp>
+      <p:sp>
+        <p:nvSpPr>
+          <p:cNvPr id="5" name="Text 3"/>
+          <p:cNvSpPr/>
+          <p:nvPr/>
+        </p:nvSpPr>
+        <p:spPr>
+          <a:xfrm>
+            <a:off x="406301" y="4434929"/>
+            <a:ext cx="8498026" cy="213271"/>
+          </a:xfrm>
+          <a:prstGeom prst="rect">
+            <a:avLst/>
+          </a:prstGeom>
+          <a:noFill/>
+          <a:ln/>
+        </p:spPr>
+        <p:txBody>
+          <a:bodyPr wrap="square" lIns="0" tIns="0" rIns="0" bIns="0" rtlCol="0" anchor="t"/>
+          <a:lstStyle/>
+          <a:p>
             <a:pPr algn="l" indent="0" marL="0">
               <a:lnSpc>
                 <a:spcPts val="1680"/>
@@ -2620,7 +4046,2705 @@
                 <a:ea typeface="Arial" pitchFamily="34" charset="-122"/>
                 <a:cs typeface="Arial" pitchFamily="34" charset="-120"/>
               </a:rPr>
-              <a:t> (repeated practice, introduced Day 1).</a:t>
+              <a:t>Middle ·  · IKS Curriculum</a:t>
+            </a:r>
+            <a:endParaRPr lang="en-US" sz="1200" dirty="0"/>
+          </a:p>
+        </p:txBody>
+      </p:sp>
+    </p:spTree>
+  </p:cSld>
+  <p:clrMapOvr>
+    <a:masterClrMapping/>
+  </p:clrMapOvr>
+</p:sld>
+</file>
+
+<file path=ppt/slides/slide14.xml><?xml version="1.0" encoding="utf-8"?>
+<p:sld xmlns:a="http://schemas.openxmlformats.org/drawingml/2006/main" xmlns:r="http://schemas.openxmlformats.org/officeDocument/2006/relationships" xmlns:p="http://schemas.openxmlformats.org/presentationml/2006/main">
+  <p:cSld name="Slide 14">
+    <p:bg>
+      <p:bgPr>
+        <a:solidFill>
+          <a:srgbClr val="FFFFFF"/>
+        </a:solidFill>
+      </p:bgPr>
+    </p:bg>
+    <p:spTree>
+      <p:nvGrpSpPr>
+        <p:cNvPr id="1" name=""/>
+        <p:cNvGrpSpPr/>
+        <p:nvPr/>
+      </p:nvGrpSpPr>
+      <p:grpSpPr>
+        <a:xfrm>
+          <a:off x="0" y="0"/>
+          <a:ext cx="0" cy="0"/>
+          <a:chOff x="0" y="0"/>
+          <a:chExt cx="0" cy="0"/>
+        </a:xfrm>
+      </p:grpSpPr>
+      <p:sp>
+        <p:nvSpPr>
+          <p:cNvPr id="2" name="Text 0"/>
+          <p:cNvSpPr/>
+          <p:nvPr/>
+        </p:nvSpPr>
+        <p:spPr>
+          <a:xfrm>
+            <a:off x="0" y="0"/>
+            <a:ext cx="9144000" cy="101501"/>
+          </a:xfrm>
+          <a:prstGeom prst="rect">
+            <a:avLst/>
+          </a:prstGeom>
+          <a:solidFill>
+            <a:srgbClr val="277884"/>
+          </a:solidFill>
+          <a:ln/>
+        </p:spPr>
+        <p:txBody>
+          <a:bodyPr wrap="square" rtlCol="0" anchor="ctr"/>
+          <a:lstStyle/>
+          <a:p>
+            <a:pPr indent="0" marL="0">
+              <a:buNone/>
+            </a:pPr>
+            <a:endParaRPr lang="en-US" dirty="0"/>
+          </a:p>
+        </p:txBody>
+      </p:sp>
+      <p:sp>
+        <p:nvSpPr>
+          <p:cNvPr id="3" name="Text 1"/>
+          <p:cNvSpPr/>
+          <p:nvPr/>
+        </p:nvSpPr>
+        <p:spPr>
+          <a:xfrm>
+            <a:off x="406301" y="457051"/>
+            <a:ext cx="8498026" cy="274290"/>
+          </a:xfrm>
+          <a:prstGeom prst="rect">
+            <a:avLst/>
+          </a:prstGeom>
+          <a:noFill/>
+          <a:ln/>
+        </p:spPr>
+        <p:txBody>
+          <a:bodyPr wrap="square" lIns="0" tIns="0" rIns="0" bIns="0" rtlCol="0" anchor="t"/>
+          <a:lstStyle/>
+          <a:p>
+            <a:pPr algn="l" indent="0" marL="0">
+              <a:lnSpc>
+                <a:spcPts val="2160"/>
+              </a:lnSpc>
+              <a:spcBef>
+                <a:spcPts val="600"/>
+              </a:spcBef>
+              <a:spcAft>
+                <a:spcPts val="800"/>
+              </a:spcAft>
+              <a:buNone/>
+            </a:pPr>
+            <a:r>
+              <a:rPr lang="en-US" sz="1800" b="1" dirty="0">
+                <a:solidFill>
+                  <a:srgbClr val="FE4447"/>
+                </a:solidFill>
+                <a:latin typeface="Georgia" pitchFamily="34" charset="0"/>
+                <a:ea typeface="Georgia" pitchFamily="34" charset="-122"/>
+                <a:cs typeface="Georgia" pitchFamily="34" charset="-120"/>
+              </a:rPr>
+              <a:t>Student-facing content</a:t>
+            </a:r>
+            <a:endParaRPr lang="en-US" sz="1800" dirty="0"/>
+          </a:p>
+        </p:txBody>
+      </p:sp>
+      <p:sp>
+        <p:nvSpPr>
+          <p:cNvPr id="4" name="Text 2"/>
+          <p:cNvSpPr/>
+          <p:nvPr/>
+        </p:nvSpPr>
+        <p:spPr>
+          <a:xfrm>
+            <a:off x="406301" y="883593"/>
+            <a:ext cx="8331398" cy="3226594"/>
+          </a:xfrm>
+          <a:prstGeom prst="rect">
+            <a:avLst/>
+          </a:prstGeom>
+          <a:solidFill>
+            <a:srgbClr val="F4F8F9"/>
+          </a:solidFill>
+          <a:ln/>
+        </p:spPr>
+        <p:txBody>
+          <a:bodyPr wrap="square" rtlCol="0" anchor="ctr"/>
+          <a:lstStyle/>
+          <a:p>
+            <a:pPr indent="0" marL="0">
+              <a:buNone/>
+            </a:pPr>
+            <a:endParaRPr lang="en-US" dirty="0"/>
+          </a:p>
+        </p:txBody>
+      </p:sp>
+      <p:sp>
+        <p:nvSpPr>
+          <p:cNvPr id="5" name="Shape 3"/>
+          <p:cNvSpPr/>
+          <p:nvPr/>
+        </p:nvSpPr>
+        <p:spPr>
+          <a:xfrm>
+            <a:off x="434876" y="883593"/>
+            <a:ext cx="0" cy="3226594"/>
+          </a:xfrm>
+          <a:prstGeom prst="line">
+            <a:avLst/>
+          </a:prstGeom>
+          <a:noFill/>
+          <a:ln w="57150">
+            <a:solidFill>
+              <a:srgbClr val="FE4447"/>
+            </a:solidFill>
+            <a:prstDash val="solid"/>
+          </a:ln>
+        </p:spPr>
+      </p:sp>
+      <p:sp>
+        <p:nvSpPr>
+          <p:cNvPr id="6" name="Text 4"/>
+          <p:cNvSpPr/>
+          <p:nvPr/>
+        </p:nvSpPr>
+        <p:spPr>
+          <a:xfrm>
+            <a:off x="692051" y="1074093"/>
+            <a:ext cx="7973389" cy="230981"/>
+          </a:xfrm>
+          <a:prstGeom prst="rect">
+            <a:avLst/>
+          </a:prstGeom>
+          <a:noFill/>
+          <a:ln/>
+        </p:spPr>
+        <p:txBody>
+          <a:bodyPr wrap="square" lIns="0" tIns="0" rIns="0" bIns="0" rtlCol="0" anchor="t"/>
+          <a:lstStyle/>
+          <a:p>
+            <a:pPr algn="l" indent="0" marL="0">
+              <a:lnSpc>
+                <a:spcPts val="1820"/>
+              </a:lnSpc>
+              <a:spcBef>
+                <a:spcPts val="300"/>
+              </a:spcBef>
+              <a:spcAft>
+                <a:spcPts val="300"/>
+              </a:spcAft>
+              <a:buNone/>
+            </a:pPr>
+            <a:r>
+              <a:rPr lang="en-US" sz="1300" b="1" i="1" dirty="0">
+                <a:solidFill>
+                  <a:srgbClr val="1C2833"/>
+                </a:solidFill>
+                <a:latin typeface="Georgia" pitchFamily="34" charset="0"/>
+                <a:ea typeface="Georgia" pitchFamily="34" charset="-122"/>
+                <a:cs typeface="Georgia" pitchFamily="34" charset="-120"/>
+              </a:rPr>
+              <a:t>Today you rehearse.</a:t>
+            </a:r>
+            <a:endParaRPr lang="en-US" sz="1300" dirty="0"/>
+          </a:p>
+        </p:txBody>
+      </p:sp>
+      <p:sp>
+        <p:nvSpPr>
+          <p:cNvPr id="7" name="Text 5"/>
+          <p:cNvSpPr/>
+          <p:nvPr/>
+        </p:nvSpPr>
+        <p:spPr>
+          <a:xfrm>
+            <a:off x="692051" y="1343174"/>
+            <a:ext cx="7973389" cy="230981"/>
+          </a:xfrm>
+          <a:prstGeom prst="rect">
+            <a:avLst/>
+          </a:prstGeom>
+          <a:noFill/>
+          <a:ln/>
+        </p:spPr>
+        <p:txBody>
+          <a:bodyPr wrap="square" lIns="0" tIns="0" rIns="0" bIns="0" rtlCol="0" anchor="t"/>
+          <a:lstStyle/>
+          <a:p>
+            <a:pPr algn="l" indent="0" marL="0">
+              <a:lnSpc>
+                <a:spcPts val="1820"/>
+              </a:lnSpc>
+              <a:spcBef>
+                <a:spcPts val="300"/>
+              </a:spcBef>
+              <a:spcAft>
+                <a:spcPts val="300"/>
+              </a:spcAft>
+              <a:buNone/>
+            </a:pPr>
+            <a:r>
+              <a:rPr lang="en-US" sz="1300" dirty="0">
+                <a:solidFill>
+                  <a:srgbClr val="1C2833"/>
+                </a:solidFill>
+                <a:latin typeface="Georgia" pitchFamily="34" charset="0"/>
+                <a:ea typeface="Georgia" pitchFamily="34" charset="-122"/>
+                <a:cs typeface="Georgia" pitchFamily="34" charset="-120"/>
+              </a:rPr>
+              <a:t>Your share is </a:t>
+            </a:r>
+            <a:pPr algn="l" indent="0" marL="0">
+              <a:lnSpc>
+                <a:spcPts val="1820"/>
+              </a:lnSpc>
+              <a:spcBef>
+                <a:spcPts val="300"/>
+              </a:spcBef>
+              <a:spcAft>
+                <a:spcPts val="300"/>
+              </a:spcAft>
+              <a:buNone/>
+            </a:pPr>
+            <a:r>
+              <a:rPr lang="en-US" sz="1300" b="1" i="1" dirty="0">
+                <a:solidFill>
+                  <a:srgbClr val="1C2833"/>
+                </a:solidFill>
+                <a:latin typeface="Georgia" pitchFamily="34" charset="0"/>
+                <a:ea typeface="Georgia" pitchFamily="34" charset="-122"/>
+                <a:cs typeface="Georgia" pitchFamily="34" charset="-120"/>
+              </a:rPr>
+              <a:t>4 minutes + 1 minute Q&amp;A</a:t>
+            </a:r>
+            <a:pPr algn="l" indent="0" marL="0">
+              <a:lnSpc>
+                <a:spcPts val="1820"/>
+              </a:lnSpc>
+              <a:spcBef>
+                <a:spcPts val="300"/>
+              </a:spcBef>
+              <a:spcAft>
+                <a:spcPts val="300"/>
+              </a:spcAft>
+              <a:buNone/>
+            </a:pPr>
+            <a:r>
+              <a:rPr lang="en-US" sz="1300" dirty="0">
+                <a:solidFill>
+                  <a:srgbClr val="1C2833"/>
+                </a:solidFill>
+                <a:latin typeface="Georgia" pitchFamily="34" charset="0"/>
+                <a:ea typeface="Georgia" pitchFamily="34" charset="-122"/>
+                <a:cs typeface="Georgia" pitchFamily="34" charset="-120"/>
+              </a:rPr>
+              <a:t>.</a:t>
+            </a:r>
+            <a:endParaRPr lang="en-US" sz="1300" dirty="0"/>
+          </a:p>
+        </p:txBody>
+      </p:sp>
+      <p:sp>
+        <p:nvSpPr>
+          <p:cNvPr id="8" name="Text 6"/>
+          <p:cNvSpPr/>
+          <p:nvPr/>
+        </p:nvSpPr>
+        <p:spPr>
+          <a:xfrm>
+            <a:off x="692051" y="1612255"/>
+            <a:ext cx="7973389" cy="230981"/>
+          </a:xfrm>
+          <a:prstGeom prst="rect">
+            <a:avLst/>
+          </a:prstGeom>
+          <a:noFill/>
+          <a:ln/>
+        </p:spPr>
+        <p:txBody>
+          <a:bodyPr wrap="square" lIns="0" tIns="0" rIns="0" bIns="0" rtlCol="0" anchor="t"/>
+          <a:lstStyle/>
+          <a:p>
+            <a:pPr algn="l" indent="0" marL="0">
+              <a:lnSpc>
+                <a:spcPts val="1820"/>
+              </a:lnSpc>
+              <a:spcBef>
+                <a:spcPts val="300"/>
+              </a:spcBef>
+              <a:spcAft>
+                <a:spcPts val="300"/>
+              </a:spcAft>
+              <a:buNone/>
+            </a:pPr>
+            <a:r>
+              <a:rPr lang="en-US" sz="1300" i="1" dirty="0">
+                <a:solidFill>
+                  <a:srgbClr val="1C2833"/>
+                </a:solidFill>
+                <a:latin typeface="Georgia" pitchFamily="34" charset="0"/>
+                <a:ea typeface="Georgia" pitchFamily="34" charset="-122"/>
+                <a:cs typeface="Georgia" pitchFamily="34" charset="-120"/>
+              </a:rPr>
+              <a:t>The structure:</a:t>
+            </a:r>
+            <a:endParaRPr lang="en-US" sz="1300" dirty="0"/>
+          </a:p>
+        </p:txBody>
+      </p:sp>
+      <p:sp>
+        <p:nvSpPr>
+          <p:cNvPr id="9" name="Text 7"/>
+          <p:cNvSpPr/>
+          <p:nvPr/>
+        </p:nvSpPr>
+        <p:spPr>
+          <a:xfrm>
+            <a:off x="692051" y="1881336"/>
+            <a:ext cx="7973389" cy="692944"/>
+          </a:xfrm>
+          <a:prstGeom prst="rect">
+            <a:avLst/>
+          </a:prstGeom>
+          <a:noFill/>
+          <a:ln/>
+        </p:spPr>
+        <p:txBody>
+          <a:bodyPr wrap="square" lIns="0" tIns="0" rIns="0" bIns="0" rtlCol="0" anchor="t"/>
+          <a:lstStyle/>
+          <a:p>
+            <a:pPr algn="l" indent="0" marL="0">
+              <a:lnSpc>
+                <a:spcPts val="1820"/>
+              </a:lnSpc>
+              <a:spcBef>
+                <a:spcPts val="300"/>
+              </a:spcBef>
+              <a:spcAft>
+                <a:spcPts val="300"/>
+              </a:spcAft>
+              <a:buNone/>
+            </a:pPr>
+            <a:r>
+              <a:rPr lang="en-US" sz="1300" i="1" dirty="0">
+                <a:solidFill>
+                  <a:srgbClr val="1C2833"/>
+                </a:solidFill>
+                <a:latin typeface="Georgia" pitchFamily="34" charset="0"/>
+                <a:ea typeface="Georgia" pitchFamily="34" charset="-122"/>
+                <a:cs typeface="Georgia" pitchFamily="34" charset="-120"/>
+              </a:rPr>
+              <a:t>| Time | What you say | |------|---------------| | 0:00–0:30 | The question + the project | | 0:30–1:30 | The process | | 1:30–2:30 | The sources | | 2:30–3:30 | The artefact (show it, walk through one feature) | | 3:30–4:00 | The reflection (one win, one miss) |</a:t>
+            </a:r>
+            <a:endParaRPr lang="en-US" sz="1300" dirty="0"/>
+          </a:p>
+        </p:txBody>
+      </p:sp>
+      <p:sp>
+        <p:nvSpPr>
+          <p:cNvPr id="10" name="Text 8"/>
+          <p:cNvSpPr/>
+          <p:nvPr/>
+        </p:nvSpPr>
+        <p:spPr>
+          <a:xfrm>
+            <a:off x="692051" y="2612380"/>
+            <a:ext cx="7973389" cy="230981"/>
+          </a:xfrm>
+          <a:prstGeom prst="rect">
+            <a:avLst/>
+          </a:prstGeom>
+          <a:noFill/>
+          <a:ln/>
+        </p:spPr>
+        <p:txBody>
+          <a:bodyPr wrap="square" lIns="0" tIns="0" rIns="0" bIns="0" rtlCol="0" anchor="t"/>
+          <a:lstStyle/>
+          <a:p>
+            <a:pPr algn="l" indent="0" marL="0">
+              <a:lnSpc>
+                <a:spcPts val="1820"/>
+              </a:lnSpc>
+              <a:spcBef>
+                <a:spcPts val="300"/>
+              </a:spcBef>
+              <a:spcAft>
+                <a:spcPts val="300"/>
+              </a:spcAft>
+              <a:buNone/>
+            </a:pPr>
+            <a:r>
+              <a:rPr lang="en-US" sz="1300" i="1" dirty="0">
+                <a:solidFill>
+                  <a:srgbClr val="1C2833"/>
+                </a:solidFill>
+                <a:latin typeface="Georgia" pitchFamily="34" charset="0"/>
+                <a:ea typeface="Georgia" pitchFamily="34" charset="-122"/>
+                <a:cs typeface="Georgia" pitchFamily="34" charset="-120"/>
+              </a:rPr>
+              <a:t>Three rules:</a:t>
+            </a:r>
+            <a:endParaRPr lang="en-US" sz="1300" dirty="0"/>
+          </a:p>
+        </p:txBody>
+      </p:sp>
+      <p:sp>
+        <p:nvSpPr>
+          <p:cNvPr id="11" name="Text 9"/>
+          <p:cNvSpPr/>
+          <p:nvPr/>
+        </p:nvSpPr>
+        <p:spPr>
+          <a:xfrm>
+            <a:off x="692051" y="2881461"/>
+            <a:ext cx="7973389" cy="230981"/>
+          </a:xfrm>
+          <a:prstGeom prst="rect">
+            <a:avLst/>
+          </a:prstGeom>
+          <a:noFill/>
+          <a:ln/>
+        </p:spPr>
+        <p:txBody>
+          <a:bodyPr wrap="square" lIns="0" tIns="0" rIns="0" bIns="0" rtlCol="0" anchor="t"/>
+          <a:lstStyle/>
+          <a:p>
+            <a:pPr algn="l" indent="0" marL="0">
+              <a:lnSpc>
+                <a:spcPts val="1820"/>
+              </a:lnSpc>
+              <a:spcBef>
+                <a:spcPts val="300"/>
+              </a:spcBef>
+              <a:spcAft>
+                <a:spcPts val="300"/>
+              </a:spcAft>
+              <a:buNone/>
+            </a:pPr>
+            <a:r>
+              <a:rPr lang="en-US" sz="1300" b="1" i="1" dirty="0">
+                <a:solidFill>
+                  <a:srgbClr val="1C2833"/>
+                </a:solidFill>
+                <a:latin typeface="Georgia" pitchFamily="34" charset="0"/>
+                <a:ea typeface="Georgia" pitchFamily="34" charset="-122"/>
+                <a:cs typeface="Georgia" pitchFamily="34" charset="-120"/>
+              </a:rPr>
+              <a:t>Time it.</a:t>
+            </a:r>
+            <a:pPr algn="l" indent="0" marL="0">
+              <a:lnSpc>
+                <a:spcPts val="1820"/>
+              </a:lnSpc>
+              <a:spcBef>
+                <a:spcPts val="300"/>
+              </a:spcBef>
+              <a:spcAft>
+                <a:spcPts val="300"/>
+              </a:spcAft>
+              <a:buNone/>
+            </a:pPr>
+            <a:r>
+              <a:rPr lang="en-US" sz="1300" dirty="0">
+                <a:solidFill>
+                  <a:srgbClr val="1C2833"/>
+                </a:solidFill>
+                <a:latin typeface="Georgia" pitchFamily="34" charset="0"/>
+                <a:ea typeface="Georgia" pitchFamily="34" charset="-122"/>
+                <a:cs typeface="Georgia" pitchFamily="34" charset="-120"/>
+              </a:rPr>
+              <a:t> Cut now, not on stage.</a:t>
+            </a:r>
+            <a:endParaRPr lang="en-US" sz="1300" dirty="0"/>
+          </a:p>
+        </p:txBody>
+      </p:sp>
+      <p:sp>
+        <p:nvSpPr>
+          <p:cNvPr id="12" name="Text 10"/>
+          <p:cNvSpPr/>
+          <p:nvPr/>
+        </p:nvSpPr>
+        <p:spPr>
+          <a:xfrm>
+            <a:off x="692051" y="3150543"/>
+            <a:ext cx="7973389" cy="230981"/>
+          </a:xfrm>
+          <a:prstGeom prst="rect">
+            <a:avLst/>
+          </a:prstGeom>
+          <a:noFill/>
+          <a:ln/>
+        </p:spPr>
+        <p:txBody>
+          <a:bodyPr wrap="square" lIns="0" tIns="0" rIns="0" bIns="0" rtlCol="0" anchor="t"/>
+          <a:lstStyle/>
+          <a:p>
+            <a:pPr algn="l" indent="0" marL="0">
+              <a:lnSpc>
+                <a:spcPts val="1820"/>
+              </a:lnSpc>
+              <a:spcBef>
+                <a:spcPts val="300"/>
+              </a:spcBef>
+              <a:spcAft>
+                <a:spcPts val="300"/>
+              </a:spcAft>
+              <a:buNone/>
+            </a:pPr>
+            <a:r>
+              <a:rPr lang="en-US" sz="1300" b="1" i="1" dirty="0">
+                <a:solidFill>
+                  <a:srgbClr val="1C2833"/>
+                </a:solidFill>
+                <a:latin typeface="Georgia" pitchFamily="34" charset="0"/>
+                <a:ea typeface="Georgia" pitchFamily="34" charset="-122"/>
+                <a:cs typeface="Georgia" pitchFamily="34" charset="-120"/>
+              </a:rPr>
+              <a:t>Show the artefact early</a:t>
+            </a:r>
+            <a:pPr algn="l" indent="0" marL="0">
+              <a:lnSpc>
+                <a:spcPts val="1820"/>
+              </a:lnSpc>
+              <a:spcBef>
+                <a:spcPts val="300"/>
+              </a:spcBef>
+              <a:spcAft>
+                <a:spcPts val="300"/>
+              </a:spcAft>
+              <a:buNone/>
+            </a:pPr>
+            <a:r>
+              <a:rPr lang="en-US" sz="1300" dirty="0">
+                <a:solidFill>
+                  <a:srgbClr val="1C2833"/>
+                </a:solidFill>
+                <a:latin typeface="Georgia" pitchFamily="34" charset="0"/>
+                <a:ea typeface="Georgia" pitchFamily="34" charset="-122"/>
+                <a:cs typeface="Georgia" pitchFamily="34" charset="-120"/>
+              </a:rPr>
+              <a:t> — don't leave it as a reveal.</a:t>
+            </a:r>
+            <a:endParaRPr lang="en-US" sz="1300" dirty="0"/>
+          </a:p>
+        </p:txBody>
+      </p:sp>
+      <p:sp>
+        <p:nvSpPr>
+          <p:cNvPr id="13" name="Text 11"/>
+          <p:cNvSpPr/>
+          <p:nvPr/>
+        </p:nvSpPr>
+        <p:spPr>
+          <a:xfrm>
+            <a:off x="692051" y="3419624"/>
+            <a:ext cx="7973389" cy="230981"/>
+          </a:xfrm>
+          <a:prstGeom prst="rect">
+            <a:avLst/>
+          </a:prstGeom>
+          <a:noFill/>
+          <a:ln/>
+        </p:spPr>
+        <p:txBody>
+          <a:bodyPr wrap="square" lIns="0" tIns="0" rIns="0" bIns="0" rtlCol="0" anchor="t"/>
+          <a:lstStyle/>
+          <a:p>
+            <a:pPr algn="l" indent="0" marL="0">
+              <a:lnSpc>
+                <a:spcPts val="1820"/>
+              </a:lnSpc>
+              <a:spcBef>
+                <a:spcPts val="300"/>
+              </a:spcBef>
+              <a:spcAft>
+                <a:spcPts val="300"/>
+              </a:spcAft>
+              <a:buNone/>
+            </a:pPr>
+            <a:r>
+              <a:rPr lang="en-US" sz="1300" b="1" i="1" dirty="0">
+                <a:solidFill>
+                  <a:srgbClr val="1C2833"/>
+                </a:solidFill>
+                <a:latin typeface="Georgia" pitchFamily="34" charset="0"/>
+                <a:ea typeface="Georgia" pitchFamily="34" charset="-122"/>
+                <a:cs typeface="Georgia" pitchFamily="34" charset="-120"/>
+              </a:rPr>
+              <a:t>End on the reflection.</a:t>
+            </a:r>
+            <a:pPr algn="l" indent="0" marL="0">
+              <a:lnSpc>
+                <a:spcPts val="1820"/>
+              </a:lnSpc>
+              <a:spcBef>
+                <a:spcPts val="300"/>
+              </a:spcBef>
+              <a:spcAft>
+                <a:spcPts val="300"/>
+              </a:spcAft>
+              <a:buNone/>
+            </a:pPr>
+            <a:r>
+              <a:rPr lang="en-US" sz="1300" dirty="0">
+                <a:solidFill>
+                  <a:srgbClr val="1C2833"/>
+                </a:solidFill>
+                <a:latin typeface="Georgia" pitchFamily="34" charset="0"/>
+                <a:ea typeface="Georgia" pitchFamily="34" charset="-122"/>
+                <a:cs typeface="Georgia" pitchFamily="34" charset="-120"/>
+              </a:rPr>
+              <a:t> Honesty is the last thing they hear.</a:t>
+            </a:r>
+            <a:endParaRPr lang="en-US" sz="1300" dirty="0"/>
+          </a:p>
+        </p:txBody>
+      </p:sp>
+      <p:sp>
+        <p:nvSpPr>
+          <p:cNvPr id="14" name="Text 12"/>
+          <p:cNvSpPr/>
+          <p:nvPr/>
+        </p:nvSpPr>
+        <p:spPr>
+          <a:xfrm>
+            <a:off x="692051" y="3688705"/>
+            <a:ext cx="7973389" cy="230981"/>
+          </a:xfrm>
+          <a:prstGeom prst="rect">
+            <a:avLst/>
+          </a:prstGeom>
+          <a:noFill/>
+          <a:ln/>
+        </p:spPr>
+        <p:txBody>
+          <a:bodyPr wrap="square" lIns="0" tIns="0" rIns="0" bIns="0" rtlCol="0" anchor="t"/>
+          <a:lstStyle/>
+          <a:p>
+            <a:pPr algn="l" indent="0" marL="0">
+              <a:lnSpc>
+                <a:spcPts val="1820"/>
+              </a:lnSpc>
+              <a:spcBef>
+                <a:spcPts val="300"/>
+              </a:spcBef>
+              <a:spcAft>
+                <a:spcPts val="300"/>
+              </a:spcAft>
+              <a:buNone/>
+            </a:pPr>
+            <a:r>
+              <a:rPr lang="en-US" sz="1300" dirty="0">
+                <a:solidFill>
+                  <a:srgbClr val="1C2833"/>
+                </a:solidFill>
+                <a:latin typeface="Georgia" pitchFamily="34" charset="0"/>
+                <a:ea typeface="Georgia" pitchFamily="34" charset="-122"/>
+                <a:cs typeface="Georgia" pitchFamily="34" charset="-120"/>
+              </a:rPr>
+              <a:t>If a question stumps you in Q&amp;A: </a:t>
+            </a:r>
+            <a:pPr algn="l" indent="0" marL="0">
+              <a:lnSpc>
+                <a:spcPts val="1820"/>
+              </a:lnSpc>
+              <a:spcBef>
+                <a:spcPts val="300"/>
+              </a:spcBef>
+              <a:spcAft>
+                <a:spcPts val="300"/>
+              </a:spcAft>
+              <a:buNone/>
+            </a:pPr>
+            <a:r>
+              <a:rPr lang="en-US" sz="1300" i="1" dirty="0">
+                <a:solidFill>
+                  <a:srgbClr val="1C2833"/>
+                </a:solidFill>
+                <a:latin typeface="Georgia" pitchFamily="34" charset="0"/>
+                <a:ea typeface="Georgia" pitchFamily="34" charset="-122"/>
+                <a:cs typeface="Georgia" pitchFamily="34" charset="-120"/>
+              </a:rPr>
+              <a:t>"I don't know, but here's what I'd check…"</a:t>
+            </a:r>
+            <a:endParaRPr lang="en-US" sz="1300" dirty="0"/>
+          </a:p>
+        </p:txBody>
+      </p:sp>
+      <p:sp>
+        <p:nvSpPr>
+          <p:cNvPr id="15" name="Text 13"/>
+          <p:cNvSpPr/>
+          <p:nvPr/>
+        </p:nvSpPr>
+        <p:spPr>
+          <a:xfrm>
+            <a:off x="406301" y="4434929"/>
+            <a:ext cx="8498026" cy="213271"/>
+          </a:xfrm>
+          <a:prstGeom prst="rect">
+            <a:avLst/>
+          </a:prstGeom>
+          <a:noFill/>
+          <a:ln/>
+        </p:spPr>
+        <p:txBody>
+          <a:bodyPr wrap="square" lIns="0" tIns="0" rIns="0" bIns="0" rtlCol="0" anchor="t"/>
+          <a:lstStyle/>
+          <a:p>
+            <a:pPr algn="l" indent="0" marL="0">
+              <a:lnSpc>
+                <a:spcPts val="1680"/>
+              </a:lnSpc>
+              <a:spcBef>
+                <a:spcPts val="300"/>
+              </a:spcBef>
+              <a:spcAft>
+                <a:spcPts val="300"/>
+              </a:spcAft>
+              <a:buNone/>
+            </a:pPr>
+            <a:r>
+              <a:rPr lang="en-US" sz="1200" dirty="0">
+                <a:solidFill>
+                  <a:srgbClr val="1C2833"/>
+                </a:solidFill>
+                <a:latin typeface="Arial" pitchFamily="34" charset="0"/>
+                <a:ea typeface="Arial" pitchFamily="34" charset="-122"/>
+                <a:cs typeface="Arial" pitchFamily="34" charset="-120"/>
+              </a:rPr>
+              <a:t>Middle ·  · IKS Curriculum</a:t>
+            </a:r>
+            <a:endParaRPr lang="en-US" sz="1200" dirty="0"/>
+          </a:p>
+        </p:txBody>
+      </p:sp>
+    </p:spTree>
+  </p:cSld>
+  <p:clrMapOvr>
+    <a:masterClrMapping/>
+  </p:clrMapOvr>
+</p:sld>
+</file>
+
+<file path=ppt/slides/slide15.xml><?xml version="1.0" encoding="utf-8"?>
+<p:sld xmlns:a="http://schemas.openxmlformats.org/drawingml/2006/main" xmlns:r="http://schemas.openxmlformats.org/officeDocument/2006/relationships" xmlns:p="http://schemas.openxmlformats.org/presentationml/2006/main">
+  <p:cSld name="Slide 15">
+    <p:bg>
+      <p:bgPr>
+        <a:solidFill>
+          <a:srgbClr val="FFFFFF"/>
+        </a:solidFill>
+      </p:bgPr>
+    </p:bg>
+    <p:spTree>
+      <p:nvGrpSpPr>
+        <p:cNvPr id="1" name=""/>
+        <p:cNvGrpSpPr/>
+        <p:nvPr/>
+      </p:nvGrpSpPr>
+      <p:grpSpPr>
+        <a:xfrm>
+          <a:off x="0" y="0"/>
+          <a:ext cx="0" cy="0"/>
+          <a:chOff x="0" y="0"/>
+          <a:chExt cx="0" cy="0"/>
+        </a:xfrm>
+      </p:grpSpPr>
+      <p:sp>
+        <p:nvSpPr>
+          <p:cNvPr id="2" name="Text 0"/>
+          <p:cNvSpPr/>
+          <p:nvPr/>
+        </p:nvSpPr>
+        <p:spPr>
+          <a:xfrm>
+            <a:off x="0" y="0"/>
+            <a:ext cx="9144000" cy="101501"/>
+          </a:xfrm>
+          <a:prstGeom prst="rect">
+            <a:avLst/>
+          </a:prstGeom>
+          <a:solidFill>
+            <a:srgbClr val="277884"/>
+          </a:solidFill>
+          <a:ln/>
+        </p:spPr>
+        <p:txBody>
+          <a:bodyPr wrap="square" rtlCol="0" anchor="ctr"/>
+          <a:lstStyle/>
+          <a:p>
+            <a:pPr indent="0" marL="0">
+              <a:buNone/>
+            </a:pPr>
+            <a:endParaRPr lang="en-US" dirty="0"/>
+          </a:p>
+        </p:txBody>
+      </p:sp>
+      <p:sp>
+        <p:nvSpPr>
+          <p:cNvPr id="3" name="Text 1"/>
+          <p:cNvSpPr/>
+          <p:nvPr/>
+        </p:nvSpPr>
+        <p:spPr>
+          <a:xfrm>
+            <a:off x="406301" y="457051"/>
+            <a:ext cx="8498026" cy="274290"/>
+          </a:xfrm>
+          <a:prstGeom prst="rect">
+            <a:avLst/>
+          </a:prstGeom>
+          <a:noFill/>
+          <a:ln/>
+        </p:spPr>
+        <p:txBody>
+          <a:bodyPr wrap="square" lIns="0" tIns="0" rIns="0" bIns="0" rtlCol="0" anchor="t"/>
+          <a:lstStyle/>
+          <a:p>
+            <a:pPr algn="l" indent="0" marL="0">
+              <a:lnSpc>
+                <a:spcPts val="2160"/>
+              </a:lnSpc>
+              <a:spcBef>
+                <a:spcPts val="600"/>
+              </a:spcBef>
+              <a:spcAft>
+                <a:spcPts val="800"/>
+              </a:spcAft>
+              <a:buNone/>
+            </a:pPr>
+            <a:r>
+              <a:rPr lang="en-US" sz="1800" b="1" dirty="0">
+                <a:solidFill>
+                  <a:srgbClr val="FE4447"/>
+                </a:solidFill>
+                <a:latin typeface="Georgia" pitchFamily="34" charset="0"/>
+                <a:ea typeface="Georgia" pitchFamily="34" charset="-122"/>
+                <a:cs typeface="Georgia" pitchFamily="34" charset="-120"/>
+              </a:rPr>
+              <a:t>Rehearsal Feedback Sheet (template)</a:t>
+            </a:r>
+            <a:endParaRPr lang="en-US" sz="1800" dirty="0"/>
+          </a:p>
+        </p:txBody>
+      </p:sp>
+      <p:sp>
+        <p:nvSpPr>
+          <p:cNvPr id="4" name="Text 2"/>
+          <p:cNvSpPr/>
+          <p:nvPr/>
+        </p:nvSpPr>
+        <p:spPr>
+          <a:xfrm>
+            <a:off x="406301" y="883593"/>
+            <a:ext cx="8331398" cy="4269135"/>
+          </a:xfrm>
+          <a:prstGeom prst="rect">
+            <a:avLst/>
+          </a:prstGeom>
+          <a:solidFill>
+            <a:srgbClr val="F4F8F9"/>
+          </a:solidFill>
+          <a:ln/>
+        </p:spPr>
+        <p:txBody>
+          <a:bodyPr wrap="square" rtlCol="0" anchor="ctr"/>
+          <a:lstStyle/>
+          <a:p>
+            <a:pPr indent="0" marL="0">
+              <a:buNone/>
+            </a:pPr>
+            <a:endParaRPr lang="en-US" dirty="0"/>
+          </a:p>
+        </p:txBody>
+      </p:sp>
+      <p:sp>
+        <p:nvSpPr>
+          <p:cNvPr id="5" name="Shape 3"/>
+          <p:cNvSpPr/>
+          <p:nvPr/>
+        </p:nvSpPr>
+        <p:spPr>
+          <a:xfrm>
+            <a:off x="430113" y="883593"/>
+            <a:ext cx="0" cy="4269135"/>
+          </a:xfrm>
+          <a:prstGeom prst="line">
+            <a:avLst/>
+          </a:prstGeom>
+          <a:noFill/>
+          <a:ln w="47625">
+            <a:solidFill>
+              <a:srgbClr val="277884"/>
+            </a:solidFill>
+            <a:prstDash val="solid"/>
+          </a:ln>
+        </p:spPr>
+      </p:sp>
+      <p:sp>
+        <p:nvSpPr>
+          <p:cNvPr id="6" name="Text 4"/>
+          <p:cNvSpPr/>
+          <p:nvPr/>
+        </p:nvSpPr>
+        <p:spPr>
+          <a:xfrm>
+            <a:off x="631627" y="1010543"/>
+            <a:ext cx="8086939" cy="174575"/>
+          </a:xfrm>
+          <a:prstGeom prst="rect">
+            <a:avLst/>
+          </a:prstGeom>
+          <a:noFill/>
+          <a:ln/>
+        </p:spPr>
+        <p:txBody>
+          <a:bodyPr wrap="square" lIns="0" tIns="0" rIns="0" bIns="0" rtlCol="0" anchor="t"/>
+          <a:lstStyle/>
+          <a:p>
+            <a:pPr algn="l" indent="0" marL="0">
+              <a:lnSpc>
+                <a:spcPts val="1375"/>
+              </a:lnSpc>
+              <a:buNone/>
+            </a:pPr>
+            <a:r>
+              <a:rPr lang="en-US" sz="1100" dirty="0">
+                <a:solidFill>
+                  <a:srgbClr val="1C2833"/>
+                </a:solidFill>
+                <a:latin typeface="Courier New" pitchFamily="34" charset="0"/>
+                <a:ea typeface="Courier New" pitchFamily="34" charset="-122"/>
+                <a:cs typeface="Courier New" pitchFamily="34" charset="-120"/>
+              </a:rPr>
+              <a:t>REHEARSAL FEEDBACK</a:t>
+            </a:r>
+            <a:endParaRPr lang="en-US" sz="1100" dirty="0"/>
+          </a:p>
+        </p:txBody>
+      </p:sp>
+      <p:sp>
+        <p:nvSpPr>
+          <p:cNvPr id="7" name="Text 5"/>
+          <p:cNvSpPr/>
+          <p:nvPr/>
+        </p:nvSpPr>
+        <p:spPr>
+          <a:xfrm>
+            <a:off x="631627" y="1359694"/>
+            <a:ext cx="8086939" cy="174575"/>
+          </a:xfrm>
+          <a:prstGeom prst="rect">
+            <a:avLst/>
+          </a:prstGeom>
+          <a:noFill/>
+          <a:ln/>
+        </p:spPr>
+        <p:txBody>
+          <a:bodyPr wrap="square" lIns="0" tIns="0" rIns="0" bIns="0" rtlCol="0" anchor="t"/>
+          <a:lstStyle/>
+          <a:p>
+            <a:pPr algn="l" indent="0" marL="0">
+              <a:lnSpc>
+                <a:spcPts val="1375"/>
+              </a:lnSpc>
+              <a:buNone/>
+            </a:pPr>
+            <a:r>
+              <a:rPr lang="en-US" sz="1100" dirty="0">
+                <a:solidFill>
+                  <a:srgbClr val="1C2833"/>
+                </a:solidFill>
+                <a:latin typeface="Courier New" pitchFamily="34" charset="0"/>
+                <a:ea typeface="Courier New" pitchFamily="34" charset="-122"/>
+                <a:cs typeface="Courier New" pitchFamily="34" charset="-120"/>
+              </a:rPr>
+              <a:t>Presenter: _________________  Listener: _________________</a:t>
+            </a:r>
+            <a:endParaRPr lang="en-US" sz="1100" dirty="0"/>
+          </a:p>
+        </p:txBody>
+      </p:sp>
+      <p:sp>
+        <p:nvSpPr>
+          <p:cNvPr id="8" name="Text 6"/>
+          <p:cNvSpPr/>
+          <p:nvPr/>
+        </p:nvSpPr>
+        <p:spPr>
+          <a:xfrm>
+            <a:off x="631627" y="1708845"/>
+            <a:ext cx="8086939" cy="174575"/>
+          </a:xfrm>
+          <a:prstGeom prst="rect">
+            <a:avLst/>
+          </a:prstGeom>
+          <a:noFill/>
+          <a:ln/>
+        </p:spPr>
+        <p:txBody>
+          <a:bodyPr wrap="square" lIns="0" tIns="0" rIns="0" bIns="0" rtlCol="0" anchor="t"/>
+          <a:lstStyle/>
+          <a:p>
+            <a:pPr algn="l" indent="0" marL="0">
+              <a:lnSpc>
+                <a:spcPts val="1375"/>
+              </a:lnSpc>
+              <a:buNone/>
+            </a:pPr>
+            <a:r>
+              <a:rPr lang="en-US" sz="1100" dirty="0">
+                <a:solidFill>
+                  <a:srgbClr val="1C2833"/>
+                </a:solidFill>
+                <a:latin typeface="Courier New" pitchFamily="34" charset="0"/>
+                <a:ea typeface="Courier New" pitchFamily="34" charset="-122"/>
+                <a:cs typeface="Courier New" pitchFamily="34" charset="-120"/>
+              </a:rPr>
+              <a:t>Time: _____ : _____ (target 4 minutes, range 3:45 – 4:15)</a:t>
+            </a:r>
+            <a:endParaRPr lang="en-US" sz="1100" dirty="0"/>
+          </a:p>
+        </p:txBody>
+      </p:sp>
+      <p:sp>
+        <p:nvSpPr>
+          <p:cNvPr id="9" name="Text 7"/>
+          <p:cNvSpPr/>
+          <p:nvPr/>
+        </p:nvSpPr>
+        <p:spPr>
+          <a:xfrm>
+            <a:off x="631627" y="2057995"/>
+            <a:ext cx="8086939" cy="174575"/>
+          </a:xfrm>
+          <a:prstGeom prst="rect">
+            <a:avLst/>
+          </a:prstGeom>
+          <a:noFill/>
+          <a:ln/>
+        </p:spPr>
+        <p:txBody>
+          <a:bodyPr wrap="square" lIns="0" tIns="0" rIns="0" bIns="0" rtlCol="0" anchor="t"/>
+          <a:lstStyle/>
+          <a:p>
+            <a:pPr algn="l" indent="0" marL="0">
+              <a:lnSpc>
+                <a:spcPts val="1375"/>
+              </a:lnSpc>
+              <a:buNone/>
+            </a:pPr>
+            <a:r>
+              <a:rPr lang="en-US" sz="1100" dirty="0">
+                <a:solidFill>
+                  <a:srgbClr val="1C2833"/>
+                </a:solidFill>
+                <a:latin typeface="Courier New" pitchFamily="34" charset="0"/>
+                <a:ea typeface="Courier New" pitchFamily="34" charset="-122"/>
+                <a:cs typeface="Courier New" pitchFamily="34" charset="-120"/>
+              </a:rPr>
+              <a:t>WHAT LANDED (be specific):</a:t>
+            </a:r>
+            <a:endParaRPr lang="en-US" sz="1100" dirty="0"/>
+          </a:p>
+        </p:txBody>
+      </p:sp>
+      <p:sp>
+        <p:nvSpPr>
+          <p:cNvPr id="10" name="Text 8"/>
+          <p:cNvSpPr/>
+          <p:nvPr/>
+        </p:nvSpPr>
+        <p:spPr>
+          <a:xfrm>
+            <a:off x="631627" y="2232571"/>
+            <a:ext cx="8086939" cy="174575"/>
+          </a:xfrm>
+          <a:prstGeom prst="rect">
+            <a:avLst/>
+          </a:prstGeom>
+          <a:noFill/>
+          <a:ln/>
+        </p:spPr>
+        <p:txBody>
+          <a:bodyPr wrap="square" lIns="0" tIns="0" rIns="0" bIns="0" rtlCol="0" anchor="t"/>
+          <a:lstStyle/>
+          <a:p>
+            <a:pPr algn="l" indent="0" marL="0">
+              <a:lnSpc>
+                <a:spcPts val="1375"/>
+              </a:lnSpc>
+              <a:buNone/>
+            </a:pPr>
+            <a:r>
+              <a:rPr lang="en-US" sz="1100" dirty="0">
+                <a:solidFill>
+                  <a:srgbClr val="1C2833"/>
+                </a:solidFill>
+                <a:latin typeface="Courier New" pitchFamily="34" charset="0"/>
+                <a:ea typeface="Courier New" pitchFamily="34" charset="-122"/>
+                <a:cs typeface="Courier New" pitchFamily="34" charset="-120"/>
+              </a:rPr>
+              <a:t>1. ____________________________________________</a:t>
+            </a:r>
+            <a:endParaRPr lang="en-US" sz="1100" dirty="0"/>
+          </a:p>
+        </p:txBody>
+      </p:sp>
+      <p:sp>
+        <p:nvSpPr>
+          <p:cNvPr id="11" name="Text 9"/>
+          <p:cNvSpPr/>
+          <p:nvPr/>
+        </p:nvSpPr>
+        <p:spPr>
+          <a:xfrm>
+            <a:off x="631627" y="2407146"/>
+            <a:ext cx="8086939" cy="174575"/>
+          </a:xfrm>
+          <a:prstGeom prst="rect">
+            <a:avLst/>
+          </a:prstGeom>
+          <a:noFill/>
+          <a:ln/>
+        </p:spPr>
+        <p:txBody>
+          <a:bodyPr wrap="square" lIns="0" tIns="0" rIns="0" bIns="0" rtlCol="0" anchor="t"/>
+          <a:lstStyle/>
+          <a:p>
+            <a:pPr algn="l" indent="0" marL="0">
+              <a:lnSpc>
+                <a:spcPts val="1375"/>
+              </a:lnSpc>
+              <a:buNone/>
+            </a:pPr>
+            <a:r>
+              <a:rPr lang="en-US" sz="1100" dirty="0">
+                <a:solidFill>
+                  <a:srgbClr val="1C2833"/>
+                </a:solidFill>
+                <a:latin typeface="Courier New" pitchFamily="34" charset="0"/>
+                <a:ea typeface="Courier New" pitchFamily="34" charset="-122"/>
+                <a:cs typeface="Courier New" pitchFamily="34" charset="-120"/>
+              </a:rPr>
+              <a:t>2. ____________________________________________</a:t>
+            </a:r>
+            <a:endParaRPr lang="en-US" sz="1100" dirty="0"/>
+          </a:p>
+        </p:txBody>
+      </p:sp>
+      <p:sp>
+        <p:nvSpPr>
+          <p:cNvPr id="12" name="Text 10"/>
+          <p:cNvSpPr/>
+          <p:nvPr/>
+        </p:nvSpPr>
+        <p:spPr>
+          <a:xfrm>
+            <a:off x="631627" y="2756297"/>
+            <a:ext cx="8086939" cy="174575"/>
+          </a:xfrm>
+          <a:prstGeom prst="rect">
+            <a:avLst/>
+          </a:prstGeom>
+          <a:noFill/>
+          <a:ln/>
+        </p:spPr>
+        <p:txBody>
+          <a:bodyPr wrap="square" lIns="0" tIns="0" rIns="0" bIns="0" rtlCol="0" anchor="t"/>
+          <a:lstStyle/>
+          <a:p>
+            <a:pPr algn="l" indent="0" marL="0">
+              <a:lnSpc>
+                <a:spcPts val="1375"/>
+              </a:lnSpc>
+              <a:buNone/>
+            </a:pPr>
+            <a:r>
+              <a:rPr lang="en-US" sz="1100" dirty="0">
+                <a:solidFill>
+                  <a:srgbClr val="1C2833"/>
+                </a:solidFill>
+                <a:latin typeface="Courier New" pitchFamily="34" charset="0"/>
+                <a:ea typeface="Courier New" pitchFamily="34" charset="-122"/>
+                <a:cs typeface="Courier New" pitchFamily="34" charset="-120"/>
+              </a:rPr>
+              <a:t>WHAT WAS UNCLEAR:</a:t>
+            </a:r>
+            <a:endParaRPr lang="en-US" sz="1100" dirty="0"/>
+          </a:p>
+        </p:txBody>
+      </p:sp>
+      <p:sp>
+        <p:nvSpPr>
+          <p:cNvPr id="13" name="Text 11"/>
+          <p:cNvSpPr/>
+          <p:nvPr/>
+        </p:nvSpPr>
+        <p:spPr>
+          <a:xfrm>
+            <a:off x="631627" y="2930872"/>
+            <a:ext cx="8086939" cy="174575"/>
+          </a:xfrm>
+          <a:prstGeom prst="rect">
+            <a:avLst/>
+          </a:prstGeom>
+          <a:noFill/>
+          <a:ln/>
+        </p:spPr>
+        <p:txBody>
+          <a:bodyPr wrap="square" lIns="0" tIns="0" rIns="0" bIns="0" rtlCol="0" anchor="t"/>
+          <a:lstStyle/>
+          <a:p>
+            <a:pPr algn="l" indent="0" marL="0">
+              <a:lnSpc>
+                <a:spcPts val="1375"/>
+              </a:lnSpc>
+              <a:buNone/>
+            </a:pPr>
+            <a:r>
+              <a:rPr lang="en-US" sz="1100" dirty="0">
+                <a:solidFill>
+                  <a:srgbClr val="1C2833"/>
+                </a:solidFill>
+                <a:latin typeface="Courier New" pitchFamily="34" charset="0"/>
+                <a:ea typeface="Courier New" pitchFamily="34" charset="-122"/>
+                <a:cs typeface="Courier New" pitchFamily="34" charset="-120"/>
+              </a:rPr>
+              <a:t>1. ____________________________________________</a:t>
+            </a:r>
+            <a:endParaRPr lang="en-US" sz="1100" dirty="0"/>
+          </a:p>
+        </p:txBody>
+      </p:sp>
+      <p:sp>
+        <p:nvSpPr>
+          <p:cNvPr id="14" name="Text 12"/>
+          <p:cNvSpPr/>
+          <p:nvPr/>
+        </p:nvSpPr>
+        <p:spPr>
+          <a:xfrm>
+            <a:off x="631627" y="3105448"/>
+            <a:ext cx="8086939" cy="174575"/>
+          </a:xfrm>
+          <a:prstGeom prst="rect">
+            <a:avLst/>
+          </a:prstGeom>
+          <a:noFill/>
+          <a:ln/>
+        </p:spPr>
+        <p:txBody>
+          <a:bodyPr wrap="square" lIns="0" tIns="0" rIns="0" bIns="0" rtlCol="0" anchor="t"/>
+          <a:lstStyle/>
+          <a:p>
+            <a:pPr algn="l" indent="0" marL="0">
+              <a:lnSpc>
+                <a:spcPts val="1375"/>
+              </a:lnSpc>
+              <a:buNone/>
+            </a:pPr>
+            <a:r>
+              <a:rPr lang="en-US" sz="1100" dirty="0">
+                <a:solidFill>
+                  <a:srgbClr val="1C2833"/>
+                </a:solidFill>
+                <a:latin typeface="Courier New" pitchFamily="34" charset="0"/>
+                <a:ea typeface="Courier New" pitchFamily="34" charset="-122"/>
+                <a:cs typeface="Courier New" pitchFamily="34" charset="-120"/>
+              </a:rPr>
+              <a:t>2. ____________________________________________</a:t>
+            </a:r>
+            <a:endParaRPr lang="en-US" sz="1100" dirty="0"/>
+          </a:p>
+        </p:txBody>
+      </p:sp>
+      <p:sp>
+        <p:nvSpPr>
+          <p:cNvPr id="15" name="Text 13"/>
+          <p:cNvSpPr/>
+          <p:nvPr/>
+        </p:nvSpPr>
+        <p:spPr>
+          <a:xfrm>
+            <a:off x="631627" y="3454598"/>
+            <a:ext cx="8086939" cy="174575"/>
+          </a:xfrm>
+          <a:prstGeom prst="rect">
+            <a:avLst/>
+          </a:prstGeom>
+          <a:noFill/>
+          <a:ln/>
+        </p:spPr>
+        <p:txBody>
+          <a:bodyPr wrap="square" lIns="0" tIns="0" rIns="0" bIns="0" rtlCol="0" anchor="t"/>
+          <a:lstStyle/>
+          <a:p>
+            <a:pPr algn="l" indent="0" marL="0">
+              <a:lnSpc>
+                <a:spcPts val="1375"/>
+              </a:lnSpc>
+              <a:buNone/>
+            </a:pPr>
+            <a:r>
+              <a:rPr lang="en-US" sz="1100" dirty="0">
+                <a:solidFill>
+                  <a:srgbClr val="1C2833"/>
+                </a:solidFill>
+                <a:latin typeface="Courier New" pitchFamily="34" charset="0"/>
+                <a:ea typeface="Courier New" pitchFamily="34" charset="-122"/>
+                <a:cs typeface="Courier New" pitchFamily="34" charset="-120"/>
+              </a:rPr>
+              <a:t>ONE THING TO REFINE BEFORE TOMORROW:</a:t>
+            </a:r>
+            <a:endParaRPr lang="en-US" sz="1100" dirty="0"/>
+          </a:p>
+        </p:txBody>
+      </p:sp>
+      <p:sp>
+        <p:nvSpPr>
+          <p:cNvPr id="16" name="Text 14"/>
+          <p:cNvSpPr/>
+          <p:nvPr/>
+        </p:nvSpPr>
+        <p:spPr>
+          <a:xfrm>
+            <a:off x="631627" y="3629174"/>
+            <a:ext cx="8086939" cy="174575"/>
+          </a:xfrm>
+          <a:prstGeom prst="rect">
+            <a:avLst/>
+          </a:prstGeom>
+          <a:noFill/>
+          <a:ln/>
+        </p:spPr>
+        <p:txBody>
+          <a:bodyPr wrap="square" lIns="0" tIns="0" rIns="0" bIns="0" rtlCol="0" anchor="t"/>
+          <a:lstStyle/>
+          <a:p>
+            <a:pPr algn="l" indent="0" marL="0">
+              <a:lnSpc>
+                <a:spcPts val="1375"/>
+              </a:lnSpc>
+              <a:buNone/>
+            </a:pPr>
+            <a:r>
+              <a:rPr lang="en-US" sz="1100" dirty="0">
+                <a:solidFill>
+                  <a:srgbClr val="1C2833"/>
+                </a:solidFill>
+                <a:latin typeface="Courier New" pitchFamily="34" charset="0"/>
+                <a:ea typeface="Courier New" pitchFamily="34" charset="-122"/>
+                <a:cs typeface="Courier New" pitchFamily="34" charset="-120"/>
+              </a:rPr>
+              <a:t>______________________________________________</a:t>
+            </a:r>
+            <a:endParaRPr lang="en-US" sz="1100" dirty="0"/>
+          </a:p>
+        </p:txBody>
+      </p:sp>
+      <p:sp>
+        <p:nvSpPr>
+          <p:cNvPr id="17" name="Text 15"/>
+          <p:cNvSpPr/>
+          <p:nvPr/>
+        </p:nvSpPr>
+        <p:spPr>
+          <a:xfrm>
+            <a:off x="631627" y="3978325"/>
+            <a:ext cx="8086939" cy="174575"/>
+          </a:xfrm>
+          <a:prstGeom prst="rect">
+            <a:avLst/>
+          </a:prstGeom>
+          <a:noFill/>
+          <a:ln/>
+        </p:spPr>
+        <p:txBody>
+          <a:bodyPr wrap="square" lIns="0" tIns="0" rIns="0" bIns="0" rtlCol="0" anchor="t"/>
+          <a:lstStyle/>
+          <a:p>
+            <a:pPr algn="l" indent="0" marL="0">
+              <a:lnSpc>
+                <a:spcPts val="1375"/>
+              </a:lnSpc>
+              <a:buNone/>
+            </a:pPr>
+            <a:r>
+              <a:rPr lang="en-US" sz="1100" dirty="0">
+                <a:solidFill>
+                  <a:srgbClr val="1C2833"/>
+                </a:solidFill>
+                <a:latin typeface="Courier New" pitchFamily="34" charset="0"/>
+                <a:ea typeface="Courier New" pitchFamily="34" charset="-122"/>
+                <a:cs typeface="Courier New" pitchFamily="34" charset="-120"/>
+              </a:rPr>
+              <a:t>DID THE PRESENTER:</a:t>
+            </a:r>
+            <a:endParaRPr lang="en-US" sz="1100" dirty="0"/>
+          </a:p>
+        </p:txBody>
+      </p:sp>
+      <p:sp>
+        <p:nvSpPr>
+          <p:cNvPr id="18" name="Text 16"/>
+          <p:cNvSpPr/>
+          <p:nvPr/>
+        </p:nvSpPr>
+        <p:spPr>
+          <a:xfrm>
+            <a:off x="631627" y="4152900"/>
+            <a:ext cx="8086939" cy="174575"/>
+          </a:xfrm>
+          <a:prstGeom prst="rect">
+            <a:avLst/>
+          </a:prstGeom>
+          <a:noFill/>
+          <a:ln/>
+        </p:spPr>
+        <p:txBody>
+          <a:bodyPr wrap="square" lIns="0" tIns="0" rIns="0" bIns="0" rtlCol="0" anchor="t"/>
+          <a:lstStyle/>
+          <a:p>
+            <a:pPr algn="l" indent="0" marL="0">
+              <a:lnSpc>
+                <a:spcPts val="1375"/>
+              </a:lnSpc>
+              <a:buNone/>
+            </a:pPr>
+            <a:r>
+              <a:rPr lang="en-US" sz="1100" dirty="0">
+                <a:solidFill>
+                  <a:srgbClr val="1C2833"/>
+                </a:solidFill>
+                <a:latin typeface="Courier New" pitchFamily="34" charset="0"/>
+                <a:ea typeface="Courier New" pitchFamily="34" charset="-122"/>
+                <a:cs typeface="Courier New" pitchFamily="34" charset="-120"/>
+              </a:rPr>
+              <a:t>[ ] Open with the driving question?</a:t>
+            </a:r>
+            <a:endParaRPr lang="en-US" sz="1100" dirty="0"/>
+          </a:p>
+        </p:txBody>
+      </p:sp>
+      <p:sp>
+        <p:nvSpPr>
+          <p:cNvPr id="19" name="Text 17"/>
+          <p:cNvSpPr/>
+          <p:nvPr/>
+        </p:nvSpPr>
+        <p:spPr>
+          <a:xfrm>
+            <a:off x="631627" y="4327475"/>
+            <a:ext cx="8086939" cy="174575"/>
+          </a:xfrm>
+          <a:prstGeom prst="rect">
+            <a:avLst/>
+          </a:prstGeom>
+          <a:noFill/>
+          <a:ln/>
+        </p:spPr>
+        <p:txBody>
+          <a:bodyPr wrap="square" lIns="0" tIns="0" rIns="0" bIns="0" rtlCol="0" anchor="t"/>
+          <a:lstStyle/>
+          <a:p>
+            <a:pPr algn="l" indent="0" marL="0">
+              <a:lnSpc>
+                <a:spcPts val="1375"/>
+              </a:lnSpc>
+              <a:buNone/>
+            </a:pPr>
+            <a:r>
+              <a:rPr lang="en-US" sz="1100" dirty="0">
+                <a:solidFill>
+                  <a:srgbClr val="1C2833"/>
+                </a:solidFill>
+                <a:latin typeface="Courier New" pitchFamily="34" charset="0"/>
+                <a:ea typeface="Courier New" pitchFamily="34" charset="-122"/>
+                <a:cs typeface="Courier New" pitchFamily="34" charset="-120"/>
+              </a:rPr>
+              <a:t>[ ] Show the artefact within the first 2 minutes?</a:t>
+            </a:r>
+            <a:endParaRPr lang="en-US" sz="1100" dirty="0"/>
+          </a:p>
+        </p:txBody>
+      </p:sp>
+      <p:sp>
+        <p:nvSpPr>
+          <p:cNvPr id="20" name="Text 18"/>
+          <p:cNvSpPr/>
+          <p:nvPr/>
+        </p:nvSpPr>
+        <p:spPr>
+          <a:xfrm>
+            <a:off x="631627" y="4502051"/>
+            <a:ext cx="8086939" cy="174575"/>
+          </a:xfrm>
+          <a:prstGeom prst="rect">
+            <a:avLst/>
+          </a:prstGeom>
+          <a:noFill/>
+          <a:ln/>
+        </p:spPr>
+        <p:txBody>
+          <a:bodyPr wrap="square" lIns="0" tIns="0" rIns="0" bIns="0" rtlCol="0" anchor="t"/>
+          <a:lstStyle/>
+          <a:p>
+            <a:pPr algn="l" indent="0" marL="0">
+              <a:lnSpc>
+                <a:spcPts val="1375"/>
+              </a:lnSpc>
+              <a:buNone/>
+            </a:pPr>
+            <a:r>
+              <a:rPr lang="en-US" sz="1100" dirty="0">
+                <a:solidFill>
+                  <a:srgbClr val="1C2833"/>
+                </a:solidFill>
+                <a:latin typeface="Courier New" pitchFamily="34" charset="0"/>
+                <a:ea typeface="Courier New" pitchFamily="34" charset="-122"/>
+                <a:cs typeface="Courier New" pitchFamily="34" charset="-120"/>
+              </a:rPr>
+              <a:t>[ ] Name at least one source?</a:t>
+            </a:r>
+            <a:endParaRPr lang="en-US" sz="1100" dirty="0"/>
+          </a:p>
+        </p:txBody>
+      </p:sp>
+      <p:sp>
+        <p:nvSpPr>
+          <p:cNvPr id="21" name="Text 19"/>
+          <p:cNvSpPr/>
+          <p:nvPr/>
+        </p:nvSpPr>
+        <p:spPr>
+          <a:xfrm>
+            <a:off x="631627" y="4676626"/>
+            <a:ext cx="8086939" cy="174575"/>
+          </a:xfrm>
+          <a:prstGeom prst="rect">
+            <a:avLst/>
+          </a:prstGeom>
+          <a:noFill/>
+          <a:ln/>
+        </p:spPr>
+        <p:txBody>
+          <a:bodyPr wrap="square" lIns="0" tIns="0" rIns="0" bIns="0" rtlCol="0" anchor="t"/>
+          <a:lstStyle/>
+          <a:p>
+            <a:pPr algn="l" indent="0" marL="0">
+              <a:lnSpc>
+                <a:spcPts val="1375"/>
+              </a:lnSpc>
+              <a:buNone/>
+            </a:pPr>
+            <a:r>
+              <a:rPr lang="en-US" sz="1100" dirty="0">
+                <a:solidFill>
+                  <a:srgbClr val="1C2833"/>
+                </a:solidFill>
+                <a:latin typeface="Courier New" pitchFamily="34" charset="0"/>
+                <a:ea typeface="Courier New" pitchFamily="34" charset="-122"/>
+                <a:cs typeface="Courier New" pitchFamily="34" charset="-120"/>
+              </a:rPr>
+              <a:t>[ ] End with a specific reflection (not "I learned a lot")?</a:t>
+            </a:r>
+            <a:endParaRPr lang="en-US" sz="1100" dirty="0"/>
+          </a:p>
+        </p:txBody>
+      </p:sp>
+      <p:sp>
+        <p:nvSpPr>
+          <p:cNvPr id="22" name="Text 20"/>
+          <p:cNvSpPr/>
+          <p:nvPr/>
+        </p:nvSpPr>
+        <p:spPr>
+          <a:xfrm>
+            <a:off x="631627" y="4851202"/>
+            <a:ext cx="8086939" cy="174575"/>
+          </a:xfrm>
+          <a:prstGeom prst="rect">
+            <a:avLst/>
+          </a:prstGeom>
+          <a:noFill/>
+          <a:ln/>
+        </p:spPr>
+        <p:txBody>
+          <a:bodyPr wrap="square" lIns="0" tIns="0" rIns="0" bIns="0" rtlCol="0" anchor="t"/>
+          <a:lstStyle/>
+          <a:p>
+            <a:pPr algn="l" indent="0" marL="0">
+              <a:lnSpc>
+                <a:spcPts val="1375"/>
+              </a:lnSpc>
+              <a:buNone/>
+            </a:pPr>
+            <a:r>
+              <a:rPr lang="en-US" sz="1100" dirty="0">
+                <a:solidFill>
+                  <a:srgbClr val="1C2833"/>
+                </a:solidFill>
+                <a:latin typeface="Courier New" pitchFamily="34" charset="0"/>
+                <a:ea typeface="Courier New" pitchFamily="34" charset="-122"/>
+                <a:cs typeface="Courier New" pitchFamily="34" charset="-120"/>
+              </a:rPr>
+              <a:t>[ ] Finish within 4 minutes (± 15 sec)?</a:t>
+            </a:r>
+            <a:endParaRPr lang="en-US" sz="1100" dirty="0"/>
+          </a:p>
+        </p:txBody>
+      </p:sp>
+      <p:sp>
+        <p:nvSpPr>
+          <p:cNvPr id="23" name="Text 21"/>
+          <p:cNvSpPr/>
+          <p:nvPr/>
+        </p:nvSpPr>
+        <p:spPr>
+          <a:xfrm>
+            <a:off x="406301" y="5317778"/>
+            <a:ext cx="8498026" cy="213271"/>
+          </a:xfrm>
+          <a:prstGeom prst="rect">
+            <a:avLst/>
+          </a:prstGeom>
+          <a:noFill/>
+          <a:ln/>
+        </p:spPr>
+        <p:txBody>
+          <a:bodyPr wrap="square" lIns="0" tIns="0" rIns="0" bIns="0" rtlCol="0" anchor="t"/>
+          <a:lstStyle/>
+          <a:p>
+            <a:pPr algn="l" indent="0" marL="0">
+              <a:lnSpc>
+                <a:spcPts val="1680"/>
+              </a:lnSpc>
+              <a:spcBef>
+                <a:spcPts val="300"/>
+              </a:spcBef>
+              <a:spcAft>
+                <a:spcPts val="300"/>
+              </a:spcAft>
+              <a:buNone/>
+            </a:pPr>
+            <a:r>
+              <a:rPr lang="en-US" sz="1200" dirty="0">
+                <a:solidFill>
+                  <a:srgbClr val="1C2833"/>
+                </a:solidFill>
+                <a:latin typeface="Arial" pitchFamily="34" charset="0"/>
+                <a:ea typeface="Arial" pitchFamily="34" charset="-122"/>
+                <a:cs typeface="Arial" pitchFamily="34" charset="-120"/>
+              </a:rPr>
+              <a:t>Middle ·  · IKS Curriculum</a:t>
+            </a:r>
+            <a:endParaRPr lang="en-US" sz="1200" dirty="0"/>
+          </a:p>
+        </p:txBody>
+      </p:sp>
+    </p:spTree>
+  </p:cSld>
+  <p:clrMapOvr>
+    <a:masterClrMapping/>
+  </p:clrMapOvr>
+</p:sld>
+</file>
+
+<file path=ppt/slides/slide16.xml><?xml version="1.0" encoding="utf-8"?>
+<p:sld xmlns:a="http://schemas.openxmlformats.org/drawingml/2006/main" xmlns:r="http://schemas.openxmlformats.org/officeDocument/2006/relationships" xmlns:p="http://schemas.openxmlformats.org/presentationml/2006/main">
+  <p:cSld name="Slide 16">
+    <p:bg>
+      <p:bgPr>
+        <a:solidFill>
+          <a:srgbClr val="FFFFFF"/>
+        </a:solidFill>
+      </p:bgPr>
+    </p:bg>
+    <p:spTree>
+      <p:nvGrpSpPr>
+        <p:cNvPr id="1" name=""/>
+        <p:cNvGrpSpPr/>
+        <p:nvPr/>
+      </p:nvGrpSpPr>
+      <p:grpSpPr>
+        <a:xfrm>
+          <a:off x="0" y="0"/>
+          <a:ext cx="0" cy="0"/>
+          <a:chOff x="0" y="0"/>
+          <a:chExt cx="0" cy="0"/>
+        </a:xfrm>
+      </p:grpSpPr>
+      <p:sp>
+        <p:nvSpPr>
+          <p:cNvPr id="2" name="Text 0"/>
+          <p:cNvSpPr/>
+          <p:nvPr/>
+        </p:nvSpPr>
+        <p:spPr>
+          <a:xfrm>
+            <a:off x="0" y="0"/>
+            <a:ext cx="9144000" cy="101501"/>
+          </a:xfrm>
+          <a:prstGeom prst="rect">
+            <a:avLst/>
+          </a:prstGeom>
+          <a:solidFill>
+            <a:srgbClr val="277884"/>
+          </a:solidFill>
+          <a:ln/>
+        </p:spPr>
+        <p:txBody>
+          <a:bodyPr wrap="square" rtlCol="0" anchor="ctr"/>
+          <a:lstStyle/>
+          <a:p>
+            <a:pPr indent="0" marL="0">
+              <a:buNone/>
+            </a:pPr>
+            <a:endParaRPr lang="en-US" dirty="0"/>
+          </a:p>
+        </p:txBody>
+      </p:sp>
+      <p:sp>
+        <p:nvSpPr>
+          <p:cNvPr id="3" name="Text 1"/>
+          <p:cNvSpPr/>
+          <p:nvPr/>
+        </p:nvSpPr>
+        <p:spPr>
+          <a:xfrm>
+            <a:off x="406301" y="457051"/>
+            <a:ext cx="8498026" cy="274290"/>
+          </a:xfrm>
+          <a:prstGeom prst="rect">
+            <a:avLst/>
+          </a:prstGeom>
+          <a:noFill/>
+          <a:ln/>
+        </p:spPr>
+        <p:txBody>
+          <a:bodyPr wrap="square" lIns="0" tIns="0" rIns="0" bIns="0" rtlCol="0" anchor="t"/>
+          <a:lstStyle/>
+          <a:p>
+            <a:pPr algn="l" indent="0" marL="0">
+              <a:lnSpc>
+                <a:spcPts val="2160"/>
+              </a:lnSpc>
+              <a:spcBef>
+                <a:spcPts val="600"/>
+              </a:spcBef>
+              <a:spcAft>
+                <a:spcPts val="800"/>
+              </a:spcAft>
+              <a:buNone/>
+            </a:pPr>
+            <a:r>
+              <a:rPr lang="en-US" sz="1800" b="1" dirty="0">
+                <a:solidFill>
+                  <a:srgbClr val="FE4447"/>
+                </a:solidFill>
+                <a:latin typeface="Georgia" pitchFamily="34" charset="0"/>
+                <a:ea typeface="Georgia" pitchFamily="34" charset="-122"/>
+                <a:cs typeface="Georgia" pitchFamily="34" charset="-120"/>
+              </a:rPr>
+              <a:t>Homework</a:t>
+            </a:r>
+            <a:endParaRPr lang="en-US" sz="1800" dirty="0"/>
+          </a:p>
+        </p:txBody>
+      </p:sp>
+      <p:sp>
+        <p:nvSpPr>
+          <p:cNvPr id="4" name="Text 2"/>
+          <p:cNvSpPr/>
+          <p:nvPr/>
+        </p:nvSpPr>
+        <p:spPr>
+          <a:xfrm>
+            <a:off x="634901" y="883593"/>
+            <a:ext cx="8102798" cy="769441"/>
+          </a:xfrm>
+          <a:prstGeom prst="rect">
+            <a:avLst/>
+          </a:prstGeom>
+          <a:noFill/>
+          <a:ln/>
+        </p:spPr>
+        <p:txBody>
+          <a:bodyPr wrap="square" lIns="0" tIns="0" rIns="0" bIns="0" rtlCol="0" anchor="t"/>
+          <a:lstStyle/>
+          <a:p>
+            <a:pPr algn="l" marL="342900" indent="-342900">
+              <a:lnSpc>
+                <a:spcPts val="1620"/>
+              </a:lnSpc>
+              <a:spcAft>
+                <a:spcPts val="300"/>
+              </a:spcAft>
+              <a:buSzPct val="100000"/>
+              <a:buChar char="•"/>
+            </a:pPr>
+            <a:r>
+              <a:rPr lang="en-US" sz="1200" dirty="0">
+                <a:solidFill>
+                  <a:srgbClr val="1C2833"/>
+                </a:solidFill>
+                <a:latin typeface="Arial" pitchFamily="34" charset="0"/>
+                <a:ea typeface="Arial" pitchFamily="34" charset="-122"/>
+                <a:cs typeface="Arial" pitchFamily="34" charset="-120"/>
+              </a:rPr>
+              <a:t>One final rehearsal at home tonight, in front of a parent or sibling. Time it. Aim for 4 minutes ± 15 seconds.</a:t>
+            </a:r>
+            <a:endParaRPr lang="en-US" sz="1200" dirty="0"/>
+          </a:p>
+          <a:p>
+            <a:pPr algn="l" marL="342900" indent="-342900">
+              <a:lnSpc>
+                <a:spcPts val="1620"/>
+              </a:lnSpc>
+              <a:spcAft>
+                <a:spcPts val="300"/>
+              </a:spcAft>
+              <a:buSzPct val="100000"/>
+              <a:buChar char="•"/>
+            </a:pPr>
+            <a:r>
+              <a:rPr lang="en-US" sz="1200" dirty="0">
+                <a:solidFill>
+                  <a:srgbClr val="1C2833"/>
+                </a:solidFill>
+                <a:latin typeface="Arial" pitchFamily="34" charset="0"/>
+                <a:ea typeface="Arial" pitchFamily="34" charset="-122"/>
+                <a:cs typeface="Arial" pitchFamily="34" charset="-120"/>
+              </a:rPr>
+              <a:t>Pack everything tonight, not tomorrow morning: artefact + documentation + notes.</a:t>
+            </a:r>
+            <a:endParaRPr lang="en-US" sz="1200" dirty="0"/>
+          </a:p>
+          <a:p>
+            <a:pPr algn="l" marL="342900" indent="-342900">
+              <a:lnSpc>
+                <a:spcPts val="1620"/>
+              </a:lnSpc>
+              <a:spcAft>
+                <a:spcPts val="300"/>
+              </a:spcAft>
+              <a:buSzPct val="100000"/>
+              <a:buChar char="•"/>
+            </a:pPr>
+            <a:r>
+              <a:rPr lang="en-US" sz="1200" dirty="0">
+                <a:solidFill>
+                  <a:srgbClr val="1C2833"/>
+                </a:solidFill>
+                <a:latin typeface="Arial" pitchFamily="34" charset="0"/>
+                <a:ea typeface="Arial" pitchFamily="34" charset="-122"/>
+                <a:cs typeface="Arial" pitchFamily="34" charset="-120"/>
+              </a:rPr>
+              <a:t>Sleep on time. A clear-headed 4-minute share lands better than an over-rehearsed exhausted one.</a:t>
+            </a:r>
+            <a:endParaRPr lang="en-US" sz="1200" dirty="0"/>
+          </a:p>
+        </p:txBody>
+      </p:sp>
+      <p:sp>
+        <p:nvSpPr>
+          <p:cNvPr id="5" name="Text 3"/>
+          <p:cNvSpPr/>
+          <p:nvPr/>
+        </p:nvSpPr>
+        <p:spPr>
+          <a:xfrm>
+            <a:off x="406301" y="4434929"/>
+            <a:ext cx="8498026" cy="213271"/>
+          </a:xfrm>
+          <a:prstGeom prst="rect">
+            <a:avLst/>
+          </a:prstGeom>
+          <a:noFill/>
+          <a:ln/>
+        </p:spPr>
+        <p:txBody>
+          <a:bodyPr wrap="square" lIns="0" tIns="0" rIns="0" bIns="0" rtlCol="0" anchor="t"/>
+          <a:lstStyle/>
+          <a:p>
+            <a:pPr algn="l" indent="0" marL="0">
+              <a:lnSpc>
+                <a:spcPts val="1680"/>
+              </a:lnSpc>
+              <a:spcBef>
+                <a:spcPts val="300"/>
+              </a:spcBef>
+              <a:spcAft>
+                <a:spcPts val="300"/>
+              </a:spcAft>
+              <a:buNone/>
+            </a:pPr>
+            <a:r>
+              <a:rPr lang="en-US" sz="1200" dirty="0">
+                <a:solidFill>
+                  <a:srgbClr val="1C2833"/>
+                </a:solidFill>
+                <a:latin typeface="Arial" pitchFamily="34" charset="0"/>
+                <a:ea typeface="Arial" pitchFamily="34" charset="-122"/>
+                <a:cs typeface="Arial" pitchFamily="34" charset="-120"/>
+              </a:rPr>
+              <a:t>Middle ·  · IKS Curriculum</a:t>
+            </a:r>
+            <a:endParaRPr lang="en-US" sz="1200" dirty="0"/>
+          </a:p>
+        </p:txBody>
+      </p:sp>
+    </p:spTree>
+  </p:cSld>
+  <p:clrMapOvr>
+    <a:masterClrMapping/>
+  </p:clrMapOvr>
+</p:sld>
+</file>
+
+<file path=ppt/slides/slide17.xml><?xml version="1.0" encoding="utf-8"?>
+<p:sld xmlns:a="http://schemas.openxmlformats.org/drawingml/2006/main" xmlns:r="http://schemas.openxmlformats.org/officeDocument/2006/relationships" xmlns:p="http://schemas.openxmlformats.org/presentationml/2006/main">
+  <p:cSld name="Slide 17">
+    <p:bg>
+      <p:bgPr>
+        <a:solidFill>
+          <a:srgbClr val="FFFFFF"/>
+        </a:solidFill>
+      </p:bgPr>
+    </p:bg>
+    <p:spTree>
+      <p:nvGrpSpPr>
+        <p:cNvPr id="1" name=""/>
+        <p:cNvGrpSpPr/>
+        <p:nvPr/>
+      </p:nvGrpSpPr>
+      <p:grpSpPr>
+        <a:xfrm>
+          <a:off x="0" y="0"/>
+          <a:ext cx="0" cy="0"/>
+          <a:chOff x="0" y="0"/>
+          <a:chExt cx="0" cy="0"/>
+        </a:xfrm>
+      </p:grpSpPr>
+      <p:sp>
+        <p:nvSpPr>
+          <p:cNvPr id="2" name="Text 0"/>
+          <p:cNvSpPr/>
+          <p:nvPr/>
+        </p:nvSpPr>
+        <p:spPr>
+          <a:xfrm>
+            <a:off x="0" y="0"/>
+            <a:ext cx="9144000" cy="101501"/>
+          </a:xfrm>
+          <a:prstGeom prst="rect">
+            <a:avLst/>
+          </a:prstGeom>
+          <a:solidFill>
+            <a:srgbClr val="277884"/>
+          </a:solidFill>
+          <a:ln/>
+        </p:spPr>
+        <p:txBody>
+          <a:bodyPr wrap="square" rtlCol="0" anchor="ctr"/>
+          <a:lstStyle/>
+          <a:p>
+            <a:pPr indent="0" marL="0">
+              <a:buNone/>
+            </a:pPr>
+            <a:endParaRPr lang="en-US" dirty="0"/>
+          </a:p>
+        </p:txBody>
+      </p:sp>
+      <p:sp>
+        <p:nvSpPr>
+          <p:cNvPr id="3" name="Text 1"/>
+          <p:cNvSpPr/>
+          <p:nvPr/>
+        </p:nvSpPr>
+        <p:spPr>
+          <a:xfrm>
+            <a:off x="406301" y="457051"/>
+            <a:ext cx="8498026" cy="274290"/>
+          </a:xfrm>
+          <a:prstGeom prst="rect">
+            <a:avLst/>
+          </a:prstGeom>
+          <a:noFill/>
+          <a:ln/>
+        </p:spPr>
+        <p:txBody>
+          <a:bodyPr wrap="square" lIns="0" tIns="0" rIns="0" bIns="0" rtlCol="0" anchor="t"/>
+          <a:lstStyle/>
+          <a:p>
+            <a:pPr algn="l" indent="0" marL="0">
+              <a:lnSpc>
+                <a:spcPts val="2160"/>
+              </a:lnSpc>
+              <a:spcBef>
+                <a:spcPts val="600"/>
+              </a:spcBef>
+              <a:spcAft>
+                <a:spcPts val="800"/>
+              </a:spcAft>
+              <a:buNone/>
+            </a:pPr>
+            <a:r>
+              <a:rPr lang="en-US" sz="1800" b="1" dirty="0">
+                <a:solidFill>
+                  <a:srgbClr val="FE4447"/>
+                </a:solidFill>
+                <a:latin typeface="Georgia" pitchFamily="34" charset="0"/>
+                <a:ea typeface="Georgia" pitchFamily="34" charset="-122"/>
+                <a:cs typeface="Georgia" pitchFamily="34" charset="-120"/>
+              </a:rPr>
+              <a:t>Differentiation</a:t>
+            </a:r>
+            <a:endParaRPr lang="en-US" sz="1800" dirty="0"/>
+          </a:p>
+        </p:txBody>
+      </p:sp>
+      <p:sp>
+        <p:nvSpPr>
+          <p:cNvPr id="4" name="Text 2"/>
+          <p:cNvSpPr/>
+          <p:nvPr/>
+        </p:nvSpPr>
+        <p:spPr>
+          <a:xfrm>
+            <a:off x="634901" y="883593"/>
+            <a:ext cx="8102798" cy="937022"/>
+          </a:xfrm>
+          <a:prstGeom prst="rect">
+            <a:avLst/>
+          </a:prstGeom>
+          <a:noFill/>
+          <a:ln/>
+        </p:spPr>
+        <p:txBody>
+          <a:bodyPr wrap="square" lIns="0" tIns="0" rIns="0" bIns="0" rtlCol="0" anchor="t"/>
+          <a:lstStyle/>
+          <a:p>
+            <a:pPr algn="l" marL="342900" indent="-342900">
+              <a:lnSpc>
+                <a:spcPts val="1620"/>
+              </a:lnSpc>
+              <a:spcAft>
+                <a:spcPts val="300"/>
+              </a:spcAft>
+              <a:buSzPct val="100000"/>
+              <a:buChar char="•"/>
+            </a:pPr>
+            <a:r>
+              <a:rPr lang="en-US" sz="1200" b="1" dirty="0">
+                <a:solidFill>
+                  <a:srgbClr val="1C2833"/>
+                </a:solidFill>
+                <a:latin typeface="Arial" pitchFamily="34" charset="0"/>
+                <a:ea typeface="Arial" pitchFamily="34" charset="-122"/>
+                <a:cs typeface="Arial" pitchFamily="34" charset="-120"/>
+              </a:rPr>
+              <a:t>One tier up:</a:t>
+            </a:r>
+            <a:pPr algn="l" indent="0" marL="0">
+              <a:lnSpc>
+                <a:spcPts val="1620"/>
+              </a:lnSpc>
+              <a:spcAft>
+                <a:spcPts val="300"/>
+              </a:spcAft>
+              <a:buNone/>
+            </a:pPr>
+            <a:r>
+              <a:rPr lang="en-US" sz="1200" dirty="0">
+                <a:solidFill>
+                  <a:srgbClr val="1C2833"/>
+                </a:solidFill>
+                <a:latin typeface="Arial" pitchFamily="34" charset="0"/>
+                <a:ea typeface="Arial" pitchFamily="34" charset="-122"/>
+                <a:cs typeface="Arial" pitchFamily="34" charset="-120"/>
+              </a:rPr>
+              <a:t> Rehearse your 4-minute share once, then deliver it from memory without your notes for the second rehearsal. The memory pressure tightens the language. Bring notes tomorrow, but you may not need them.</a:t>
+            </a:r>
+            <a:endParaRPr lang="en-US" sz="1200" dirty="0"/>
+          </a:p>
+          <a:p>
+            <a:pPr algn="l" marL="342900" indent="-342900">
+              <a:lnSpc>
+                <a:spcPts val="1620"/>
+              </a:lnSpc>
+              <a:spcAft>
+                <a:spcPts val="300"/>
+              </a:spcAft>
+              <a:buSzPct val="100000"/>
+              <a:buChar char="•"/>
+            </a:pPr>
+            <a:r>
+              <a:rPr lang="en-US" sz="1200" b="1" dirty="0">
+                <a:solidFill>
+                  <a:srgbClr val="1C2833"/>
+                </a:solidFill>
+                <a:latin typeface="Arial" pitchFamily="34" charset="0"/>
+                <a:ea typeface="Arial" pitchFamily="34" charset="-122"/>
+                <a:cs typeface="Arial" pitchFamily="34" charset="-120"/>
+              </a:rPr>
+              <a:t>One tier down:</a:t>
+            </a:r>
+            <a:pPr algn="l" indent="0" marL="0">
+              <a:lnSpc>
+                <a:spcPts val="1620"/>
+              </a:lnSpc>
+              <a:spcAft>
+                <a:spcPts val="300"/>
+              </a:spcAft>
+              <a:buNone/>
+            </a:pPr>
+            <a:r>
+              <a:rPr lang="en-US" sz="1200" dirty="0">
+                <a:solidFill>
+                  <a:srgbClr val="1C2833"/>
+                </a:solidFill>
+                <a:latin typeface="Arial" pitchFamily="34" charset="0"/>
+                <a:ea typeface="Arial" pitchFamily="34" charset="-122"/>
+                <a:cs typeface="Arial" pitchFamily="34" charset="-120"/>
+              </a:rPr>
+              <a:t> Use cue cards tomorrow — one card per section (Question / Process / Sources / Artefact / Reflection). Five cards. Bigger writing if it helps you see them.</a:t>
+            </a:r>
+            <a:endParaRPr lang="en-US" sz="1200" dirty="0"/>
+          </a:p>
+        </p:txBody>
+      </p:sp>
+      <p:sp>
+        <p:nvSpPr>
+          <p:cNvPr id="5" name="Text 3"/>
+          <p:cNvSpPr/>
+          <p:nvPr/>
+        </p:nvSpPr>
+        <p:spPr>
+          <a:xfrm>
+            <a:off x="406301" y="4434929"/>
+            <a:ext cx="8498026" cy="213271"/>
+          </a:xfrm>
+          <a:prstGeom prst="rect">
+            <a:avLst/>
+          </a:prstGeom>
+          <a:noFill/>
+          <a:ln/>
+        </p:spPr>
+        <p:txBody>
+          <a:bodyPr wrap="square" lIns="0" tIns="0" rIns="0" bIns="0" rtlCol="0" anchor="t"/>
+          <a:lstStyle/>
+          <a:p>
+            <a:pPr algn="l" indent="0" marL="0">
+              <a:lnSpc>
+                <a:spcPts val="1680"/>
+              </a:lnSpc>
+              <a:spcBef>
+                <a:spcPts val="300"/>
+              </a:spcBef>
+              <a:spcAft>
+                <a:spcPts val="300"/>
+              </a:spcAft>
+              <a:buNone/>
+            </a:pPr>
+            <a:r>
+              <a:rPr lang="en-US" sz="1200" dirty="0">
+                <a:solidFill>
+                  <a:srgbClr val="1C2833"/>
+                </a:solidFill>
+                <a:latin typeface="Arial" pitchFamily="34" charset="0"/>
+                <a:ea typeface="Arial" pitchFamily="34" charset="-122"/>
+                <a:cs typeface="Arial" pitchFamily="34" charset="-120"/>
+              </a:rPr>
+              <a:t>Middle ·  · IKS Curriculum</a:t>
+            </a:r>
+            <a:endParaRPr lang="en-US" sz="1200" dirty="0"/>
+          </a:p>
+        </p:txBody>
+      </p:sp>
+    </p:spTree>
+  </p:cSld>
+  <p:clrMapOvr>
+    <a:masterClrMapping/>
+  </p:clrMapOvr>
+</p:sld>
+</file>
+
+<file path=ppt/slides/slide18.xml><?xml version="1.0" encoding="utf-8"?>
+<p:sld xmlns:a="http://schemas.openxmlformats.org/drawingml/2006/main" xmlns:r="http://schemas.openxmlformats.org/officeDocument/2006/relationships" xmlns:p="http://schemas.openxmlformats.org/presentationml/2006/main">
+  <p:cSld name="Slide 18">
+    <p:bg>
+      <p:bgPr>
+        <a:solidFill>
+          <a:srgbClr val="FFFFFF"/>
+        </a:solidFill>
+      </p:bgPr>
+    </p:bg>
+    <p:spTree>
+      <p:nvGrpSpPr>
+        <p:cNvPr id="1" name=""/>
+        <p:cNvGrpSpPr/>
+        <p:nvPr/>
+      </p:nvGrpSpPr>
+      <p:grpSpPr>
+        <a:xfrm>
+          <a:off x="0" y="0"/>
+          <a:ext cx="0" cy="0"/>
+          <a:chOff x="0" y="0"/>
+          <a:chExt cx="0" cy="0"/>
+        </a:xfrm>
+      </p:grpSpPr>
+      <p:sp>
+        <p:nvSpPr>
+          <p:cNvPr id="2" name="Text 0"/>
+          <p:cNvSpPr/>
+          <p:nvPr/>
+        </p:nvSpPr>
+        <p:spPr>
+          <a:xfrm>
+            <a:off x="0" y="0"/>
+            <a:ext cx="9144000" cy="101501"/>
+          </a:xfrm>
+          <a:prstGeom prst="rect">
+            <a:avLst/>
+          </a:prstGeom>
+          <a:solidFill>
+            <a:srgbClr val="277884"/>
+          </a:solidFill>
+          <a:ln/>
+        </p:spPr>
+        <p:txBody>
+          <a:bodyPr wrap="square" rtlCol="0" anchor="ctr"/>
+          <a:lstStyle/>
+          <a:p>
+            <a:pPr indent="0" marL="0">
+              <a:buNone/>
+            </a:pPr>
+            <a:endParaRPr lang="en-US" dirty="0"/>
+          </a:p>
+        </p:txBody>
+      </p:sp>
+      <p:sp>
+        <p:nvSpPr>
+          <p:cNvPr id="3" name="Text 1"/>
+          <p:cNvSpPr/>
+          <p:nvPr/>
+        </p:nvSpPr>
+        <p:spPr>
+          <a:xfrm>
+            <a:off x="406301" y="457051"/>
+            <a:ext cx="8498026" cy="274290"/>
+          </a:xfrm>
+          <a:prstGeom prst="rect">
+            <a:avLst/>
+          </a:prstGeom>
+          <a:noFill/>
+          <a:ln/>
+        </p:spPr>
+        <p:txBody>
+          <a:bodyPr wrap="square" lIns="0" tIns="0" rIns="0" bIns="0" rtlCol="0" anchor="t"/>
+          <a:lstStyle/>
+          <a:p>
+            <a:pPr algn="l" indent="0" marL="0">
+              <a:lnSpc>
+                <a:spcPts val="2160"/>
+              </a:lnSpc>
+              <a:spcBef>
+                <a:spcPts val="600"/>
+              </a:spcBef>
+              <a:spcAft>
+                <a:spcPts val="800"/>
+              </a:spcAft>
+              <a:buNone/>
+            </a:pPr>
+            <a:r>
+              <a:rPr lang="en-US" sz="1800" b="1" dirty="0">
+                <a:solidFill>
+                  <a:srgbClr val="FE4447"/>
+                </a:solidFill>
+                <a:latin typeface="Georgia" pitchFamily="34" charset="0"/>
+                <a:ea typeface="Georgia" pitchFamily="34" charset="-122"/>
+                <a:cs typeface="Georgia" pitchFamily="34" charset="-120"/>
+              </a:rPr>
+              <a:t>Teacher notes</a:t>
+            </a:r>
+            <a:endParaRPr lang="en-US" sz="1800" dirty="0"/>
+          </a:p>
+        </p:txBody>
+      </p:sp>
+      <p:sp>
+        <p:nvSpPr>
+          <p:cNvPr id="4" name="Text 2"/>
+          <p:cNvSpPr/>
+          <p:nvPr/>
+        </p:nvSpPr>
+        <p:spPr>
+          <a:xfrm>
+            <a:off x="634901" y="883593"/>
+            <a:ext cx="8102798" cy="1835944"/>
+          </a:xfrm>
+          <a:prstGeom prst="rect">
+            <a:avLst/>
+          </a:prstGeom>
+          <a:noFill/>
+          <a:ln/>
+        </p:spPr>
+        <p:txBody>
+          <a:bodyPr wrap="square" lIns="0" tIns="0" rIns="0" bIns="0" rtlCol="0" anchor="t"/>
+          <a:lstStyle/>
+          <a:p>
+            <a:pPr algn="l" marL="342900" indent="-342900">
+              <a:lnSpc>
+                <a:spcPts val="1620"/>
+              </a:lnSpc>
+              <a:spcAft>
+                <a:spcPts val="300"/>
+              </a:spcAft>
+              <a:buSzPct val="100000"/>
+              <a:buChar char="•"/>
+            </a:pPr>
+            <a:r>
+              <a:rPr lang="en-US" sz="1200" dirty="0">
+                <a:solidFill>
+                  <a:srgbClr val="1C2833"/>
+                </a:solidFill>
+                <a:latin typeface="Arial" pitchFamily="34" charset="0"/>
+                <a:ea typeface="Arial" pitchFamily="34" charset="-122"/>
+                <a:cs typeface="Arial" pitchFamily="34" charset="-120"/>
+              </a:rPr>
+              <a:t>The students who most resist rehearsing today are the ones who most need it. Don't permit "I'll wing it." Walk over and say: </a:t>
+            </a:r>
+            <a:pPr algn="l" indent="0" marL="0">
+              <a:lnSpc>
+                <a:spcPts val="1620"/>
+              </a:lnSpc>
+              <a:spcAft>
+                <a:spcPts val="300"/>
+              </a:spcAft>
+              <a:buNone/>
+            </a:pPr>
+            <a:r>
+              <a:rPr lang="en-US" sz="1200" i="1" dirty="0">
+                <a:solidFill>
+                  <a:srgbClr val="1C2833"/>
+                </a:solidFill>
+                <a:latin typeface="Arial" pitchFamily="34" charset="0"/>
+                <a:ea typeface="Arial" pitchFamily="34" charset="-122"/>
+                <a:cs typeface="Arial" pitchFamily="34" charset="-120"/>
+              </a:rPr>
+              <a:t>"Show me the first sentence. Now the second."</a:t>
+            </a:r>
+            <a:endParaRPr lang="en-US" sz="1200" dirty="0"/>
+          </a:p>
+          <a:p>
+            <a:pPr algn="l" marL="342900" indent="-342900">
+              <a:lnSpc>
+                <a:spcPts val="1620"/>
+              </a:lnSpc>
+              <a:spcAft>
+                <a:spcPts val="300"/>
+              </a:spcAft>
+              <a:buSzPct val="100000"/>
+              <a:buChar char="•"/>
+            </a:pPr>
+            <a:r>
+              <a:rPr lang="en-US" sz="1200" dirty="0">
+                <a:solidFill>
+                  <a:srgbClr val="1C2833"/>
+                </a:solidFill>
+                <a:latin typeface="Arial" pitchFamily="34" charset="0"/>
+                <a:ea typeface="Arial" pitchFamily="34" charset="-122"/>
+                <a:cs typeface="Arial" pitchFamily="34" charset="-120"/>
+              </a:rPr>
+              <a:t>Watch the timing. Most students undershoot on Process and overshoot on Artefact. Re-balance during the feedback step.</a:t>
+            </a:r>
+            <a:endParaRPr lang="en-US" sz="1200" dirty="0"/>
+          </a:p>
+          <a:p>
+            <a:pPr algn="l" marL="342900" indent="-342900">
+              <a:lnSpc>
+                <a:spcPts val="1620"/>
+              </a:lnSpc>
+              <a:spcAft>
+                <a:spcPts val="300"/>
+              </a:spcAft>
+              <a:buSzPct val="100000"/>
+              <a:buChar char="•"/>
+            </a:pPr>
+            <a:r>
+              <a:rPr lang="en-US" sz="1200" dirty="0">
+                <a:solidFill>
+                  <a:srgbClr val="1C2833"/>
+                </a:solidFill>
+                <a:latin typeface="Arial" pitchFamily="34" charset="0"/>
+                <a:ea typeface="Arial" pitchFamily="34" charset="-122"/>
+                <a:cs typeface="Arial" pitchFamily="34" charset="-120"/>
+              </a:rPr>
+              <a:t>The "I don't know" move in Q&amp;A is a real teachable moment. Drop in on a few rehearsals and ask a deliberately hard question to surface how the student handles uncertainty. The handling is part of the rubric.</a:t>
+            </a:r>
+            <a:endParaRPr lang="en-US" sz="1200" dirty="0"/>
+          </a:p>
+          <a:p>
+            <a:pPr algn="l" marL="342900" indent="-342900">
+              <a:lnSpc>
+                <a:spcPts val="1620"/>
+              </a:lnSpc>
+              <a:spcAft>
+                <a:spcPts val="300"/>
+              </a:spcAft>
+              <a:buSzPct val="100000"/>
+              <a:buChar char="•"/>
+            </a:pPr>
+            <a:r>
+              <a:rPr lang="en-US" sz="1200" dirty="0">
+                <a:solidFill>
+                  <a:srgbClr val="1C2833"/>
+                </a:solidFill>
+                <a:latin typeface="Arial" pitchFamily="34" charset="0"/>
+                <a:ea typeface="Arial" pitchFamily="34" charset="-122"/>
+                <a:cs typeface="Arial" pitchFamily="34" charset="-120"/>
+              </a:rPr>
+              <a:t>Permit students who really struggle to record their presentation as a video instead of presenting live. Same rubric. (Send the video by Day 10 morning.)</a:t>
+            </a:r>
+            <a:endParaRPr lang="en-US" sz="1200" dirty="0"/>
+          </a:p>
+        </p:txBody>
+      </p:sp>
+      <p:sp>
+        <p:nvSpPr>
+          <p:cNvPr id="5" name="Text 3"/>
+          <p:cNvSpPr/>
+          <p:nvPr/>
+        </p:nvSpPr>
+        <p:spPr>
+          <a:xfrm>
+            <a:off x="406301" y="4434929"/>
+            <a:ext cx="8498026" cy="213271"/>
+          </a:xfrm>
+          <a:prstGeom prst="rect">
+            <a:avLst/>
+          </a:prstGeom>
+          <a:noFill/>
+          <a:ln/>
+        </p:spPr>
+        <p:txBody>
+          <a:bodyPr wrap="square" lIns="0" tIns="0" rIns="0" bIns="0" rtlCol="0" anchor="t"/>
+          <a:lstStyle/>
+          <a:p>
+            <a:pPr algn="l" indent="0" marL="0">
+              <a:lnSpc>
+                <a:spcPts val="1680"/>
+              </a:lnSpc>
+              <a:spcBef>
+                <a:spcPts val="300"/>
+              </a:spcBef>
+              <a:spcAft>
+                <a:spcPts val="300"/>
+              </a:spcAft>
+              <a:buNone/>
+            </a:pPr>
+            <a:r>
+              <a:rPr lang="en-US" sz="1200" dirty="0">
+                <a:solidFill>
+                  <a:srgbClr val="1C2833"/>
+                </a:solidFill>
+                <a:latin typeface="Arial" pitchFamily="34" charset="0"/>
+                <a:ea typeface="Arial" pitchFamily="34" charset="-122"/>
+                <a:cs typeface="Arial" pitchFamily="34" charset="-120"/>
+              </a:rPr>
+              <a:t>Middle ·  · IKS Curriculum</a:t>
+            </a:r>
+            <a:endParaRPr lang="en-US" sz="1200" dirty="0"/>
+          </a:p>
+        </p:txBody>
+      </p:sp>
+    </p:spTree>
+  </p:cSld>
+  <p:clrMapOvr>
+    <a:masterClrMapping/>
+  </p:clrMapOvr>
+</p:sld>
+</file>
+
+<file path=ppt/slides/slide19.xml><?xml version="1.0" encoding="utf-8"?>
+<p:sld xmlns:a="http://schemas.openxmlformats.org/drawingml/2006/main" xmlns:r="http://schemas.openxmlformats.org/officeDocument/2006/relationships" xmlns:p="http://schemas.openxmlformats.org/presentationml/2006/main">
+  <p:cSld name="Slide 19">
+    <p:bg>
+      <p:bgPr>
+        <a:solidFill>
+          <a:srgbClr val="FFFFFF"/>
+        </a:solidFill>
+      </p:bgPr>
+    </p:bg>
+    <p:spTree>
+      <p:nvGrpSpPr>
+        <p:cNvPr id="1" name=""/>
+        <p:cNvGrpSpPr/>
+        <p:nvPr/>
+      </p:nvGrpSpPr>
+      <p:grpSpPr>
+        <a:xfrm>
+          <a:off x="0" y="0"/>
+          <a:ext cx="0" cy="0"/>
+          <a:chOff x="0" y="0"/>
+          <a:chExt cx="0" cy="0"/>
+        </a:xfrm>
+      </p:grpSpPr>
+      <p:sp>
+        <p:nvSpPr>
+          <p:cNvPr id="2" name="Text 0"/>
+          <p:cNvSpPr/>
+          <p:nvPr/>
+        </p:nvSpPr>
+        <p:spPr>
+          <a:xfrm>
+            <a:off x="0" y="0"/>
+            <a:ext cx="9144000" cy="101501"/>
+          </a:xfrm>
+          <a:prstGeom prst="rect">
+            <a:avLst/>
+          </a:prstGeom>
+          <a:solidFill>
+            <a:srgbClr val="277884"/>
+          </a:solidFill>
+          <a:ln/>
+        </p:spPr>
+        <p:txBody>
+          <a:bodyPr wrap="square" rtlCol="0" anchor="ctr"/>
+          <a:lstStyle/>
+          <a:p>
+            <a:pPr indent="0" marL="0">
+              <a:buNone/>
+            </a:pPr>
+            <a:endParaRPr lang="en-US" dirty="0"/>
+          </a:p>
+        </p:txBody>
+      </p:sp>
+      <p:sp>
+        <p:nvSpPr>
+          <p:cNvPr id="3" name="Text 1"/>
+          <p:cNvSpPr/>
+          <p:nvPr/>
+        </p:nvSpPr>
+        <p:spPr>
+          <a:xfrm>
+            <a:off x="406301" y="457051"/>
+            <a:ext cx="8498026" cy="274290"/>
+          </a:xfrm>
+          <a:prstGeom prst="rect">
+            <a:avLst/>
+          </a:prstGeom>
+          <a:noFill/>
+          <a:ln/>
+        </p:spPr>
+        <p:txBody>
+          <a:bodyPr wrap="square" lIns="0" tIns="0" rIns="0" bIns="0" rtlCol="0" anchor="t"/>
+          <a:lstStyle/>
+          <a:p>
+            <a:pPr algn="l" indent="0" marL="0">
+              <a:lnSpc>
+                <a:spcPts val="2160"/>
+              </a:lnSpc>
+              <a:spcBef>
+                <a:spcPts val="600"/>
+              </a:spcBef>
+              <a:spcAft>
+                <a:spcPts val="800"/>
+              </a:spcAft>
+              <a:buNone/>
+            </a:pPr>
+            <a:r>
+              <a:rPr lang="en-US" sz="1800" b="1" dirty="0">
+                <a:solidFill>
+                  <a:srgbClr val="FE4447"/>
+                </a:solidFill>
+                <a:latin typeface="Georgia" pitchFamily="34" charset="0"/>
+                <a:ea typeface="Georgia" pitchFamily="34" charset="-122"/>
+                <a:cs typeface="Georgia" pitchFamily="34" charset="-120"/>
+              </a:rPr>
+              <a:t>Teacher notes (cont.)</a:t>
+            </a:r>
+            <a:endParaRPr lang="en-US" sz="1800" dirty="0"/>
+          </a:p>
+        </p:txBody>
+      </p:sp>
+      <p:sp>
+        <p:nvSpPr>
+          <p:cNvPr id="4" name="Text 2"/>
+          <p:cNvSpPr/>
+          <p:nvPr/>
+        </p:nvSpPr>
+        <p:spPr>
+          <a:xfrm>
+            <a:off x="634901" y="883593"/>
+            <a:ext cx="8102798" cy="487561"/>
+          </a:xfrm>
+          <a:prstGeom prst="rect">
+            <a:avLst/>
+          </a:prstGeom>
+          <a:noFill/>
+          <a:ln/>
+        </p:spPr>
+        <p:txBody>
+          <a:bodyPr wrap="square" lIns="0" tIns="0" rIns="0" bIns="0" rtlCol="0" anchor="t"/>
+          <a:lstStyle/>
+          <a:p>
+            <a:pPr algn="l" marL="342900" indent="-342900">
+              <a:lnSpc>
+                <a:spcPts val="1620"/>
+              </a:lnSpc>
+              <a:spcAft>
+                <a:spcPts val="300"/>
+              </a:spcAft>
+              <a:buSzPct val="100000"/>
+              <a:buChar char="•"/>
+            </a:pPr>
+            <a:r>
+              <a:rPr lang="en-US" sz="1200" dirty="0">
+                <a:solidFill>
+                  <a:srgbClr val="1C2833"/>
+                </a:solidFill>
+                <a:latin typeface="Arial" pitchFamily="34" charset="0"/>
+                <a:ea typeface="Arial" pitchFamily="34" charset="-122"/>
+                <a:cs typeface="Arial" pitchFamily="34" charset="-120"/>
+              </a:rPr>
+              <a:t>Final reminder: parents are coming tomorrow. Triple-check your invite went out by Day 5. If it didn't, send a same-day note tonight — </a:t>
+            </a:r>
+            <a:pPr algn="l" indent="0" marL="0">
+              <a:lnSpc>
+                <a:spcPts val="1620"/>
+              </a:lnSpc>
+              <a:spcAft>
+                <a:spcPts val="300"/>
+              </a:spcAft>
+              <a:buNone/>
+            </a:pPr>
+            <a:r>
+              <a:rPr lang="en-US" sz="1200" i="1" dirty="0">
+                <a:solidFill>
+                  <a:srgbClr val="1C2833"/>
+                </a:solidFill>
+                <a:latin typeface="Arial" pitchFamily="34" charset="0"/>
+                <a:ea typeface="Arial" pitchFamily="34" charset="-122"/>
+                <a:cs typeface="Arial" pitchFamily="34" charset="-120"/>
+              </a:rPr>
+              <a:t>"Tomorrow is project share day, 11:00–11:45, please join if you can."</a:t>
             </a:r>
             <a:endParaRPr lang="en-US" sz="1200" dirty="0"/>
           </a:p>
@@ -2778,7 +6902,7 @@
                 <a:ea typeface="Georgia" pitchFamily="34" charset="-122"/>
                 <a:cs typeface="Georgia" pitchFamily="34" charset="-120"/>
               </a:rPr>
-              <a:t>Materials</a:t>
+              <a:t>Learning objective</a:t>
             </a:r>
             <a:endParaRPr lang="en-US" sz="1800" dirty="0"/>
           </a:p>
@@ -2793,7 +6917,7 @@
         <p:spPr>
           <a:xfrm>
             <a:off x="406301" y="870942"/>
-            <a:ext cx="8498026" cy="639812"/>
+            <a:ext cx="8498026" cy="426541"/>
           </a:xfrm>
           <a:prstGeom prst="rect">
             <a:avLst/>
@@ -2826,8 +6950,33 @@
                 <a:ea typeface="Arial" pitchFamily="34" charset="-122"/>
                 <a:cs typeface="Arial" pitchFamily="34" charset="-120"/>
               </a:rPr>
-              <a:t>– Artefact + documentation (each student brings their own) – Timer per pair (phone is fine) – Printed </a:t>
-            </a:r>
+              <a:t>By the end of this lesson, students will have rehearsed their 4-minute share at least once with structured peer feedback, and will have a clear, written list of refinements for the Day 10 presentation.</a:t>
+            </a:r>
+            <a:endParaRPr lang="en-US" sz="1200" dirty="0"/>
+          </a:p>
+        </p:txBody>
+      </p:sp>
+      <p:sp>
+        <p:nvSpPr>
+          <p:cNvPr id="5" name="Text 3"/>
+          <p:cNvSpPr/>
+          <p:nvPr/>
+        </p:nvSpPr>
+        <p:spPr>
+          <a:xfrm>
+            <a:off x="406301" y="4434929"/>
+            <a:ext cx="8498026" cy="213271"/>
+          </a:xfrm>
+          <a:prstGeom prst="rect">
+            <a:avLst/>
+          </a:prstGeom>
+          <a:noFill/>
+          <a:ln/>
+        </p:spPr>
+        <p:txBody>
+          <a:bodyPr wrap="square" lIns="0" tIns="0" rIns="0" bIns="0" rtlCol="0" anchor="t"/>
+          <a:lstStyle/>
+          <a:p>
             <a:pPr algn="l" indent="0" marL="0">
               <a:lnSpc>
                 <a:spcPts val="1680"/>
@@ -2841,27 +6990,160 @@
               <a:buNone/>
             </a:pPr>
             <a:r>
-              <a:rPr lang="en-US" sz="1200" b="1" dirty="0">
-                <a:solidFill>
-                  <a:srgbClr val="1C2833"/>
-                </a:solidFill>
-                <a:latin typeface="Arial" pitchFamily="34" charset="0"/>
-                <a:ea typeface="Arial" pitchFamily="34" charset="-122"/>
-                <a:cs typeface="Arial" pitchFamily="34" charset="-120"/>
-              </a:rPr>
-              <a:t>Rehearsal Feedback Sheet</a:t>
-            </a:r>
-            <a:pPr algn="l" indent="0" marL="0">
-              <a:lnSpc>
-                <a:spcPts val="1680"/>
+              <a:rPr lang="en-US" sz="1200" dirty="0">
+                <a:solidFill>
+                  <a:srgbClr val="1C2833"/>
+                </a:solidFill>
+                <a:latin typeface="Arial" pitchFamily="34" charset="0"/>
+                <a:ea typeface="Arial" pitchFamily="34" charset="-122"/>
+                <a:cs typeface="Arial" pitchFamily="34" charset="-120"/>
+              </a:rPr>
+              <a:t>Middle ·  · IKS Curriculum</a:t>
+            </a:r>
+            <a:endParaRPr lang="en-US" sz="1200" dirty="0"/>
+          </a:p>
+        </p:txBody>
+      </p:sp>
+    </p:spTree>
+  </p:cSld>
+  <p:clrMapOvr>
+    <a:masterClrMapping/>
+  </p:clrMapOvr>
+</p:sld>
+</file>
+
+<file path=ppt/slides/slide20.xml><?xml version="1.0" encoding="utf-8"?>
+<p:sld xmlns:a="http://schemas.openxmlformats.org/drawingml/2006/main" xmlns:r="http://schemas.openxmlformats.org/officeDocument/2006/relationships" xmlns:p="http://schemas.openxmlformats.org/presentationml/2006/main">
+  <p:cSld name="Slide 20">
+    <p:bg>
+      <p:bgPr>
+        <a:solidFill>
+          <a:srgbClr val="FFFFFF"/>
+        </a:solidFill>
+      </p:bgPr>
+    </p:bg>
+    <p:spTree>
+      <p:nvGrpSpPr>
+        <p:cNvPr id="1" name=""/>
+        <p:cNvGrpSpPr/>
+        <p:nvPr/>
+      </p:nvGrpSpPr>
+      <p:grpSpPr>
+        <a:xfrm>
+          <a:off x="0" y="0"/>
+          <a:ext cx="0" cy="0"/>
+          <a:chOff x="0" y="0"/>
+          <a:chExt cx="0" cy="0"/>
+        </a:xfrm>
+      </p:grpSpPr>
+      <p:sp>
+        <p:nvSpPr>
+          <p:cNvPr id="2" name="Text 0"/>
+          <p:cNvSpPr/>
+          <p:nvPr/>
+        </p:nvSpPr>
+        <p:spPr>
+          <a:xfrm>
+            <a:off x="0" y="0"/>
+            <a:ext cx="9144000" cy="101501"/>
+          </a:xfrm>
+          <a:prstGeom prst="rect">
+            <a:avLst/>
+          </a:prstGeom>
+          <a:solidFill>
+            <a:srgbClr val="277884"/>
+          </a:solidFill>
+          <a:ln/>
+        </p:spPr>
+        <p:txBody>
+          <a:bodyPr wrap="square" rtlCol="0" anchor="ctr"/>
+          <a:lstStyle/>
+          <a:p>
+            <a:pPr indent="0" marL="0">
+              <a:buNone/>
+            </a:pPr>
+            <a:endParaRPr lang="en-US" dirty="0"/>
+          </a:p>
+        </p:txBody>
+      </p:sp>
+      <p:sp>
+        <p:nvSpPr>
+          <p:cNvPr id="3" name="Text 1"/>
+          <p:cNvSpPr/>
+          <p:nvPr/>
+        </p:nvSpPr>
+        <p:spPr>
+          <a:xfrm>
+            <a:off x="406301" y="457051"/>
+            <a:ext cx="8498026" cy="274290"/>
+          </a:xfrm>
+          <a:prstGeom prst="rect">
+            <a:avLst/>
+          </a:prstGeom>
+          <a:noFill/>
+          <a:ln/>
+        </p:spPr>
+        <p:txBody>
+          <a:bodyPr wrap="square" lIns="0" tIns="0" rIns="0" bIns="0" rtlCol="0" anchor="t"/>
+          <a:lstStyle/>
+          <a:p>
+            <a:pPr algn="l" indent="0" marL="0">
+              <a:lnSpc>
+                <a:spcPts val="2160"/>
               </a:lnSpc>
               <a:spcBef>
-                <a:spcPts val="300"/>
+                <a:spcPts val="600"/>
               </a:spcBef>
               <a:spcAft>
-                <a:spcPts val="300"/>
-              </a:spcAft>
-              <a:buNone/>
+                <a:spcPts val="800"/>
+              </a:spcAft>
+              <a:buNone/>
+            </a:pPr>
+            <a:r>
+              <a:rPr lang="en-US" sz="1800" b="1" dirty="0">
+                <a:solidFill>
+                  <a:srgbClr val="FE4447"/>
+                </a:solidFill>
+                <a:latin typeface="Georgia" pitchFamily="34" charset="0"/>
+                <a:ea typeface="Georgia" pitchFamily="34" charset="-122"/>
+                <a:cs typeface="Georgia" pitchFamily="34" charset="-120"/>
+              </a:rPr>
+              <a:t>Citation(s) used in this lesson</a:t>
+            </a:r>
+            <a:endParaRPr lang="en-US" sz="1800" dirty="0"/>
+          </a:p>
+        </p:txBody>
+      </p:sp>
+      <p:sp>
+        <p:nvSpPr>
+          <p:cNvPr id="4" name="Text 2"/>
+          <p:cNvSpPr/>
+          <p:nvPr/>
+        </p:nvSpPr>
+        <p:spPr>
+          <a:xfrm>
+            <a:off x="634901" y="883593"/>
+            <a:ext cx="8102798" cy="281880"/>
+          </a:xfrm>
+          <a:prstGeom prst="rect">
+            <a:avLst/>
+          </a:prstGeom>
+          <a:noFill/>
+          <a:ln/>
+        </p:spPr>
+        <p:txBody>
+          <a:bodyPr wrap="square" lIns="0" tIns="0" rIns="0" bIns="0" rtlCol="0" anchor="t"/>
+          <a:lstStyle/>
+          <a:p>
+            <a:pPr algn="l" marL="342900" indent="-342900">
+              <a:lnSpc>
+                <a:spcPts val="1620"/>
+              </a:lnSpc>
+              <a:spcAft>
+                <a:spcPts val="300"/>
+              </a:spcAft>
+              <a:buSzPct val="100000"/>
+              <a:buChar char="•"/>
             </a:pPr>
             <a:r>
               <a:rPr lang="en-US" sz="1200" dirty="0">
@@ -2872,7 +7154,47 @@
                 <a:ea typeface="Arial" pitchFamily="34" charset="-122"/>
                 <a:cs typeface="Arial" pitchFamily="34" charset="-120"/>
               </a:rPr>
-              <a:t> (see template below), 2 per student – A separate corner of the room set up as a "stage" — visible from front of the room (this surfaces who's comfortable presenting and who isn't, gently)</a:t>
+              <a:t>No new scripture citation. The rehearsal discipline echoes </a:t>
+            </a:r>
+            <a:pPr algn="l" indent="0" marL="0">
+              <a:lnSpc>
+                <a:spcPts val="1620"/>
+              </a:lnSpc>
+              <a:spcAft>
+                <a:spcPts val="300"/>
+              </a:spcAft>
+              <a:buNone/>
+            </a:pPr>
+            <a:r>
+              <a:rPr lang="en-US" sz="1200" i="1" dirty="0">
+                <a:solidFill>
+                  <a:srgbClr val="1C2833"/>
+                </a:solidFill>
+                <a:latin typeface="Arial" pitchFamily="34" charset="0"/>
+                <a:ea typeface="Arial" pitchFamily="34" charset="-122"/>
+                <a:cs typeface="Arial" pitchFamily="34" charset="-120"/>
+              </a:rPr>
+              <a:t>abhyāsa</a:t>
+            </a:r>
+            <a:pPr algn="l" indent="0" marL="0">
+              <a:lnSpc>
+                <a:spcPts val="1620"/>
+              </a:lnSpc>
+              <a:spcAft>
+                <a:spcPts val="300"/>
+              </a:spcAft>
+              <a:buNone/>
+            </a:pPr>
+            <a:r>
+              <a:rPr lang="en-US" sz="1200" dirty="0">
+                <a:solidFill>
+                  <a:srgbClr val="1C2833"/>
+                </a:solidFill>
+                <a:latin typeface="Arial" pitchFamily="34" charset="0"/>
+                <a:ea typeface="Arial" pitchFamily="34" charset="-122"/>
+                <a:cs typeface="Arial" pitchFamily="34" charset="-120"/>
+              </a:rPr>
+              <a:t> (repeated practice, introduced Day 1).</a:t>
             </a:r>
             <a:endParaRPr lang="en-US" sz="1200" dirty="0"/>
           </a:p>
@@ -3030,7 +7352,7 @@
                 <a:ea typeface="Georgia" pitchFamily="34" charset="-122"/>
                 <a:cs typeface="Georgia" pitchFamily="34" charset="-120"/>
               </a:rPr>
-              <a:t>Lesson flow</a:t>
+              <a:t>Materials</a:t>
             </a:r>
             <a:endParaRPr lang="en-US" sz="1800" dirty="0"/>
           </a:p>
@@ -3039,6 +7361,164 @@
       <p:sp>
         <p:nvSpPr>
           <p:cNvPr id="4" name="Text 2"/>
+          <p:cNvSpPr/>
+          <p:nvPr/>
+        </p:nvSpPr>
+        <p:spPr>
+          <a:xfrm>
+            <a:off x="634901" y="883593"/>
+            <a:ext cx="8102798" cy="1218902"/>
+          </a:xfrm>
+          <a:prstGeom prst="rect">
+            <a:avLst/>
+          </a:prstGeom>
+          <a:noFill/>
+          <a:ln/>
+        </p:spPr>
+        <p:txBody>
+          <a:bodyPr wrap="square" lIns="0" tIns="0" rIns="0" bIns="0" rtlCol="0" anchor="t"/>
+          <a:lstStyle/>
+          <a:p>
+            <a:pPr algn="l" marL="342900" indent="-342900">
+              <a:lnSpc>
+                <a:spcPts val="1620"/>
+              </a:lnSpc>
+              <a:spcAft>
+                <a:spcPts val="300"/>
+              </a:spcAft>
+              <a:buSzPct val="100000"/>
+              <a:buChar char="•"/>
+            </a:pPr>
+            <a:r>
+              <a:rPr lang="en-US" sz="1200" dirty="0">
+                <a:solidFill>
+                  <a:srgbClr val="1C2833"/>
+                </a:solidFill>
+                <a:latin typeface="Arial" pitchFamily="34" charset="0"/>
+                <a:ea typeface="Arial" pitchFamily="34" charset="-122"/>
+                <a:cs typeface="Arial" pitchFamily="34" charset="-120"/>
+              </a:rPr>
+              <a:t>Artefact + documentation (each student brings their own)</a:t>
+            </a:r>
+            <a:endParaRPr lang="en-US" sz="1200" dirty="0"/>
+          </a:p>
+          <a:p>
+            <a:pPr algn="l" marL="342900" indent="-342900">
+              <a:lnSpc>
+                <a:spcPts val="1620"/>
+              </a:lnSpc>
+              <a:spcAft>
+                <a:spcPts val="300"/>
+              </a:spcAft>
+              <a:buSzPct val="100000"/>
+              <a:buChar char="•"/>
+            </a:pPr>
+            <a:r>
+              <a:rPr lang="en-US" sz="1200" dirty="0">
+                <a:solidFill>
+                  <a:srgbClr val="1C2833"/>
+                </a:solidFill>
+                <a:latin typeface="Arial" pitchFamily="34" charset="0"/>
+                <a:ea typeface="Arial" pitchFamily="34" charset="-122"/>
+                <a:cs typeface="Arial" pitchFamily="34" charset="-120"/>
+              </a:rPr>
+              <a:t>Timer per pair (phone is fine)</a:t>
+            </a:r>
+            <a:endParaRPr lang="en-US" sz="1200" dirty="0"/>
+          </a:p>
+          <a:p>
+            <a:pPr algn="l" marL="342900" indent="-342900">
+              <a:lnSpc>
+                <a:spcPts val="1620"/>
+              </a:lnSpc>
+              <a:spcAft>
+                <a:spcPts val="300"/>
+              </a:spcAft>
+              <a:buSzPct val="100000"/>
+              <a:buChar char="•"/>
+            </a:pPr>
+            <a:r>
+              <a:rPr lang="en-US" sz="1200" dirty="0">
+                <a:solidFill>
+                  <a:srgbClr val="1C2833"/>
+                </a:solidFill>
+                <a:latin typeface="Arial" pitchFamily="34" charset="0"/>
+                <a:ea typeface="Arial" pitchFamily="34" charset="-122"/>
+                <a:cs typeface="Arial" pitchFamily="34" charset="-120"/>
+              </a:rPr>
+              <a:t>Printed </a:t>
+            </a:r>
+            <a:pPr algn="l" indent="0" marL="0">
+              <a:lnSpc>
+                <a:spcPts val="1620"/>
+              </a:lnSpc>
+              <a:spcAft>
+                <a:spcPts val="300"/>
+              </a:spcAft>
+              <a:buNone/>
+            </a:pPr>
+            <a:r>
+              <a:rPr lang="en-US" sz="1200" b="1" dirty="0">
+                <a:solidFill>
+                  <a:srgbClr val="1C2833"/>
+                </a:solidFill>
+                <a:latin typeface="Arial" pitchFamily="34" charset="0"/>
+                <a:ea typeface="Arial" pitchFamily="34" charset="-122"/>
+                <a:cs typeface="Arial" pitchFamily="34" charset="-120"/>
+              </a:rPr>
+              <a:t>Rehearsal Feedback Sheet</a:t>
+            </a:r>
+            <a:pPr algn="l" indent="0" marL="0">
+              <a:lnSpc>
+                <a:spcPts val="1620"/>
+              </a:lnSpc>
+              <a:spcAft>
+                <a:spcPts val="300"/>
+              </a:spcAft>
+              <a:buNone/>
+            </a:pPr>
+            <a:r>
+              <a:rPr lang="en-US" sz="1200" dirty="0">
+                <a:solidFill>
+                  <a:srgbClr val="1C2833"/>
+                </a:solidFill>
+                <a:latin typeface="Arial" pitchFamily="34" charset="0"/>
+                <a:ea typeface="Arial" pitchFamily="34" charset="-122"/>
+                <a:cs typeface="Arial" pitchFamily="34" charset="-120"/>
+              </a:rPr>
+              <a:t> (see template below), 2 per student</a:t>
+            </a:r>
+            <a:endParaRPr lang="en-US" sz="1200" dirty="0"/>
+          </a:p>
+          <a:p>
+            <a:pPr algn="l" marL="342900" indent="-342900">
+              <a:lnSpc>
+                <a:spcPts val="1620"/>
+              </a:lnSpc>
+              <a:spcAft>
+                <a:spcPts val="300"/>
+              </a:spcAft>
+              <a:buSzPct val="100000"/>
+              <a:buChar char="•"/>
+            </a:pPr>
+            <a:r>
+              <a:rPr lang="en-US" sz="1200" dirty="0">
+                <a:solidFill>
+                  <a:srgbClr val="1C2833"/>
+                </a:solidFill>
+                <a:latin typeface="Arial" pitchFamily="34" charset="0"/>
+                <a:ea typeface="Arial" pitchFamily="34" charset="-122"/>
+                <a:cs typeface="Arial" pitchFamily="34" charset="-120"/>
+              </a:rPr>
+              <a:t>A separate corner of the room set up as a "stage" — visible from front of the room (this surfaces who's comfortable presenting and who isn't, gently)</a:t>
+            </a:r>
+            <a:endParaRPr lang="en-US" sz="1200" dirty="0"/>
+          </a:p>
+        </p:txBody>
+      </p:sp>
+      <p:sp>
+        <p:nvSpPr>
+          <p:cNvPr id="5" name="Text 3"/>
           <p:cNvSpPr/>
           <p:nvPr/>
         </p:nvSpPr>
@@ -3188,7 +7668,7 @@
                 <a:ea typeface="Georgia" pitchFamily="34" charset="-122"/>
                 <a:cs typeface="Georgia" pitchFamily="34" charset="-120"/>
               </a:rPr>
-              <a:t>Warm-up (5 min)</a:t>
+              <a:t>Lesson flow</a:t>
             </a:r>
             <a:endParaRPr lang="en-US" sz="1800" dirty="0"/>
           </a:p>
@@ -3197,146 +7677,6 @@
       <p:sp>
         <p:nvSpPr>
           <p:cNvPr id="4" name="Text 2"/>
-          <p:cNvSpPr/>
-          <p:nvPr/>
-        </p:nvSpPr>
-        <p:spPr>
-          <a:xfrm>
-            <a:off x="406301" y="870942"/>
-            <a:ext cx="8498026" cy="213271"/>
-          </a:xfrm>
-          <a:prstGeom prst="rect">
-            <a:avLst/>
-          </a:prstGeom>
-          <a:noFill/>
-          <a:ln/>
-        </p:spPr>
-        <p:txBody>
-          <a:bodyPr wrap="square" lIns="0" tIns="0" rIns="0" bIns="0" rtlCol="0" anchor="t"/>
-          <a:lstStyle/>
-          <a:p>
-            <a:pPr algn="l" indent="0" marL="0">
-              <a:lnSpc>
-                <a:spcPts val="1680"/>
-              </a:lnSpc>
-              <a:spcBef>
-                <a:spcPts val="300"/>
-              </a:spcBef>
-              <a:spcAft>
-                <a:spcPts val="300"/>
-              </a:spcAft>
-              <a:buNone/>
-            </a:pPr>
-            <a:r>
-              <a:rPr lang="en-US" sz="1200" dirty="0">
-                <a:solidFill>
-                  <a:srgbClr val="1C2833"/>
-                </a:solidFill>
-                <a:latin typeface="Arial" pitchFamily="34" charset="0"/>
-                <a:ea typeface="Arial" pitchFamily="34" charset="-122"/>
-                <a:cs typeface="Arial" pitchFamily="34" charset="-120"/>
-              </a:rPr>
-              <a:t>– Daily prompt: </a:t>
-            </a:r>
-            <a:pPr algn="l" indent="0" marL="0">
-              <a:lnSpc>
-                <a:spcPts val="1680"/>
-              </a:lnSpc>
-              <a:spcBef>
-                <a:spcPts val="300"/>
-              </a:spcBef>
-              <a:spcAft>
-                <a:spcPts val="300"/>
-              </a:spcAft>
-              <a:buNone/>
-            </a:pPr>
-            <a:r>
-              <a:rPr lang="en-US" sz="1200" i="1" dirty="0">
-                <a:solidFill>
-                  <a:srgbClr val="1C2833"/>
-                </a:solidFill>
-                <a:latin typeface="Arial" pitchFamily="34" charset="0"/>
-                <a:ea typeface="Arial" pitchFamily="34" charset="-122"/>
-                <a:cs typeface="Arial" pitchFamily="34" charset="-120"/>
-              </a:rPr>
-              <a:t>"What's the ONE sentence you most want the audience to remember tomorrow?"</a:t>
-            </a:r>
-            <a:pPr algn="l" indent="0" marL="0">
-              <a:lnSpc>
-                <a:spcPts val="1680"/>
-              </a:lnSpc>
-              <a:spcBef>
-                <a:spcPts val="300"/>
-              </a:spcBef>
-              <a:spcAft>
-                <a:spcPts val="300"/>
-              </a:spcAft>
-              <a:buNone/>
-            </a:pPr>
-            <a:r>
-              <a:rPr lang="en-US" sz="1200" dirty="0">
-                <a:solidFill>
-                  <a:srgbClr val="1C2833"/>
-                </a:solidFill>
-                <a:latin typeface="Arial" pitchFamily="34" charset="0"/>
-                <a:ea typeface="Arial" pitchFamily="34" charset="-122"/>
-                <a:cs typeface="Arial" pitchFamily="34" charset="-120"/>
-              </a:rPr>
-              <a:t> — 3 students share.</a:t>
-            </a:r>
-            <a:endParaRPr lang="en-US" sz="1200" dirty="0"/>
-          </a:p>
-        </p:txBody>
-      </p:sp>
-      <p:sp>
-        <p:nvSpPr>
-          <p:cNvPr id="5" name="Text 3"/>
-          <p:cNvSpPr/>
-          <p:nvPr/>
-        </p:nvSpPr>
-        <p:spPr>
-          <a:xfrm>
-            <a:off x="634901" y="1173063"/>
-            <a:ext cx="8102798" cy="281880"/>
-          </a:xfrm>
-          <a:prstGeom prst="rect">
-            <a:avLst/>
-          </a:prstGeom>
-          <a:noFill/>
-          <a:ln/>
-        </p:spPr>
-        <p:txBody>
-          <a:bodyPr wrap="square" lIns="0" tIns="0" rIns="0" bIns="0" rtlCol="0" anchor="t"/>
-          <a:lstStyle/>
-          <a:p>
-            <a:pPr algn="l" marL="342900" indent="-342900">
-              <a:lnSpc>
-                <a:spcPts val="1620"/>
-              </a:lnSpc>
-              <a:spcAft>
-                <a:spcPts val="300"/>
-              </a:spcAft>
-              <a:buSzPct val="100000"/>
-              <a:buChar char="•"/>
-            </a:pPr>
-            <a:r>
-              <a:rPr lang="en-US" sz="1200" i="1" dirty="0">
-                <a:solidFill>
-                  <a:srgbClr val="1C2833"/>
-                </a:solidFill>
-                <a:latin typeface="Arial" pitchFamily="34" charset="0"/>
-                <a:ea typeface="Arial" pitchFamily="34" charset="-122"/>
-                <a:cs typeface="Arial" pitchFamily="34" charset="-120"/>
-              </a:rPr>
-              <a:t>"That sentence is your through-line. Your whole share is in service of it."</a:t>
-            </a:r>
-            <a:endParaRPr lang="en-US" sz="1200" dirty="0"/>
-          </a:p>
-        </p:txBody>
-      </p:sp>
-      <p:sp>
-        <p:nvSpPr>
-          <p:cNvPr id="6" name="Text 4"/>
           <p:cNvSpPr/>
           <p:nvPr/>
         </p:nvSpPr>
@@ -3486,7 +7826,7 @@
                 <a:ea typeface="Georgia" pitchFamily="34" charset="-122"/>
                 <a:cs typeface="Georgia" pitchFamily="34" charset="-120"/>
               </a:rPr>
-              <a:t>Activity (27 min) — Rehearse + feedback</a:t>
+              <a:t>Warm-up (5 min)</a:t>
             </a:r>
             <a:endParaRPr lang="en-US" sz="1800" dirty="0"/>
           </a:p>
@@ -3500,8 +7840,8 @@
         </p:nvSpPr>
         <p:spPr>
           <a:xfrm>
-            <a:off x="406301" y="870942"/>
-            <a:ext cx="8498026" cy="222796"/>
+            <a:off x="634901" y="883593"/>
+            <a:ext cx="8102798" cy="525661"/>
           </a:xfrm>
           <a:prstGeom prst="rect">
             <a:avLst/>
@@ -3513,17 +7853,15 @@
           <a:bodyPr wrap="square" lIns="0" tIns="0" rIns="0" bIns="0" rtlCol="0" anchor="t"/>
           <a:lstStyle/>
           <a:p>
-            <a:pPr algn="l" indent="0" marL="0">
-              <a:lnSpc>
-                <a:spcPts val="1680"/>
-              </a:lnSpc>
-              <a:spcBef>
-                <a:spcPts val="300"/>
-              </a:spcBef>
-              <a:spcAft>
-                <a:spcPts val="300"/>
-              </a:spcAft>
-              <a:buNone/>
+            <a:pPr algn="l" marL="342900" indent="-342900">
+              <a:lnSpc>
+                <a:spcPts val="1620"/>
+              </a:lnSpc>
+              <a:spcAft>
+                <a:spcPts val="300"/>
+              </a:spcAft>
+              <a:buSzPct val="100000"/>
+              <a:buChar char="•"/>
             </a:pPr>
             <a:r>
               <a:rPr lang="en-US" sz="1200" dirty="0">
@@ -3534,15 +7872,32 @@
                 <a:ea typeface="Arial" pitchFamily="34" charset="-122"/>
                 <a:cs typeface="Arial" pitchFamily="34" charset="-120"/>
               </a:rPr>
-              <a:t>See </a:t>
-            </a:r>
-            <a:pPr algn="l" indent="0" marL="0">
-              <a:lnSpc>
-                <a:spcPts val="1680"/>
-              </a:lnSpc>
-              <a:spcBef>
-                <a:spcPts val="300"/>
-              </a:spcBef>
+              <a:t>Daily prompt: </a:t>
+            </a:r>
+            <a:pPr algn="l" indent="0" marL="0">
+              <a:lnSpc>
+                <a:spcPts val="1620"/>
+              </a:lnSpc>
+              <a:spcAft>
+                <a:spcPts val="300"/>
+              </a:spcAft>
+              <a:buNone/>
+            </a:pPr>
+            <a:r>
+              <a:rPr lang="en-US" sz="1200" i="1" dirty="0">
+                <a:solidFill>
+                  <a:srgbClr val="1C2833"/>
+                </a:solidFill>
+                <a:latin typeface="Arial" pitchFamily="34" charset="0"/>
+                <a:ea typeface="Arial" pitchFamily="34" charset="-122"/>
+                <a:cs typeface="Arial" pitchFamily="34" charset="-120"/>
+              </a:rPr>
+              <a:t>"What's the ONE sentence you most want the audience to remember tomorrow?"</a:t>
+            </a:r>
+            <a:pPr algn="l" indent="0" marL="0">
+              <a:lnSpc>
+                <a:spcPts val="1620"/>
+              </a:lnSpc>
               <a:spcAft>
                 <a:spcPts val="300"/>
               </a:spcAft>
@@ -3557,178 +7912,39 @@
                 <a:ea typeface="Arial" pitchFamily="34" charset="-122"/>
                 <a:cs typeface="Arial" pitchFamily="34" charset="-120"/>
               </a:rPr>
-              <a:t>activities/activity-03-rehearsal.md</a:t>
-            </a:r>
-            <a:pPr algn="l" indent="0" marL="0">
-              <a:lnSpc>
-                <a:spcPts val="1680"/>
-              </a:lnSpc>
-              <a:spcBef>
-                <a:spcPts val="300"/>
-              </a:spcBef>
-              <a:spcAft>
-                <a:spcPts val="300"/>
-              </a:spcAft>
-              <a:buNone/>
-            </a:pPr>
-            <a:r>
-              <a:rPr lang="en-US" sz="1200" dirty="0">
-                <a:solidFill>
-                  <a:srgbClr val="1C2833"/>
-                </a:solidFill>
-                <a:latin typeface="Arial" pitchFamily="34" charset="0"/>
-                <a:ea typeface="Arial" pitchFamily="34" charset="-122"/>
-                <a:cs typeface="Arial" pitchFamily="34" charset="-120"/>
-              </a:rPr>
-              <a:t> for the full activity. Quick summary:</a:t>
+              <a:t> — 3 students share.</a:t>
             </a:r>
             <a:endParaRPr lang="en-US" sz="1200" dirty="0"/>
           </a:p>
+          <a:p>
+            <a:pPr algn="l" marL="342900" indent="-342900">
+              <a:lnSpc>
+                <a:spcPts val="1620"/>
+              </a:lnSpc>
+              <a:spcAft>
+                <a:spcPts val="300"/>
+              </a:spcAft>
+              <a:buSzPct val="100000"/>
+              <a:buChar char="•"/>
+            </a:pPr>
+            <a:r>
+              <a:rPr lang="en-US" sz="1200" i="1" dirty="0">
+                <a:solidFill>
+                  <a:srgbClr val="1C2833"/>
+                </a:solidFill>
+                <a:latin typeface="Arial" pitchFamily="34" charset="0"/>
+                <a:ea typeface="Arial" pitchFamily="34" charset="-122"/>
+                <a:cs typeface="Arial" pitchFamily="34" charset="-120"/>
+              </a:rPr>
+              <a:t>"That sentence is your through-line. Your whole share is in service of it."</a:t>
+            </a:r>
+            <a:endParaRPr lang="en-US" sz="1200" dirty="0"/>
+          </a:p>
         </p:txBody>
       </p:sp>
       <p:sp>
         <p:nvSpPr>
           <p:cNvPr id="5" name="Text 3"/>
-          <p:cNvSpPr/>
-          <p:nvPr/>
-        </p:nvSpPr>
-        <p:spPr>
-          <a:xfrm>
-            <a:off x="406301" y="1169938"/>
-            <a:ext cx="8498026" cy="853083"/>
-          </a:xfrm>
-          <a:prstGeom prst="rect">
-            <a:avLst/>
-          </a:prstGeom>
-          <a:noFill/>
-          <a:ln/>
-        </p:spPr>
-        <p:txBody>
-          <a:bodyPr wrap="square" lIns="0" tIns="0" rIns="0" bIns="0" rtlCol="0" anchor="t"/>
-          <a:lstStyle/>
-          <a:p>
-            <a:pPr algn="l" indent="0" marL="0">
-              <a:lnSpc>
-                <a:spcPts val="1680"/>
-              </a:lnSpc>
-              <a:spcBef>
-                <a:spcPts val="300"/>
-              </a:spcBef>
-              <a:spcAft>
-                <a:spcPts val="300"/>
-              </a:spcAft>
-              <a:buNone/>
-            </a:pPr>
-            <a:r>
-              <a:rPr lang="en-US" sz="1200" dirty="0">
-                <a:solidFill>
-                  <a:srgbClr val="1C2833"/>
-                </a:solidFill>
-                <a:latin typeface="Arial" pitchFamily="34" charset="0"/>
-                <a:ea typeface="Arial" pitchFamily="34" charset="-122"/>
-                <a:cs typeface="Arial" pitchFamily="34" charset="-120"/>
-              </a:rPr>
-              <a:t>– Same pairs from Day 5 (so the feedback builds on existing rapport). – Each direction: 4-minute share + 1-minute Q&amp;A + 5 minutes feedback. 10 minutes per direction × 2 = 20 minutes. Plus 5 minutes joint refinement. – Both students complete the </a:t>
-            </a:r>
-            <a:pPr algn="l" indent="0" marL="0">
-              <a:lnSpc>
-                <a:spcPts val="1680"/>
-              </a:lnSpc>
-              <a:spcBef>
-                <a:spcPts val="300"/>
-              </a:spcBef>
-              <a:spcAft>
-                <a:spcPts val="300"/>
-              </a:spcAft>
-              <a:buNone/>
-            </a:pPr>
-            <a:r>
-              <a:rPr lang="en-US" sz="1200" b="1" dirty="0">
-                <a:solidFill>
-                  <a:srgbClr val="1C2833"/>
-                </a:solidFill>
-                <a:latin typeface="Arial" pitchFamily="34" charset="0"/>
-                <a:ea typeface="Arial" pitchFamily="34" charset="-122"/>
-                <a:cs typeface="Arial" pitchFamily="34" charset="-120"/>
-              </a:rPr>
-              <a:t>Rehearsal Feedback Sheet</a:t>
-            </a:r>
-            <a:pPr algn="l" indent="0" marL="0">
-              <a:lnSpc>
-                <a:spcPts val="1680"/>
-              </a:lnSpc>
-              <a:spcBef>
-                <a:spcPts val="300"/>
-              </a:spcBef>
-              <a:spcAft>
-                <a:spcPts val="300"/>
-              </a:spcAft>
-              <a:buNone/>
-            </a:pPr>
-            <a:r>
-              <a:rPr lang="en-US" sz="1200" dirty="0">
-                <a:solidFill>
-                  <a:srgbClr val="1C2833"/>
-                </a:solidFill>
-                <a:latin typeface="Arial" pitchFamily="34" charset="0"/>
-                <a:ea typeface="Arial" pitchFamily="34" charset="-122"/>
-                <a:cs typeface="Arial" pitchFamily="34" charset="-120"/>
-              </a:rPr>
-              <a:t> for each other. – Last 2 minutes of activity: each student writes </a:t>
-            </a:r>
-            <a:pPr algn="l" indent="0" marL="0">
-              <a:lnSpc>
-                <a:spcPts val="1680"/>
-              </a:lnSpc>
-              <a:spcBef>
-                <a:spcPts val="300"/>
-              </a:spcBef>
-              <a:spcAft>
-                <a:spcPts val="300"/>
-              </a:spcAft>
-              <a:buNone/>
-            </a:pPr>
-            <a:r>
-              <a:rPr lang="en-US" sz="1200" b="1" dirty="0">
-                <a:solidFill>
-                  <a:srgbClr val="1C2833"/>
-                </a:solidFill>
-                <a:latin typeface="Arial" pitchFamily="34" charset="0"/>
-                <a:ea typeface="Arial" pitchFamily="34" charset="-122"/>
-                <a:cs typeface="Arial" pitchFamily="34" charset="-120"/>
-              </a:rPr>
-              <a:t>three refinements</a:t>
-            </a:r>
-            <a:pPr algn="l" indent="0" marL="0">
-              <a:lnSpc>
-                <a:spcPts val="1680"/>
-              </a:lnSpc>
-              <a:spcBef>
-                <a:spcPts val="300"/>
-              </a:spcBef>
-              <a:spcAft>
-                <a:spcPts val="300"/>
-              </a:spcAft>
-              <a:buNone/>
-            </a:pPr>
-            <a:r>
-              <a:rPr lang="en-US" sz="1200" dirty="0">
-                <a:solidFill>
-                  <a:srgbClr val="1C2833"/>
-                </a:solidFill>
-                <a:latin typeface="Arial" pitchFamily="34" charset="0"/>
-                <a:ea typeface="Arial" pitchFamily="34" charset="-122"/>
-                <a:cs typeface="Arial" pitchFamily="34" charset="-120"/>
-              </a:rPr>
-              <a:t> for the actual presentation tomorrow.</a:t>
-            </a:r>
-            <a:endParaRPr lang="en-US" sz="1200" dirty="0"/>
-          </a:p>
-        </p:txBody>
-      </p:sp>
-      <p:sp>
-        <p:nvSpPr>
-          <p:cNvPr id="6" name="Text 4"/>
           <p:cNvSpPr/>
           <p:nvPr/>
         </p:nvSpPr>
@@ -3878,7 +8094,7 @@
                 <a:ea typeface="Georgia" pitchFamily="34" charset="-122"/>
                 <a:cs typeface="Georgia" pitchFamily="34" charset="-120"/>
               </a:rPr>
-              <a:t>Student-facing content</a:t>
+              <a:t>Core (8 min)</a:t>
             </a:r>
             <a:endParaRPr lang="en-US" sz="1800" dirty="0"/>
           </a:p>
@@ -3892,549 +8108,115 @@
         </p:nvSpPr>
         <p:spPr>
           <a:xfrm>
-            <a:off x="406301" y="883593"/>
-            <a:ext cx="8331398" cy="2650331"/>
-          </a:xfrm>
-          <a:prstGeom prst="rect">
-            <a:avLst/>
-          </a:prstGeom>
-          <a:solidFill>
-            <a:srgbClr val="F4F8F9"/>
-          </a:solidFill>
-          <a:ln/>
-        </p:spPr>
-        <p:txBody>
-          <a:bodyPr wrap="square" rtlCol="0" anchor="ctr"/>
-          <a:lstStyle/>
-          <a:p>
-            <a:pPr indent="0" marL="0">
-              <a:buNone/>
-            </a:pPr>
-            <a:endParaRPr lang="en-US" dirty="0"/>
-          </a:p>
-        </p:txBody>
-      </p:sp>
-      <p:sp>
-        <p:nvSpPr>
-          <p:cNvPr id="5" name="Shape 3"/>
-          <p:cNvSpPr/>
-          <p:nvPr/>
-        </p:nvSpPr>
-        <p:spPr>
-          <a:xfrm>
-            <a:off x="434876" y="883593"/>
-            <a:ext cx="0" cy="2650331"/>
-          </a:xfrm>
-          <a:prstGeom prst="line">
+            <a:off x="634901" y="883593"/>
+            <a:ext cx="8102798" cy="281880"/>
+          </a:xfrm>
+          <a:prstGeom prst="rect">
             <a:avLst/>
           </a:prstGeom>
           <a:noFill/>
-          <a:ln w="57150">
-            <a:solidFill>
-              <a:srgbClr val="FE4447"/>
-            </a:solidFill>
-            <a:prstDash val="solid"/>
-          </a:ln>
-        </p:spPr>
+          <a:ln/>
+        </p:spPr>
+        <p:txBody>
+          <a:bodyPr wrap="square" lIns="0" tIns="0" rIns="0" bIns="0" rtlCol="0" anchor="t"/>
+          <a:lstStyle/>
+          <a:p>
+            <a:pPr algn="l" marL="342900" indent="-342900">
+              <a:lnSpc>
+                <a:spcPts val="1620"/>
+              </a:lnSpc>
+              <a:spcAft>
+                <a:spcPts val="300"/>
+              </a:spcAft>
+              <a:buSzPct val="100000"/>
+              <a:buChar char="•"/>
+            </a:pPr>
+            <a:r>
+              <a:rPr lang="en-US" sz="1200" b="1" dirty="0">
+                <a:solidFill>
+                  <a:srgbClr val="1C2833"/>
+                </a:solidFill>
+                <a:latin typeface="Arial" pitchFamily="34" charset="0"/>
+                <a:ea typeface="Arial" pitchFamily="34" charset="-122"/>
+                <a:cs typeface="Arial" pitchFamily="34" charset="-120"/>
+              </a:rPr>
+              <a:t>The 4-minute structure</a:t>
+            </a:r>
+            <a:pPr algn="l" indent="0" marL="0">
+              <a:lnSpc>
+                <a:spcPts val="1620"/>
+              </a:lnSpc>
+              <a:spcAft>
+                <a:spcPts val="300"/>
+              </a:spcAft>
+              <a:buNone/>
+            </a:pPr>
+            <a:r>
+              <a:rPr lang="en-US" sz="1200" dirty="0">
+                <a:solidFill>
+                  <a:srgbClr val="1C2833"/>
+                </a:solidFill>
+                <a:latin typeface="Arial" pitchFamily="34" charset="0"/>
+                <a:ea typeface="Arial" pitchFamily="34" charset="-122"/>
+                <a:cs typeface="Arial" pitchFamily="34" charset="-120"/>
+              </a:rPr>
+              <a:t> (4 min). Write on the board:</a:t>
+            </a:r>
+            <a:endParaRPr lang="en-US" sz="1200" dirty="0"/>
+          </a:p>
+        </p:txBody>
+      </p:sp>
+      <p:sp>
+        <p:nvSpPr>
+          <p:cNvPr id="5" name="Text 3"/>
+          <p:cNvSpPr/>
+          <p:nvPr/>
+        </p:nvSpPr>
+        <p:spPr>
+          <a:xfrm>
+            <a:off x="406301" y="1254323"/>
+            <a:ext cx="8498026" cy="213271"/>
+          </a:xfrm>
+          <a:prstGeom prst="rect">
+            <a:avLst/>
+          </a:prstGeom>
+          <a:noFill/>
+          <a:ln/>
+        </p:spPr>
+        <p:txBody>
+          <a:bodyPr wrap="square" lIns="0" tIns="0" rIns="0" bIns="0" rtlCol="0" anchor="t"/>
+          <a:lstStyle/>
+          <a:p>
+            <a:pPr algn="l" indent="0" marL="0">
+              <a:lnSpc>
+                <a:spcPts val="1680"/>
+              </a:lnSpc>
+              <a:spcBef>
+                <a:spcPts val="300"/>
+              </a:spcBef>
+              <a:spcAft>
+                <a:spcPts val="300"/>
+              </a:spcAft>
+              <a:buNone/>
+            </a:pPr>
+            <a:r>
+              <a:rPr lang="en-US" sz="1200" i="1" dirty="0">
+                <a:solidFill>
+                  <a:srgbClr val="1C2833"/>
+                </a:solidFill>
+                <a:latin typeface="Arial" pitchFamily="34" charset="0"/>
+                <a:ea typeface="Arial" pitchFamily="34" charset="-122"/>
+                <a:cs typeface="Arial" pitchFamily="34" charset="-120"/>
+              </a:rPr>
+              <a:t>Each row: Time · What you say.</a:t>
+            </a:r>
+            <a:endParaRPr lang="en-US" sz="1200" dirty="0"/>
+          </a:p>
+        </p:txBody>
       </p:sp>
       <p:sp>
         <p:nvSpPr>
           <p:cNvPr id="6" name="Text 4"/>
-          <p:cNvSpPr/>
-          <p:nvPr/>
-        </p:nvSpPr>
-        <p:spPr>
-          <a:xfrm>
-            <a:off x="692051" y="1074093"/>
-            <a:ext cx="7973389" cy="230981"/>
-          </a:xfrm>
-          <a:prstGeom prst="rect">
-            <a:avLst/>
-          </a:prstGeom>
-          <a:noFill/>
-          <a:ln/>
-        </p:spPr>
-        <p:txBody>
-          <a:bodyPr wrap="square" lIns="0" tIns="0" rIns="0" bIns="0" rtlCol="0" anchor="t"/>
-          <a:lstStyle/>
-          <a:p>
-            <a:pPr algn="l" indent="0" marL="0">
-              <a:lnSpc>
-                <a:spcPts val="1820"/>
-              </a:lnSpc>
-              <a:spcBef>
-                <a:spcPts val="300"/>
-              </a:spcBef>
-              <a:spcAft>
-                <a:spcPts val="300"/>
-              </a:spcAft>
-              <a:buNone/>
-            </a:pPr>
-            <a:r>
-              <a:rPr lang="en-US" sz="1300" b="1" i="1" dirty="0">
-                <a:solidFill>
-                  <a:srgbClr val="1C2833"/>
-                </a:solidFill>
-                <a:latin typeface="Georgia" pitchFamily="34" charset="0"/>
-                <a:ea typeface="Georgia" pitchFamily="34" charset="-122"/>
-                <a:cs typeface="Georgia" pitchFamily="34" charset="-120"/>
-              </a:rPr>
-              <a:t>Today you rehearse.</a:t>
-            </a:r>
-            <a:endParaRPr lang="en-US" sz="1300" dirty="0"/>
-          </a:p>
-        </p:txBody>
-      </p:sp>
-      <p:sp>
-        <p:nvSpPr>
-          <p:cNvPr id="7" name="Text 5"/>
-          <p:cNvSpPr/>
-          <p:nvPr/>
-        </p:nvSpPr>
-        <p:spPr>
-          <a:xfrm>
-            <a:off x="692051" y="1343174"/>
-            <a:ext cx="7973389" cy="230981"/>
-          </a:xfrm>
-          <a:prstGeom prst="rect">
-            <a:avLst/>
-          </a:prstGeom>
-          <a:noFill/>
-          <a:ln/>
-        </p:spPr>
-        <p:txBody>
-          <a:bodyPr wrap="square" lIns="0" tIns="0" rIns="0" bIns="0" rtlCol="0" anchor="t"/>
-          <a:lstStyle/>
-          <a:p>
-            <a:pPr algn="l" indent="0" marL="0">
-              <a:lnSpc>
-                <a:spcPts val="1820"/>
-              </a:lnSpc>
-              <a:spcBef>
-                <a:spcPts val="300"/>
-              </a:spcBef>
-              <a:spcAft>
-                <a:spcPts val="300"/>
-              </a:spcAft>
-              <a:buNone/>
-            </a:pPr>
-            <a:r>
-              <a:rPr lang="en-US" sz="1300" dirty="0">
-                <a:solidFill>
-                  <a:srgbClr val="1C2833"/>
-                </a:solidFill>
-                <a:latin typeface="Georgia" pitchFamily="34" charset="0"/>
-                <a:ea typeface="Georgia" pitchFamily="34" charset="-122"/>
-                <a:cs typeface="Georgia" pitchFamily="34" charset="-120"/>
-              </a:rPr>
-              <a:t>Your share is </a:t>
-            </a:r>
-            <a:pPr algn="l" indent="0" marL="0">
-              <a:lnSpc>
-                <a:spcPts val="1820"/>
-              </a:lnSpc>
-              <a:spcBef>
-                <a:spcPts val="300"/>
-              </a:spcBef>
-              <a:spcAft>
-                <a:spcPts val="300"/>
-              </a:spcAft>
-              <a:buNone/>
-            </a:pPr>
-            <a:r>
-              <a:rPr lang="en-US" sz="1300" b="1" i="1" dirty="0">
-                <a:solidFill>
-                  <a:srgbClr val="1C2833"/>
-                </a:solidFill>
-                <a:latin typeface="Georgia" pitchFamily="34" charset="0"/>
-                <a:ea typeface="Georgia" pitchFamily="34" charset="-122"/>
-                <a:cs typeface="Georgia" pitchFamily="34" charset="-120"/>
-              </a:rPr>
-              <a:t>4 minutes + 1 minute Q&amp;A</a:t>
-            </a:r>
-            <a:pPr algn="l" indent="0" marL="0">
-              <a:lnSpc>
-                <a:spcPts val="1820"/>
-              </a:lnSpc>
-              <a:spcBef>
-                <a:spcPts val="300"/>
-              </a:spcBef>
-              <a:spcAft>
-                <a:spcPts val="300"/>
-              </a:spcAft>
-              <a:buNone/>
-            </a:pPr>
-            <a:r>
-              <a:rPr lang="en-US" sz="1300" dirty="0">
-                <a:solidFill>
-                  <a:srgbClr val="1C2833"/>
-                </a:solidFill>
-                <a:latin typeface="Georgia" pitchFamily="34" charset="0"/>
-                <a:ea typeface="Georgia" pitchFamily="34" charset="-122"/>
-                <a:cs typeface="Georgia" pitchFamily="34" charset="-120"/>
-              </a:rPr>
-              <a:t>.</a:t>
-            </a:r>
-            <a:endParaRPr lang="en-US" sz="1300" dirty="0"/>
-          </a:p>
-        </p:txBody>
-      </p:sp>
-      <p:sp>
-        <p:nvSpPr>
-          <p:cNvPr id="8" name="Text 6"/>
-          <p:cNvSpPr/>
-          <p:nvPr/>
-        </p:nvSpPr>
-        <p:spPr>
-          <a:xfrm>
-            <a:off x="692051" y="1612255"/>
-            <a:ext cx="7973389" cy="230981"/>
-          </a:xfrm>
-          <a:prstGeom prst="rect">
-            <a:avLst/>
-          </a:prstGeom>
-          <a:noFill/>
-          <a:ln/>
-        </p:spPr>
-        <p:txBody>
-          <a:bodyPr wrap="square" lIns="0" tIns="0" rIns="0" bIns="0" rtlCol="0" anchor="t"/>
-          <a:lstStyle/>
-          <a:p>
-            <a:pPr algn="l" indent="0" marL="0">
-              <a:lnSpc>
-                <a:spcPts val="1820"/>
-              </a:lnSpc>
-              <a:spcBef>
-                <a:spcPts val="300"/>
-              </a:spcBef>
-              <a:spcAft>
-                <a:spcPts val="300"/>
-              </a:spcAft>
-              <a:buNone/>
-            </a:pPr>
-            <a:r>
-              <a:rPr lang="en-US" sz="1300" i="1" dirty="0">
-                <a:solidFill>
-                  <a:srgbClr val="1C2833"/>
-                </a:solidFill>
-                <a:latin typeface="Georgia" pitchFamily="34" charset="0"/>
-                <a:ea typeface="Georgia" pitchFamily="34" charset="-122"/>
-                <a:cs typeface="Georgia" pitchFamily="34" charset="-120"/>
-              </a:rPr>
-              <a:t>The structure:</a:t>
-            </a:r>
-            <a:endParaRPr lang="en-US" sz="1300" dirty="0"/>
-          </a:p>
-        </p:txBody>
-      </p:sp>
-      <p:sp>
-        <p:nvSpPr>
-          <p:cNvPr id="9" name="Text 7"/>
-          <p:cNvSpPr/>
-          <p:nvPr/>
-        </p:nvSpPr>
-        <p:spPr>
-          <a:xfrm>
-            <a:off x="692051" y="1881336"/>
-            <a:ext cx="7973389" cy="692944"/>
-          </a:xfrm>
-          <a:prstGeom prst="rect">
-            <a:avLst/>
-          </a:prstGeom>
-          <a:noFill/>
-          <a:ln/>
-        </p:spPr>
-        <p:txBody>
-          <a:bodyPr wrap="square" lIns="0" tIns="0" rIns="0" bIns="0" rtlCol="0" anchor="t"/>
-          <a:lstStyle/>
-          <a:p>
-            <a:pPr algn="l" indent="0" marL="0">
-              <a:lnSpc>
-                <a:spcPts val="1820"/>
-              </a:lnSpc>
-              <a:spcBef>
-                <a:spcPts val="300"/>
-              </a:spcBef>
-              <a:spcAft>
-                <a:spcPts val="300"/>
-              </a:spcAft>
-              <a:buNone/>
-            </a:pPr>
-            <a:r>
-              <a:rPr lang="en-US" sz="1300" i="1" dirty="0">
-                <a:solidFill>
-                  <a:srgbClr val="1C2833"/>
-                </a:solidFill>
-                <a:latin typeface="Georgia" pitchFamily="34" charset="0"/>
-                <a:ea typeface="Georgia" pitchFamily="34" charset="-122"/>
-                <a:cs typeface="Georgia" pitchFamily="34" charset="-120"/>
-              </a:rPr>
-              <a:t>| Time | What you say | |------|---------------| | 0:00–0:30 | The question + the project | | 0:30–1:30 | The process | | 1:30–2:30 | The sources | | 2:30–3:30 | The artefact (show it, walk through one feature) | | 3:30–4:00 | The reflection (one win, one miss) |</a:t>
-            </a:r>
-            <a:endParaRPr lang="en-US" sz="1300" dirty="0"/>
-          </a:p>
-        </p:txBody>
-      </p:sp>
-      <p:sp>
-        <p:nvSpPr>
-          <p:cNvPr id="10" name="Text 8"/>
-          <p:cNvSpPr/>
-          <p:nvPr/>
-        </p:nvSpPr>
-        <p:spPr>
-          <a:xfrm>
-            <a:off x="692051" y="2612380"/>
-            <a:ext cx="7973389" cy="461963"/>
-          </a:xfrm>
-          <a:prstGeom prst="rect">
-            <a:avLst/>
-          </a:prstGeom>
-          <a:noFill/>
-          <a:ln/>
-        </p:spPr>
-        <p:txBody>
-          <a:bodyPr wrap="square" lIns="0" tIns="0" rIns="0" bIns="0" rtlCol="0" anchor="t"/>
-          <a:lstStyle/>
-          <a:p>
-            <a:pPr algn="l" indent="0" marL="0">
-              <a:lnSpc>
-                <a:spcPts val="1820"/>
-              </a:lnSpc>
-              <a:spcBef>
-                <a:spcPts val="300"/>
-              </a:spcBef>
-              <a:spcAft>
-                <a:spcPts val="300"/>
-              </a:spcAft>
-              <a:buNone/>
-            </a:pPr>
-            <a:r>
-              <a:rPr lang="en-US" sz="1300" dirty="0">
-                <a:solidFill>
-                  <a:srgbClr val="1C2833"/>
-                </a:solidFill>
-                <a:latin typeface="Georgia" pitchFamily="34" charset="0"/>
-                <a:ea typeface="Georgia" pitchFamily="34" charset="-122"/>
-                <a:cs typeface="Georgia" pitchFamily="34" charset="-120"/>
-              </a:rPr>
-              <a:t>Three rules: 1. </a:t>
-            </a:r>
-            <a:pPr algn="l" indent="0" marL="0">
-              <a:lnSpc>
-                <a:spcPts val="1820"/>
-              </a:lnSpc>
-              <a:spcBef>
-                <a:spcPts val="300"/>
-              </a:spcBef>
-              <a:spcAft>
-                <a:spcPts val="300"/>
-              </a:spcAft>
-              <a:buNone/>
-            </a:pPr>
-            <a:r>
-              <a:rPr lang="en-US" sz="1300" b="1" i="1" dirty="0">
-                <a:solidFill>
-                  <a:srgbClr val="1C2833"/>
-                </a:solidFill>
-                <a:latin typeface="Georgia" pitchFamily="34" charset="0"/>
-                <a:ea typeface="Georgia" pitchFamily="34" charset="-122"/>
-                <a:cs typeface="Georgia" pitchFamily="34" charset="-120"/>
-              </a:rPr>
-              <a:t>Time it.</a:t>
-            </a:r>
-            <a:pPr algn="l" indent="0" marL="0">
-              <a:lnSpc>
-                <a:spcPts val="1820"/>
-              </a:lnSpc>
-              <a:spcBef>
-                <a:spcPts val="300"/>
-              </a:spcBef>
-              <a:spcAft>
-                <a:spcPts val="300"/>
-              </a:spcAft>
-              <a:buNone/>
-            </a:pPr>
-            <a:r>
-              <a:rPr lang="en-US" sz="1300" dirty="0">
-                <a:solidFill>
-                  <a:srgbClr val="1C2833"/>
-                </a:solidFill>
-                <a:latin typeface="Georgia" pitchFamily="34" charset="0"/>
-                <a:ea typeface="Georgia" pitchFamily="34" charset="-122"/>
-                <a:cs typeface="Georgia" pitchFamily="34" charset="-120"/>
-              </a:rPr>
-              <a:t> Cut now, not on stage. 2. </a:t>
-            </a:r>
-            <a:pPr algn="l" indent="0" marL="0">
-              <a:lnSpc>
-                <a:spcPts val="1820"/>
-              </a:lnSpc>
-              <a:spcBef>
-                <a:spcPts val="300"/>
-              </a:spcBef>
-              <a:spcAft>
-                <a:spcPts val="300"/>
-              </a:spcAft>
-              <a:buNone/>
-            </a:pPr>
-            <a:r>
-              <a:rPr lang="en-US" sz="1300" b="1" i="1" dirty="0">
-                <a:solidFill>
-                  <a:srgbClr val="1C2833"/>
-                </a:solidFill>
-                <a:latin typeface="Georgia" pitchFamily="34" charset="0"/>
-                <a:ea typeface="Georgia" pitchFamily="34" charset="-122"/>
-                <a:cs typeface="Georgia" pitchFamily="34" charset="-120"/>
-              </a:rPr>
-              <a:t>Show the artefact early</a:t>
-            </a:r>
-            <a:pPr algn="l" indent="0" marL="0">
-              <a:lnSpc>
-                <a:spcPts val="1820"/>
-              </a:lnSpc>
-              <a:spcBef>
-                <a:spcPts val="300"/>
-              </a:spcBef>
-              <a:spcAft>
-                <a:spcPts val="300"/>
-              </a:spcAft>
-              <a:buNone/>
-            </a:pPr>
-            <a:r>
-              <a:rPr lang="en-US" sz="1300" dirty="0">
-                <a:solidFill>
-                  <a:srgbClr val="1C2833"/>
-                </a:solidFill>
-                <a:latin typeface="Georgia" pitchFamily="34" charset="0"/>
-                <a:ea typeface="Georgia" pitchFamily="34" charset="-122"/>
-                <a:cs typeface="Georgia" pitchFamily="34" charset="-120"/>
-              </a:rPr>
-              <a:t> — don't leave it as a reveal. 3. </a:t>
-            </a:r>
-            <a:pPr algn="l" indent="0" marL="0">
-              <a:lnSpc>
-                <a:spcPts val="1820"/>
-              </a:lnSpc>
-              <a:spcBef>
-                <a:spcPts val="300"/>
-              </a:spcBef>
-              <a:spcAft>
-                <a:spcPts val="300"/>
-              </a:spcAft>
-              <a:buNone/>
-            </a:pPr>
-            <a:r>
-              <a:rPr lang="en-US" sz="1300" b="1" i="1" dirty="0">
-                <a:solidFill>
-                  <a:srgbClr val="1C2833"/>
-                </a:solidFill>
-                <a:latin typeface="Georgia" pitchFamily="34" charset="0"/>
-                <a:ea typeface="Georgia" pitchFamily="34" charset="-122"/>
-                <a:cs typeface="Georgia" pitchFamily="34" charset="-120"/>
-              </a:rPr>
-              <a:t>End on the reflection.</a:t>
-            </a:r>
-            <a:pPr algn="l" indent="0" marL="0">
-              <a:lnSpc>
-                <a:spcPts val="1820"/>
-              </a:lnSpc>
-              <a:spcBef>
-                <a:spcPts val="300"/>
-              </a:spcBef>
-              <a:spcAft>
-                <a:spcPts val="300"/>
-              </a:spcAft>
-              <a:buNone/>
-            </a:pPr>
-            <a:r>
-              <a:rPr lang="en-US" sz="1300" dirty="0">
-                <a:solidFill>
-                  <a:srgbClr val="1C2833"/>
-                </a:solidFill>
-                <a:latin typeface="Georgia" pitchFamily="34" charset="0"/>
-                <a:ea typeface="Georgia" pitchFamily="34" charset="-122"/>
-                <a:cs typeface="Georgia" pitchFamily="34" charset="-120"/>
-              </a:rPr>
-              <a:t> Honesty is the last thing they hear.</a:t>
-            </a:r>
-            <a:endParaRPr lang="en-US" sz="1300" dirty="0"/>
-          </a:p>
-        </p:txBody>
-      </p:sp>
-      <p:sp>
-        <p:nvSpPr>
-          <p:cNvPr id="11" name="Text 9"/>
-          <p:cNvSpPr/>
-          <p:nvPr/>
-        </p:nvSpPr>
-        <p:spPr>
-          <a:xfrm>
-            <a:off x="692051" y="3112443"/>
-            <a:ext cx="7973389" cy="230981"/>
-          </a:xfrm>
-          <a:prstGeom prst="rect">
-            <a:avLst/>
-          </a:prstGeom>
-          <a:noFill/>
-          <a:ln/>
-        </p:spPr>
-        <p:txBody>
-          <a:bodyPr wrap="square" lIns="0" tIns="0" rIns="0" bIns="0" rtlCol="0" anchor="t"/>
-          <a:lstStyle/>
-          <a:p>
-            <a:pPr algn="l" indent="0" marL="0">
-              <a:lnSpc>
-                <a:spcPts val="1820"/>
-              </a:lnSpc>
-              <a:spcBef>
-                <a:spcPts val="300"/>
-              </a:spcBef>
-              <a:spcAft>
-                <a:spcPts val="300"/>
-              </a:spcAft>
-              <a:buNone/>
-            </a:pPr>
-            <a:r>
-              <a:rPr lang="en-US" sz="1300" dirty="0">
-                <a:solidFill>
-                  <a:srgbClr val="1C2833"/>
-                </a:solidFill>
-                <a:latin typeface="Georgia" pitchFamily="34" charset="0"/>
-                <a:ea typeface="Georgia" pitchFamily="34" charset="-122"/>
-                <a:cs typeface="Georgia" pitchFamily="34" charset="-120"/>
-              </a:rPr>
-              <a:t>If a question stumps you in Q&amp;A: </a:t>
-            </a:r>
-            <a:pPr algn="l" indent="0" marL="0">
-              <a:lnSpc>
-                <a:spcPts val="1820"/>
-              </a:lnSpc>
-              <a:spcBef>
-                <a:spcPts val="300"/>
-              </a:spcBef>
-              <a:spcAft>
-                <a:spcPts val="300"/>
-              </a:spcAft>
-              <a:buNone/>
-            </a:pPr>
-            <a:r>
-              <a:rPr lang="en-US" sz="1300" i="1" dirty="0">
-                <a:solidFill>
-                  <a:srgbClr val="1C2833"/>
-                </a:solidFill>
-                <a:latin typeface="Georgia" pitchFamily="34" charset="0"/>
-                <a:ea typeface="Georgia" pitchFamily="34" charset="-122"/>
-                <a:cs typeface="Georgia" pitchFamily="34" charset="-120"/>
-              </a:rPr>
-              <a:t>"I don't know, but here's what I'd check…"</a:t>
-            </a:r>
-            <a:endParaRPr lang="en-US" sz="1300" dirty="0"/>
-          </a:p>
-        </p:txBody>
-      </p:sp>
-      <p:sp>
-        <p:nvSpPr>
-          <p:cNvPr id="12" name="Text 10"/>
           <p:cNvSpPr/>
           <p:nvPr/>
         </p:nvSpPr>
@@ -4584,7 +8366,7 @@
                 <a:ea typeface="Georgia" pitchFamily="34" charset="-122"/>
                 <a:cs typeface="Georgia" pitchFamily="34" charset="-120"/>
               </a:rPr>
-              <a:t>Rehearsal Feedback Sheet (template)</a:t>
+              <a:t>Core (8 min) (cont.)</a:t>
             </a:r>
             <a:endParaRPr lang="en-US" sz="1800" dirty="0"/>
           </a:p>
@@ -4598,50 +8380,287 @@
         </p:nvSpPr>
         <p:spPr>
           <a:xfrm>
-            <a:off x="406301" y="883593"/>
-            <a:ext cx="8331398" cy="4269135"/>
-          </a:xfrm>
-          <a:prstGeom prst="rect">
-            <a:avLst/>
-          </a:prstGeom>
-          <a:solidFill>
-            <a:srgbClr val="F4F8F9"/>
-          </a:solidFill>
-          <a:ln/>
-        </p:spPr>
-        <p:txBody>
-          <a:bodyPr wrap="square" rtlCol="0" anchor="ctr"/>
-          <a:lstStyle/>
-          <a:p>
-            <a:pPr indent="0" marL="0">
-              <a:buNone/>
-            </a:pPr>
-            <a:endParaRPr lang="en-US" dirty="0"/>
-          </a:p>
-        </p:txBody>
-      </p:sp>
-      <p:sp>
-        <p:nvSpPr>
-          <p:cNvPr id="5" name="Shape 3"/>
-          <p:cNvSpPr/>
-          <p:nvPr/>
-        </p:nvSpPr>
-        <p:spPr>
-          <a:xfrm>
-            <a:off x="430113" y="883593"/>
-            <a:ext cx="0" cy="4269135"/>
-          </a:xfrm>
-          <a:prstGeom prst="line">
+            <a:off x="634901" y="883593"/>
+            <a:ext cx="8102798" cy="1257002"/>
+          </a:xfrm>
+          <a:prstGeom prst="rect">
             <a:avLst/>
           </a:prstGeom>
           <a:noFill/>
-          <a:ln w="47625">
-            <a:solidFill>
-              <a:srgbClr val="277884"/>
-            </a:solidFill>
-            <a:prstDash val="solid"/>
-          </a:ln>
-        </p:spPr>
+          <a:ln/>
+        </p:spPr>
+        <p:txBody>
+          <a:bodyPr wrap="square" lIns="0" tIns="0" rIns="0" bIns="0" rtlCol="0" anchor="t"/>
+          <a:lstStyle/>
+          <a:p>
+            <a:pPr algn="l" marL="342900" indent="-342900">
+              <a:lnSpc>
+                <a:spcPts val="1620"/>
+              </a:lnSpc>
+              <a:spcAft>
+                <a:spcPts val="300"/>
+              </a:spcAft>
+              <a:buSzPct val="100000"/>
+              <a:buChar char="•"/>
+            </a:pPr>
+            <a:r>
+              <a:rPr lang="en-US" sz="1200" b="1" dirty="0">
+                <a:solidFill>
+                  <a:srgbClr val="1C2833"/>
+                </a:solidFill>
+                <a:latin typeface="Arial" pitchFamily="34" charset="0"/>
+                <a:ea typeface="Arial" pitchFamily="34" charset="-122"/>
+                <a:cs typeface="Arial" pitchFamily="34" charset="-120"/>
+              </a:rPr>
+              <a:t>0:00–0:30</a:t>
+            </a:r>
+            <a:pPr algn="l" indent="0" marL="0">
+              <a:lnSpc>
+                <a:spcPts val="1620"/>
+              </a:lnSpc>
+              <a:spcAft>
+                <a:spcPts val="300"/>
+              </a:spcAft>
+              <a:buNone/>
+            </a:pPr>
+            <a:r>
+              <a:rPr lang="en-US" sz="1200" dirty="0">
+                <a:solidFill>
+                  <a:srgbClr val="1C2833"/>
+                </a:solidFill>
+                <a:latin typeface="Arial" pitchFamily="34" charset="0"/>
+                <a:ea typeface="Arial" pitchFamily="34" charset="-122"/>
+                <a:cs typeface="Arial" pitchFamily="34" charset="-120"/>
+              </a:rPr>
+              <a:t> — The question + the project (your driving sentence)</a:t>
+            </a:r>
+            <a:endParaRPr lang="en-US" sz="1200" dirty="0"/>
+          </a:p>
+          <a:p>
+            <a:pPr algn="l" marL="342900" indent="-342900">
+              <a:lnSpc>
+                <a:spcPts val="1620"/>
+              </a:lnSpc>
+              <a:spcAft>
+                <a:spcPts val="300"/>
+              </a:spcAft>
+              <a:buSzPct val="100000"/>
+              <a:buChar char="•"/>
+            </a:pPr>
+            <a:r>
+              <a:rPr lang="en-US" sz="1200" b="1" dirty="0">
+                <a:solidFill>
+                  <a:srgbClr val="1C2833"/>
+                </a:solidFill>
+                <a:latin typeface="Arial" pitchFamily="34" charset="0"/>
+                <a:ea typeface="Arial" pitchFamily="34" charset="-122"/>
+                <a:cs typeface="Arial" pitchFamily="34" charset="-120"/>
+              </a:rPr>
+              <a:t>0:30–1:30</a:t>
+            </a:r>
+            <a:pPr algn="l" indent="0" marL="0">
+              <a:lnSpc>
+                <a:spcPts val="1620"/>
+              </a:lnSpc>
+              <a:spcAft>
+                <a:spcPts val="300"/>
+              </a:spcAft>
+              <a:buNone/>
+            </a:pPr>
+            <a:r>
+              <a:rPr lang="en-US" sz="1200" dirty="0">
+                <a:solidFill>
+                  <a:srgbClr val="1C2833"/>
+                </a:solidFill>
+                <a:latin typeface="Arial" pitchFamily="34" charset="0"/>
+                <a:ea typeface="Arial" pitchFamily="34" charset="-122"/>
+                <a:cs typeface="Arial" pitchFamily="34" charset="-120"/>
+              </a:rPr>
+              <a:t> — The process — quick narrative of what you did</a:t>
+            </a:r>
+            <a:endParaRPr lang="en-US" sz="1200" dirty="0"/>
+          </a:p>
+          <a:p>
+            <a:pPr algn="l" marL="342900" indent="-342900">
+              <a:lnSpc>
+                <a:spcPts val="1620"/>
+              </a:lnSpc>
+              <a:spcAft>
+                <a:spcPts val="300"/>
+              </a:spcAft>
+              <a:buSzPct val="100000"/>
+              <a:buChar char="•"/>
+            </a:pPr>
+            <a:r>
+              <a:rPr lang="en-US" sz="1200" b="1" dirty="0">
+                <a:solidFill>
+                  <a:srgbClr val="1C2833"/>
+                </a:solidFill>
+                <a:latin typeface="Arial" pitchFamily="34" charset="0"/>
+                <a:ea typeface="Arial" pitchFamily="34" charset="-122"/>
+                <a:cs typeface="Arial" pitchFamily="34" charset="-120"/>
+              </a:rPr>
+              <a:t>1:30–2:30</a:t>
+            </a:r>
+            <a:pPr algn="l" indent="0" marL="0">
+              <a:lnSpc>
+                <a:spcPts val="1620"/>
+              </a:lnSpc>
+              <a:spcAft>
+                <a:spcPts val="300"/>
+              </a:spcAft>
+              <a:buNone/>
+            </a:pPr>
+            <a:r>
+              <a:rPr lang="en-US" sz="1200" dirty="0">
+                <a:solidFill>
+                  <a:srgbClr val="1C2833"/>
+                </a:solidFill>
+                <a:latin typeface="Arial" pitchFamily="34" charset="0"/>
+                <a:ea typeface="Arial" pitchFamily="34" charset="-122"/>
+                <a:cs typeface="Arial" pitchFamily="34" charset="-120"/>
+              </a:rPr>
+              <a:t> — The sources — name them, show one</a:t>
+            </a:r>
+            <a:endParaRPr lang="en-US" sz="1200" dirty="0"/>
+          </a:p>
+          <a:p>
+            <a:pPr algn="l" marL="342900" indent="-342900">
+              <a:lnSpc>
+                <a:spcPts val="1620"/>
+              </a:lnSpc>
+              <a:spcAft>
+                <a:spcPts val="300"/>
+              </a:spcAft>
+              <a:buSzPct val="100000"/>
+              <a:buChar char="•"/>
+            </a:pPr>
+            <a:r>
+              <a:rPr lang="en-US" sz="1200" b="1" dirty="0">
+                <a:solidFill>
+                  <a:srgbClr val="1C2833"/>
+                </a:solidFill>
+                <a:latin typeface="Arial" pitchFamily="34" charset="0"/>
+                <a:ea typeface="Arial" pitchFamily="34" charset="-122"/>
+                <a:cs typeface="Arial" pitchFamily="34" charset="-120"/>
+              </a:rPr>
+              <a:t>2:30–3:30</a:t>
+            </a:r>
+            <a:pPr algn="l" indent="0" marL="0">
+              <a:lnSpc>
+                <a:spcPts val="1620"/>
+              </a:lnSpc>
+              <a:spcAft>
+                <a:spcPts val="300"/>
+              </a:spcAft>
+              <a:buNone/>
+            </a:pPr>
+            <a:r>
+              <a:rPr lang="en-US" sz="1200" dirty="0">
+                <a:solidFill>
+                  <a:srgbClr val="1C2833"/>
+                </a:solidFill>
+                <a:latin typeface="Arial" pitchFamily="34" charset="0"/>
+                <a:ea typeface="Arial" pitchFamily="34" charset="-122"/>
+                <a:cs typeface="Arial" pitchFamily="34" charset="-120"/>
+              </a:rPr>
+              <a:t> — The artefact — show it, walk through one key feature</a:t>
+            </a:r>
+            <a:endParaRPr lang="en-US" sz="1200" dirty="0"/>
+          </a:p>
+          <a:p>
+            <a:pPr algn="l" marL="342900" indent="-342900">
+              <a:lnSpc>
+                <a:spcPts val="1620"/>
+              </a:lnSpc>
+              <a:spcAft>
+                <a:spcPts val="300"/>
+              </a:spcAft>
+              <a:buSzPct val="100000"/>
+              <a:buChar char="•"/>
+            </a:pPr>
+            <a:r>
+              <a:rPr lang="en-US" sz="1200" b="1" dirty="0">
+                <a:solidFill>
+                  <a:srgbClr val="1C2833"/>
+                </a:solidFill>
+                <a:latin typeface="Arial" pitchFamily="34" charset="0"/>
+                <a:ea typeface="Arial" pitchFamily="34" charset="-122"/>
+                <a:cs typeface="Arial" pitchFamily="34" charset="-120"/>
+              </a:rPr>
+              <a:t>3:30–4:00</a:t>
+            </a:r>
+            <a:pPr algn="l" indent="0" marL="0">
+              <a:lnSpc>
+                <a:spcPts val="1620"/>
+              </a:lnSpc>
+              <a:spcAft>
+                <a:spcPts val="300"/>
+              </a:spcAft>
+              <a:buNone/>
+            </a:pPr>
+            <a:r>
+              <a:rPr lang="en-US" sz="1200" dirty="0">
+                <a:solidFill>
+                  <a:srgbClr val="1C2833"/>
+                </a:solidFill>
+                <a:latin typeface="Arial" pitchFamily="34" charset="0"/>
+                <a:ea typeface="Arial" pitchFamily="34" charset="-122"/>
+                <a:cs typeface="Arial" pitchFamily="34" charset="-120"/>
+              </a:rPr>
+              <a:t> — The reflection — one thing that worked, one that didn't</a:t>
+            </a:r>
+            <a:endParaRPr lang="en-US" sz="1200" dirty="0"/>
+          </a:p>
+        </p:txBody>
+      </p:sp>
+      <p:sp>
+        <p:nvSpPr>
+          <p:cNvPr id="5" name="Text 3"/>
+          <p:cNvSpPr/>
+          <p:nvPr/>
+        </p:nvSpPr>
+        <p:spPr>
+          <a:xfrm>
+            <a:off x="406301" y="2229445"/>
+            <a:ext cx="8498026" cy="213271"/>
+          </a:xfrm>
+          <a:prstGeom prst="rect">
+            <a:avLst/>
+          </a:prstGeom>
+          <a:noFill/>
+          <a:ln/>
+        </p:spPr>
+        <p:txBody>
+          <a:bodyPr wrap="square" lIns="0" tIns="0" rIns="0" bIns="0" rtlCol="0" anchor="t"/>
+          <a:lstStyle/>
+          <a:p>
+            <a:pPr algn="l" indent="0" marL="0">
+              <a:lnSpc>
+                <a:spcPts val="1680"/>
+              </a:lnSpc>
+              <a:spcBef>
+                <a:spcPts val="300"/>
+              </a:spcBef>
+              <a:spcAft>
+                <a:spcPts val="300"/>
+              </a:spcAft>
+              <a:buNone/>
+            </a:pPr>
+            <a:r>
+              <a:rPr lang="en-US" sz="1200" dirty="0">
+                <a:solidFill>
+                  <a:srgbClr val="1C2833"/>
+                </a:solidFill>
+                <a:latin typeface="Arial" pitchFamily="34" charset="0"/>
+                <a:ea typeface="Arial" pitchFamily="34" charset="-122"/>
+                <a:cs typeface="Arial" pitchFamily="34" charset="-120"/>
+              </a:rPr>
+              <a:t>Plus 1 minute of Q&amp;A after the 4 minutes.</a:t>
+            </a:r>
+            <a:endParaRPr lang="en-US" sz="1200" dirty="0"/>
+          </a:p>
+        </p:txBody>
       </p:sp>
       <p:sp>
         <p:nvSpPr>
@@ -4651,721 +8670,7 @@
         </p:nvSpPr>
         <p:spPr>
           <a:xfrm>
-            <a:off x="631627" y="1010543"/>
-            <a:ext cx="8086939" cy="174575"/>
-          </a:xfrm>
-          <a:prstGeom prst="rect">
-            <a:avLst/>
-          </a:prstGeom>
-          <a:noFill/>
-          <a:ln/>
-        </p:spPr>
-        <p:txBody>
-          <a:bodyPr wrap="square" lIns="0" tIns="0" rIns="0" bIns="0" rtlCol="0" anchor="t"/>
-          <a:lstStyle/>
-          <a:p>
-            <a:pPr algn="l" indent="0" marL="0">
-              <a:lnSpc>
-                <a:spcPts val="1375"/>
-              </a:lnSpc>
-              <a:buNone/>
-            </a:pPr>
-            <a:r>
-              <a:rPr lang="en-US" sz="1100" dirty="0">
-                <a:solidFill>
-                  <a:srgbClr val="1C2833"/>
-                </a:solidFill>
-                <a:latin typeface="Courier New" pitchFamily="34" charset="0"/>
-                <a:ea typeface="Courier New" pitchFamily="34" charset="-122"/>
-                <a:cs typeface="Courier New" pitchFamily="34" charset="-120"/>
-              </a:rPr>
-              <a:t>REHEARSAL FEEDBACK</a:t>
-            </a:r>
-            <a:endParaRPr lang="en-US" sz="1100" dirty="0"/>
-          </a:p>
-        </p:txBody>
-      </p:sp>
-      <p:sp>
-        <p:nvSpPr>
-          <p:cNvPr id="7" name="Text 5"/>
-          <p:cNvSpPr/>
-          <p:nvPr/>
-        </p:nvSpPr>
-        <p:spPr>
-          <a:xfrm>
-            <a:off x="631627" y="1359694"/>
-            <a:ext cx="8086939" cy="174575"/>
-          </a:xfrm>
-          <a:prstGeom prst="rect">
-            <a:avLst/>
-          </a:prstGeom>
-          <a:noFill/>
-          <a:ln/>
-        </p:spPr>
-        <p:txBody>
-          <a:bodyPr wrap="square" lIns="0" tIns="0" rIns="0" bIns="0" rtlCol="0" anchor="t"/>
-          <a:lstStyle/>
-          <a:p>
-            <a:pPr algn="l" indent="0" marL="0">
-              <a:lnSpc>
-                <a:spcPts val="1375"/>
-              </a:lnSpc>
-              <a:buNone/>
-            </a:pPr>
-            <a:r>
-              <a:rPr lang="en-US" sz="1100" dirty="0">
-                <a:solidFill>
-                  <a:srgbClr val="1C2833"/>
-                </a:solidFill>
-                <a:latin typeface="Courier New" pitchFamily="34" charset="0"/>
-                <a:ea typeface="Courier New" pitchFamily="34" charset="-122"/>
-                <a:cs typeface="Courier New" pitchFamily="34" charset="-120"/>
-              </a:rPr>
-              <a:t>Presenter: _________________  Listener: _________________</a:t>
-            </a:r>
-            <a:endParaRPr lang="en-US" sz="1100" dirty="0"/>
-          </a:p>
-        </p:txBody>
-      </p:sp>
-      <p:sp>
-        <p:nvSpPr>
-          <p:cNvPr id="8" name="Text 6"/>
-          <p:cNvSpPr/>
-          <p:nvPr/>
-        </p:nvSpPr>
-        <p:spPr>
-          <a:xfrm>
-            <a:off x="631627" y="1708845"/>
-            <a:ext cx="8086939" cy="174575"/>
-          </a:xfrm>
-          <a:prstGeom prst="rect">
-            <a:avLst/>
-          </a:prstGeom>
-          <a:noFill/>
-          <a:ln/>
-        </p:spPr>
-        <p:txBody>
-          <a:bodyPr wrap="square" lIns="0" tIns="0" rIns="0" bIns="0" rtlCol="0" anchor="t"/>
-          <a:lstStyle/>
-          <a:p>
-            <a:pPr algn="l" indent="0" marL="0">
-              <a:lnSpc>
-                <a:spcPts val="1375"/>
-              </a:lnSpc>
-              <a:buNone/>
-            </a:pPr>
-            <a:r>
-              <a:rPr lang="en-US" sz="1100" dirty="0">
-                <a:solidFill>
-                  <a:srgbClr val="1C2833"/>
-                </a:solidFill>
-                <a:latin typeface="Courier New" pitchFamily="34" charset="0"/>
-                <a:ea typeface="Courier New" pitchFamily="34" charset="-122"/>
-                <a:cs typeface="Courier New" pitchFamily="34" charset="-120"/>
-              </a:rPr>
-              <a:t>Time: _____ : _____ (target 4 minutes, range 3:45 – 4:15)</a:t>
-            </a:r>
-            <a:endParaRPr lang="en-US" sz="1100" dirty="0"/>
-          </a:p>
-        </p:txBody>
-      </p:sp>
-      <p:sp>
-        <p:nvSpPr>
-          <p:cNvPr id="9" name="Text 7"/>
-          <p:cNvSpPr/>
-          <p:nvPr/>
-        </p:nvSpPr>
-        <p:spPr>
-          <a:xfrm>
-            <a:off x="631627" y="2057995"/>
-            <a:ext cx="8086939" cy="174575"/>
-          </a:xfrm>
-          <a:prstGeom prst="rect">
-            <a:avLst/>
-          </a:prstGeom>
-          <a:noFill/>
-          <a:ln/>
-        </p:spPr>
-        <p:txBody>
-          <a:bodyPr wrap="square" lIns="0" tIns="0" rIns="0" bIns="0" rtlCol="0" anchor="t"/>
-          <a:lstStyle/>
-          <a:p>
-            <a:pPr algn="l" indent="0" marL="0">
-              <a:lnSpc>
-                <a:spcPts val="1375"/>
-              </a:lnSpc>
-              <a:buNone/>
-            </a:pPr>
-            <a:r>
-              <a:rPr lang="en-US" sz="1100" dirty="0">
-                <a:solidFill>
-                  <a:srgbClr val="1C2833"/>
-                </a:solidFill>
-                <a:latin typeface="Courier New" pitchFamily="34" charset="0"/>
-                <a:ea typeface="Courier New" pitchFamily="34" charset="-122"/>
-                <a:cs typeface="Courier New" pitchFamily="34" charset="-120"/>
-              </a:rPr>
-              <a:t>WHAT LANDED (be specific):</a:t>
-            </a:r>
-            <a:endParaRPr lang="en-US" sz="1100" dirty="0"/>
-          </a:p>
-        </p:txBody>
-      </p:sp>
-      <p:sp>
-        <p:nvSpPr>
-          <p:cNvPr id="10" name="Text 8"/>
-          <p:cNvSpPr/>
-          <p:nvPr/>
-        </p:nvSpPr>
-        <p:spPr>
-          <a:xfrm>
-            <a:off x="631627" y="2232571"/>
-            <a:ext cx="8086939" cy="174575"/>
-          </a:xfrm>
-          <a:prstGeom prst="rect">
-            <a:avLst/>
-          </a:prstGeom>
-          <a:noFill/>
-          <a:ln/>
-        </p:spPr>
-        <p:txBody>
-          <a:bodyPr wrap="square" lIns="0" tIns="0" rIns="0" bIns="0" rtlCol="0" anchor="t"/>
-          <a:lstStyle/>
-          <a:p>
-            <a:pPr algn="l" indent="0" marL="0">
-              <a:lnSpc>
-                <a:spcPts val="1375"/>
-              </a:lnSpc>
-              <a:buNone/>
-            </a:pPr>
-            <a:r>
-              <a:rPr lang="en-US" sz="1100" dirty="0">
-                <a:solidFill>
-                  <a:srgbClr val="1C2833"/>
-                </a:solidFill>
-                <a:latin typeface="Courier New" pitchFamily="34" charset="0"/>
-                <a:ea typeface="Courier New" pitchFamily="34" charset="-122"/>
-                <a:cs typeface="Courier New" pitchFamily="34" charset="-120"/>
-              </a:rPr>
-              <a:t>1. ____________________________________________</a:t>
-            </a:r>
-            <a:endParaRPr lang="en-US" sz="1100" dirty="0"/>
-          </a:p>
-        </p:txBody>
-      </p:sp>
-      <p:sp>
-        <p:nvSpPr>
-          <p:cNvPr id="11" name="Text 9"/>
-          <p:cNvSpPr/>
-          <p:nvPr/>
-        </p:nvSpPr>
-        <p:spPr>
-          <a:xfrm>
-            <a:off x="631627" y="2407146"/>
-            <a:ext cx="8086939" cy="174575"/>
-          </a:xfrm>
-          <a:prstGeom prst="rect">
-            <a:avLst/>
-          </a:prstGeom>
-          <a:noFill/>
-          <a:ln/>
-        </p:spPr>
-        <p:txBody>
-          <a:bodyPr wrap="square" lIns="0" tIns="0" rIns="0" bIns="0" rtlCol="0" anchor="t"/>
-          <a:lstStyle/>
-          <a:p>
-            <a:pPr algn="l" indent="0" marL="0">
-              <a:lnSpc>
-                <a:spcPts val="1375"/>
-              </a:lnSpc>
-              <a:buNone/>
-            </a:pPr>
-            <a:r>
-              <a:rPr lang="en-US" sz="1100" dirty="0">
-                <a:solidFill>
-                  <a:srgbClr val="1C2833"/>
-                </a:solidFill>
-                <a:latin typeface="Courier New" pitchFamily="34" charset="0"/>
-                <a:ea typeface="Courier New" pitchFamily="34" charset="-122"/>
-                <a:cs typeface="Courier New" pitchFamily="34" charset="-120"/>
-              </a:rPr>
-              <a:t>2. ____________________________________________</a:t>
-            </a:r>
-            <a:endParaRPr lang="en-US" sz="1100" dirty="0"/>
-          </a:p>
-        </p:txBody>
-      </p:sp>
-      <p:sp>
-        <p:nvSpPr>
-          <p:cNvPr id="12" name="Text 10"/>
-          <p:cNvSpPr/>
-          <p:nvPr/>
-        </p:nvSpPr>
-        <p:spPr>
-          <a:xfrm>
-            <a:off x="631627" y="2756297"/>
-            <a:ext cx="8086939" cy="174575"/>
-          </a:xfrm>
-          <a:prstGeom prst="rect">
-            <a:avLst/>
-          </a:prstGeom>
-          <a:noFill/>
-          <a:ln/>
-        </p:spPr>
-        <p:txBody>
-          <a:bodyPr wrap="square" lIns="0" tIns="0" rIns="0" bIns="0" rtlCol="0" anchor="t"/>
-          <a:lstStyle/>
-          <a:p>
-            <a:pPr algn="l" indent="0" marL="0">
-              <a:lnSpc>
-                <a:spcPts val="1375"/>
-              </a:lnSpc>
-              <a:buNone/>
-            </a:pPr>
-            <a:r>
-              <a:rPr lang="en-US" sz="1100" dirty="0">
-                <a:solidFill>
-                  <a:srgbClr val="1C2833"/>
-                </a:solidFill>
-                <a:latin typeface="Courier New" pitchFamily="34" charset="0"/>
-                <a:ea typeface="Courier New" pitchFamily="34" charset="-122"/>
-                <a:cs typeface="Courier New" pitchFamily="34" charset="-120"/>
-              </a:rPr>
-              <a:t>WHAT WAS UNCLEAR:</a:t>
-            </a:r>
-            <a:endParaRPr lang="en-US" sz="1100" dirty="0"/>
-          </a:p>
-        </p:txBody>
-      </p:sp>
-      <p:sp>
-        <p:nvSpPr>
-          <p:cNvPr id="13" name="Text 11"/>
-          <p:cNvSpPr/>
-          <p:nvPr/>
-        </p:nvSpPr>
-        <p:spPr>
-          <a:xfrm>
-            <a:off x="631627" y="2930872"/>
-            <a:ext cx="8086939" cy="174575"/>
-          </a:xfrm>
-          <a:prstGeom prst="rect">
-            <a:avLst/>
-          </a:prstGeom>
-          <a:noFill/>
-          <a:ln/>
-        </p:spPr>
-        <p:txBody>
-          <a:bodyPr wrap="square" lIns="0" tIns="0" rIns="0" bIns="0" rtlCol="0" anchor="t"/>
-          <a:lstStyle/>
-          <a:p>
-            <a:pPr algn="l" indent="0" marL="0">
-              <a:lnSpc>
-                <a:spcPts val="1375"/>
-              </a:lnSpc>
-              <a:buNone/>
-            </a:pPr>
-            <a:r>
-              <a:rPr lang="en-US" sz="1100" dirty="0">
-                <a:solidFill>
-                  <a:srgbClr val="1C2833"/>
-                </a:solidFill>
-                <a:latin typeface="Courier New" pitchFamily="34" charset="0"/>
-                <a:ea typeface="Courier New" pitchFamily="34" charset="-122"/>
-                <a:cs typeface="Courier New" pitchFamily="34" charset="-120"/>
-              </a:rPr>
-              <a:t>1. ____________________________________________</a:t>
-            </a:r>
-            <a:endParaRPr lang="en-US" sz="1100" dirty="0"/>
-          </a:p>
-        </p:txBody>
-      </p:sp>
-      <p:sp>
-        <p:nvSpPr>
-          <p:cNvPr id="14" name="Text 12"/>
-          <p:cNvSpPr/>
-          <p:nvPr/>
-        </p:nvSpPr>
-        <p:spPr>
-          <a:xfrm>
-            <a:off x="631627" y="3105448"/>
-            <a:ext cx="8086939" cy="174575"/>
-          </a:xfrm>
-          <a:prstGeom prst="rect">
-            <a:avLst/>
-          </a:prstGeom>
-          <a:noFill/>
-          <a:ln/>
-        </p:spPr>
-        <p:txBody>
-          <a:bodyPr wrap="square" lIns="0" tIns="0" rIns="0" bIns="0" rtlCol="0" anchor="t"/>
-          <a:lstStyle/>
-          <a:p>
-            <a:pPr algn="l" indent="0" marL="0">
-              <a:lnSpc>
-                <a:spcPts val="1375"/>
-              </a:lnSpc>
-              <a:buNone/>
-            </a:pPr>
-            <a:r>
-              <a:rPr lang="en-US" sz="1100" dirty="0">
-                <a:solidFill>
-                  <a:srgbClr val="1C2833"/>
-                </a:solidFill>
-                <a:latin typeface="Courier New" pitchFamily="34" charset="0"/>
-                <a:ea typeface="Courier New" pitchFamily="34" charset="-122"/>
-                <a:cs typeface="Courier New" pitchFamily="34" charset="-120"/>
-              </a:rPr>
-              <a:t>2. ____________________________________________</a:t>
-            </a:r>
-            <a:endParaRPr lang="en-US" sz="1100" dirty="0"/>
-          </a:p>
-        </p:txBody>
-      </p:sp>
-      <p:sp>
-        <p:nvSpPr>
-          <p:cNvPr id="15" name="Text 13"/>
-          <p:cNvSpPr/>
-          <p:nvPr/>
-        </p:nvSpPr>
-        <p:spPr>
-          <a:xfrm>
-            <a:off x="631627" y="3454598"/>
-            <a:ext cx="8086939" cy="174575"/>
-          </a:xfrm>
-          <a:prstGeom prst="rect">
-            <a:avLst/>
-          </a:prstGeom>
-          <a:noFill/>
-          <a:ln/>
-        </p:spPr>
-        <p:txBody>
-          <a:bodyPr wrap="square" lIns="0" tIns="0" rIns="0" bIns="0" rtlCol="0" anchor="t"/>
-          <a:lstStyle/>
-          <a:p>
-            <a:pPr algn="l" indent="0" marL="0">
-              <a:lnSpc>
-                <a:spcPts val="1375"/>
-              </a:lnSpc>
-              <a:buNone/>
-            </a:pPr>
-            <a:r>
-              <a:rPr lang="en-US" sz="1100" dirty="0">
-                <a:solidFill>
-                  <a:srgbClr val="1C2833"/>
-                </a:solidFill>
-                <a:latin typeface="Courier New" pitchFamily="34" charset="0"/>
-                <a:ea typeface="Courier New" pitchFamily="34" charset="-122"/>
-                <a:cs typeface="Courier New" pitchFamily="34" charset="-120"/>
-              </a:rPr>
-              <a:t>ONE THING TO REFINE BEFORE TOMORROW:</a:t>
-            </a:r>
-            <a:endParaRPr lang="en-US" sz="1100" dirty="0"/>
-          </a:p>
-        </p:txBody>
-      </p:sp>
-      <p:sp>
-        <p:nvSpPr>
-          <p:cNvPr id="16" name="Text 14"/>
-          <p:cNvSpPr/>
-          <p:nvPr/>
-        </p:nvSpPr>
-        <p:spPr>
-          <a:xfrm>
-            <a:off x="631627" y="3629174"/>
-            <a:ext cx="8086939" cy="174575"/>
-          </a:xfrm>
-          <a:prstGeom prst="rect">
-            <a:avLst/>
-          </a:prstGeom>
-          <a:noFill/>
-          <a:ln/>
-        </p:spPr>
-        <p:txBody>
-          <a:bodyPr wrap="square" lIns="0" tIns="0" rIns="0" bIns="0" rtlCol="0" anchor="t"/>
-          <a:lstStyle/>
-          <a:p>
-            <a:pPr algn="l" indent="0" marL="0">
-              <a:lnSpc>
-                <a:spcPts val="1375"/>
-              </a:lnSpc>
-              <a:buNone/>
-            </a:pPr>
-            <a:r>
-              <a:rPr lang="en-US" sz="1100" dirty="0">
-                <a:solidFill>
-                  <a:srgbClr val="1C2833"/>
-                </a:solidFill>
-                <a:latin typeface="Courier New" pitchFamily="34" charset="0"/>
-                <a:ea typeface="Courier New" pitchFamily="34" charset="-122"/>
-                <a:cs typeface="Courier New" pitchFamily="34" charset="-120"/>
-              </a:rPr>
-              <a:t>______________________________________________</a:t>
-            </a:r>
-            <a:endParaRPr lang="en-US" sz="1100" dirty="0"/>
-          </a:p>
-        </p:txBody>
-      </p:sp>
-      <p:sp>
-        <p:nvSpPr>
-          <p:cNvPr id="17" name="Text 15"/>
-          <p:cNvSpPr/>
-          <p:nvPr/>
-        </p:nvSpPr>
-        <p:spPr>
-          <a:xfrm>
-            <a:off x="631627" y="3978325"/>
-            <a:ext cx="8086939" cy="174575"/>
-          </a:xfrm>
-          <a:prstGeom prst="rect">
-            <a:avLst/>
-          </a:prstGeom>
-          <a:noFill/>
-          <a:ln/>
-        </p:spPr>
-        <p:txBody>
-          <a:bodyPr wrap="square" lIns="0" tIns="0" rIns="0" bIns="0" rtlCol="0" anchor="t"/>
-          <a:lstStyle/>
-          <a:p>
-            <a:pPr algn="l" indent="0" marL="0">
-              <a:lnSpc>
-                <a:spcPts val="1375"/>
-              </a:lnSpc>
-              <a:buNone/>
-            </a:pPr>
-            <a:r>
-              <a:rPr lang="en-US" sz="1100" dirty="0">
-                <a:solidFill>
-                  <a:srgbClr val="1C2833"/>
-                </a:solidFill>
-                <a:latin typeface="Courier New" pitchFamily="34" charset="0"/>
-                <a:ea typeface="Courier New" pitchFamily="34" charset="-122"/>
-                <a:cs typeface="Courier New" pitchFamily="34" charset="-120"/>
-              </a:rPr>
-              <a:t>DID THE PRESENTER:</a:t>
-            </a:r>
-            <a:endParaRPr lang="en-US" sz="1100" dirty="0"/>
-          </a:p>
-        </p:txBody>
-      </p:sp>
-      <p:sp>
-        <p:nvSpPr>
-          <p:cNvPr id="18" name="Text 16"/>
-          <p:cNvSpPr/>
-          <p:nvPr/>
-        </p:nvSpPr>
-        <p:spPr>
-          <a:xfrm>
-            <a:off x="631627" y="4152900"/>
-            <a:ext cx="8086939" cy="174575"/>
-          </a:xfrm>
-          <a:prstGeom prst="rect">
-            <a:avLst/>
-          </a:prstGeom>
-          <a:noFill/>
-          <a:ln/>
-        </p:spPr>
-        <p:txBody>
-          <a:bodyPr wrap="square" lIns="0" tIns="0" rIns="0" bIns="0" rtlCol="0" anchor="t"/>
-          <a:lstStyle/>
-          <a:p>
-            <a:pPr algn="l" indent="0" marL="0">
-              <a:lnSpc>
-                <a:spcPts val="1375"/>
-              </a:lnSpc>
-              <a:buNone/>
-            </a:pPr>
-            <a:r>
-              <a:rPr lang="en-US" sz="1100" dirty="0">
-                <a:solidFill>
-                  <a:srgbClr val="1C2833"/>
-                </a:solidFill>
-                <a:latin typeface="Courier New" pitchFamily="34" charset="0"/>
-                <a:ea typeface="Courier New" pitchFamily="34" charset="-122"/>
-                <a:cs typeface="Courier New" pitchFamily="34" charset="-120"/>
-              </a:rPr>
-              <a:t>[ ] Open with the driving question?</a:t>
-            </a:r>
-            <a:endParaRPr lang="en-US" sz="1100" dirty="0"/>
-          </a:p>
-        </p:txBody>
-      </p:sp>
-      <p:sp>
-        <p:nvSpPr>
-          <p:cNvPr id="19" name="Text 17"/>
-          <p:cNvSpPr/>
-          <p:nvPr/>
-        </p:nvSpPr>
-        <p:spPr>
-          <a:xfrm>
-            <a:off x="631627" y="4327475"/>
-            <a:ext cx="8086939" cy="174575"/>
-          </a:xfrm>
-          <a:prstGeom prst="rect">
-            <a:avLst/>
-          </a:prstGeom>
-          <a:noFill/>
-          <a:ln/>
-        </p:spPr>
-        <p:txBody>
-          <a:bodyPr wrap="square" lIns="0" tIns="0" rIns="0" bIns="0" rtlCol="0" anchor="t"/>
-          <a:lstStyle/>
-          <a:p>
-            <a:pPr algn="l" indent="0" marL="0">
-              <a:lnSpc>
-                <a:spcPts val="1375"/>
-              </a:lnSpc>
-              <a:buNone/>
-            </a:pPr>
-            <a:r>
-              <a:rPr lang="en-US" sz="1100" dirty="0">
-                <a:solidFill>
-                  <a:srgbClr val="1C2833"/>
-                </a:solidFill>
-                <a:latin typeface="Courier New" pitchFamily="34" charset="0"/>
-                <a:ea typeface="Courier New" pitchFamily="34" charset="-122"/>
-                <a:cs typeface="Courier New" pitchFamily="34" charset="-120"/>
-              </a:rPr>
-              <a:t>[ ] Show the artefact within the first 2 minutes?</a:t>
-            </a:r>
-            <a:endParaRPr lang="en-US" sz="1100" dirty="0"/>
-          </a:p>
-        </p:txBody>
-      </p:sp>
-      <p:sp>
-        <p:nvSpPr>
-          <p:cNvPr id="20" name="Text 18"/>
-          <p:cNvSpPr/>
-          <p:nvPr/>
-        </p:nvSpPr>
-        <p:spPr>
-          <a:xfrm>
-            <a:off x="631627" y="4502051"/>
-            <a:ext cx="8086939" cy="174575"/>
-          </a:xfrm>
-          <a:prstGeom prst="rect">
-            <a:avLst/>
-          </a:prstGeom>
-          <a:noFill/>
-          <a:ln/>
-        </p:spPr>
-        <p:txBody>
-          <a:bodyPr wrap="square" lIns="0" tIns="0" rIns="0" bIns="0" rtlCol="0" anchor="t"/>
-          <a:lstStyle/>
-          <a:p>
-            <a:pPr algn="l" indent="0" marL="0">
-              <a:lnSpc>
-                <a:spcPts val="1375"/>
-              </a:lnSpc>
-              <a:buNone/>
-            </a:pPr>
-            <a:r>
-              <a:rPr lang="en-US" sz="1100" dirty="0">
-                <a:solidFill>
-                  <a:srgbClr val="1C2833"/>
-                </a:solidFill>
-                <a:latin typeface="Courier New" pitchFamily="34" charset="0"/>
-                <a:ea typeface="Courier New" pitchFamily="34" charset="-122"/>
-                <a:cs typeface="Courier New" pitchFamily="34" charset="-120"/>
-              </a:rPr>
-              <a:t>[ ] Name at least one source?</a:t>
-            </a:r>
-            <a:endParaRPr lang="en-US" sz="1100" dirty="0"/>
-          </a:p>
-        </p:txBody>
-      </p:sp>
-      <p:sp>
-        <p:nvSpPr>
-          <p:cNvPr id="21" name="Text 19"/>
-          <p:cNvSpPr/>
-          <p:nvPr/>
-        </p:nvSpPr>
-        <p:spPr>
-          <a:xfrm>
-            <a:off x="631627" y="4676626"/>
-            <a:ext cx="8086939" cy="174575"/>
-          </a:xfrm>
-          <a:prstGeom prst="rect">
-            <a:avLst/>
-          </a:prstGeom>
-          <a:noFill/>
-          <a:ln/>
-        </p:spPr>
-        <p:txBody>
-          <a:bodyPr wrap="square" lIns="0" tIns="0" rIns="0" bIns="0" rtlCol="0" anchor="t"/>
-          <a:lstStyle/>
-          <a:p>
-            <a:pPr algn="l" indent="0" marL="0">
-              <a:lnSpc>
-                <a:spcPts val="1375"/>
-              </a:lnSpc>
-              <a:buNone/>
-            </a:pPr>
-            <a:r>
-              <a:rPr lang="en-US" sz="1100" dirty="0">
-                <a:solidFill>
-                  <a:srgbClr val="1C2833"/>
-                </a:solidFill>
-                <a:latin typeface="Courier New" pitchFamily="34" charset="0"/>
-                <a:ea typeface="Courier New" pitchFamily="34" charset="-122"/>
-                <a:cs typeface="Courier New" pitchFamily="34" charset="-120"/>
-              </a:rPr>
-              <a:t>[ ] End with a specific reflection (not "I learned a lot")?</a:t>
-            </a:r>
-            <a:endParaRPr lang="en-US" sz="1100" dirty="0"/>
-          </a:p>
-        </p:txBody>
-      </p:sp>
-      <p:sp>
-        <p:nvSpPr>
-          <p:cNvPr id="22" name="Text 20"/>
-          <p:cNvSpPr/>
-          <p:nvPr/>
-        </p:nvSpPr>
-        <p:spPr>
-          <a:xfrm>
-            <a:off x="631627" y="4851202"/>
-            <a:ext cx="8086939" cy="174575"/>
-          </a:xfrm>
-          <a:prstGeom prst="rect">
-            <a:avLst/>
-          </a:prstGeom>
-          <a:noFill/>
-          <a:ln/>
-        </p:spPr>
-        <p:txBody>
-          <a:bodyPr wrap="square" lIns="0" tIns="0" rIns="0" bIns="0" rtlCol="0" anchor="t"/>
-          <a:lstStyle/>
-          <a:p>
-            <a:pPr algn="l" indent="0" marL="0">
-              <a:lnSpc>
-                <a:spcPts val="1375"/>
-              </a:lnSpc>
-              <a:buNone/>
-            </a:pPr>
-            <a:r>
-              <a:rPr lang="en-US" sz="1100" dirty="0">
-                <a:solidFill>
-                  <a:srgbClr val="1C2833"/>
-                </a:solidFill>
-                <a:latin typeface="Courier New" pitchFamily="34" charset="0"/>
-                <a:ea typeface="Courier New" pitchFamily="34" charset="-122"/>
-                <a:cs typeface="Courier New" pitchFamily="34" charset="-120"/>
-              </a:rPr>
-              <a:t>[ ] Finish within 4 minutes (± 15 sec)?</a:t>
-            </a:r>
-            <a:endParaRPr lang="en-US" sz="1100" dirty="0"/>
-          </a:p>
-        </p:txBody>
-      </p:sp>
-      <p:sp>
-        <p:nvSpPr>
-          <p:cNvPr id="23" name="Text 21"/>
-          <p:cNvSpPr/>
-          <p:nvPr/>
-        </p:nvSpPr>
-        <p:spPr>
-          <a:xfrm>
-            <a:off x="406301" y="5317778"/>
+            <a:off x="406301" y="4434929"/>
             <a:ext cx="8498026" cy="213271"/>
           </a:xfrm>
           <a:prstGeom prst="rect">
@@ -5509,7 +8814,7 @@
                 <a:ea typeface="Georgia" pitchFamily="34" charset="-122"/>
                 <a:cs typeface="Georgia" pitchFamily="34" charset="-120"/>
               </a:rPr>
-              <a:t>Homework</a:t>
+              <a:t>Core (8 min) (cont.)</a:t>
             </a:r>
             <a:endParaRPr lang="en-US" sz="1800" dirty="0"/>
           </a:p>
@@ -5523,8 +8828,8 @@
         </p:nvSpPr>
         <p:spPr>
           <a:xfrm>
-            <a:off x="406301" y="870942"/>
-            <a:ext cx="8498026" cy="639812"/>
+            <a:off x="634901" y="883593"/>
+            <a:ext cx="8102798" cy="281880"/>
           </a:xfrm>
           <a:prstGeom prst="rect">
             <a:avLst/>
@@ -5536,13 +8841,31 @@
           <a:bodyPr wrap="square" lIns="0" tIns="0" rIns="0" bIns="0" rtlCol="0" anchor="t"/>
           <a:lstStyle/>
           <a:p>
-            <a:pPr algn="l" indent="0" marL="0">
-              <a:lnSpc>
-                <a:spcPts val="1680"/>
-              </a:lnSpc>
-              <a:spcBef>
-                <a:spcPts val="300"/>
-              </a:spcBef>
+            <a:pPr algn="l" marL="342900" indent="-342900">
+              <a:lnSpc>
+                <a:spcPts val="1620"/>
+              </a:lnSpc>
+              <a:spcAft>
+                <a:spcPts val="300"/>
+              </a:spcAft>
+              <a:buSzPct val="100000"/>
+              <a:buChar char="•"/>
+            </a:pPr>
+            <a:r>
+              <a:rPr lang="en-US" sz="1200" b="1" dirty="0">
+                <a:solidFill>
+                  <a:srgbClr val="1C2833"/>
+                </a:solidFill>
+                <a:latin typeface="Arial" pitchFamily="34" charset="0"/>
+                <a:ea typeface="Arial" pitchFamily="34" charset="-122"/>
+                <a:cs typeface="Arial" pitchFamily="34" charset="-120"/>
+              </a:rPr>
+              <a:t>Three rehearsal rules</a:t>
+            </a:r>
+            <a:pPr algn="l" indent="0" marL="0">
+              <a:lnSpc>
+                <a:spcPts val="1620"/>
+              </a:lnSpc>
               <a:spcAft>
                 <a:spcPts val="300"/>
               </a:spcAft>
@@ -5557,7 +8880,7 @@
                 <a:ea typeface="Arial" pitchFamily="34" charset="-122"/>
                 <a:cs typeface="Arial" pitchFamily="34" charset="-120"/>
               </a:rPr>
-              <a:t>– One final rehearsal at home tonight, in front of a parent or sibling. Time it. Aim for 4 minutes ± 15 seconds. – Pack everything tonight, not tomorrow morning: artefact + documentation + notes. – Sleep on time. A clear-headed 4-minute share lands better than an over-rehearsed exhausted one.</a:t>
+              <a:t> (3 min):</a:t>
             </a:r>
             <a:endParaRPr lang="en-US" sz="1200" dirty="0"/>
           </a:p>
@@ -5566,6 +8889,160 @@
       <p:sp>
         <p:nvSpPr>
           <p:cNvPr id="5" name="Text 3"/>
+          <p:cNvSpPr/>
+          <p:nvPr/>
+        </p:nvSpPr>
+        <p:spPr>
+          <a:xfrm>
+            <a:off x="634901" y="1266974"/>
+            <a:ext cx="8102798" cy="769441"/>
+          </a:xfrm>
+          <a:prstGeom prst="rect">
+            <a:avLst/>
+          </a:prstGeom>
+          <a:noFill/>
+          <a:ln/>
+        </p:spPr>
+        <p:txBody>
+          <a:bodyPr wrap="square" lIns="0" tIns="0" rIns="0" bIns="0" rtlCol="0" anchor="t"/>
+          <a:lstStyle/>
+          <a:p>
+            <a:pPr algn="l" marL="342900" indent="-342900">
+              <a:lnSpc>
+                <a:spcPts val="1620"/>
+              </a:lnSpc>
+              <a:spcAft>
+                <a:spcPts val="300"/>
+              </a:spcAft>
+              <a:buSzPct val="100000"/>
+              <a:buChar char="•"/>
+            </a:pPr>
+            <a:r>
+              <a:rPr lang="en-US" sz="1200" b="1" dirty="0">
+                <a:solidFill>
+                  <a:srgbClr val="1C2833"/>
+                </a:solidFill>
+                <a:latin typeface="Arial" pitchFamily="34" charset="0"/>
+                <a:ea typeface="Arial" pitchFamily="34" charset="-122"/>
+                <a:cs typeface="Arial" pitchFamily="34" charset="-120"/>
+              </a:rPr>
+              <a:t>Time it.</a:t>
+            </a:r>
+            <a:pPr algn="l" indent="0" marL="0">
+              <a:lnSpc>
+                <a:spcPts val="1620"/>
+              </a:lnSpc>
+              <a:spcAft>
+                <a:spcPts val="300"/>
+              </a:spcAft>
+              <a:buNone/>
+            </a:pPr>
+            <a:r>
+              <a:rPr lang="en-US" sz="1200" dirty="0">
+                <a:solidFill>
+                  <a:srgbClr val="1C2833"/>
+                </a:solidFill>
+                <a:latin typeface="Arial" pitchFamily="34" charset="0"/>
+                <a:ea typeface="Arial" pitchFamily="34" charset="-122"/>
+                <a:cs typeface="Arial" pitchFamily="34" charset="-120"/>
+              </a:rPr>
+              <a:t> If you can't fit in 4 minutes, you'll cut on stage. Cut now instead.</a:t>
+            </a:r>
+            <a:endParaRPr lang="en-US" sz="1200" dirty="0"/>
+          </a:p>
+          <a:p>
+            <a:pPr algn="l" marL="342900" indent="-342900">
+              <a:lnSpc>
+                <a:spcPts val="1620"/>
+              </a:lnSpc>
+              <a:spcAft>
+                <a:spcPts val="300"/>
+              </a:spcAft>
+              <a:buSzPct val="100000"/>
+              <a:buChar char="•"/>
+            </a:pPr>
+            <a:r>
+              <a:rPr lang="en-US" sz="1200" b="1" dirty="0">
+                <a:solidFill>
+                  <a:srgbClr val="1C2833"/>
+                </a:solidFill>
+                <a:latin typeface="Arial" pitchFamily="34" charset="0"/>
+                <a:ea typeface="Arial" pitchFamily="34" charset="-122"/>
+                <a:cs typeface="Arial" pitchFamily="34" charset="-120"/>
+              </a:rPr>
+              <a:t>Show the artefact early.</a:t>
+            </a:r>
+            <a:pPr algn="l" indent="0" marL="0">
+              <a:lnSpc>
+                <a:spcPts val="1620"/>
+              </a:lnSpc>
+              <a:spcAft>
+                <a:spcPts val="300"/>
+              </a:spcAft>
+              <a:buNone/>
+            </a:pPr>
+            <a:r>
+              <a:rPr lang="en-US" sz="1200" dirty="0">
+                <a:solidFill>
+                  <a:srgbClr val="1C2833"/>
+                </a:solidFill>
+                <a:latin typeface="Arial" pitchFamily="34" charset="0"/>
+                <a:ea typeface="Arial" pitchFamily="34" charset="-122"/>
+                <a:cs typeface="Arial" pitchFamily="34" charset="-120"/>
+              </a:rPr>
+              <a:t> Don't leave it as a reveal — the audience wants to see it.</a:t>
+            </a:r>
+            <a:endParaRPr lang="en-US" sz="1200" dirty="0"/>
+          </a:p>
+          <a:p>
+            <a:pPr algn="l" marL="342900" indent="-342900">
+              <a:lnSpc>
+                <a:spcPts val="1620"/>
+              </a:lnSpc>
+              <a:spcAft>
+                <a:spcPts val="300"/>
+              </a:spcAft>
+              <a:buSzPct val="100000"/>
+              <a:buChar char="•"/>
+            </a:pPr>
+            <a:r>
+              <a:rPr lang="en-US" sz="1200" b="1" dirty="0">
+                <a:solidFill>
+                  <a:srgbClr val="1C2833"/>
+                </a:solidFill>
+                <a:latin typeface="Arial" pitchFamily="34" charset="0"/>
+                <a:ea typeface="Arial" pitchFamily="34" charset="-122"/>
+                <a:cs typeface="Arial" pitchFamily="34" charset="-120"/>
+              </a:rPr>
+              <a:t>End on the reflection, not the artefact.</a:t>
+            </a:r>
+            <a:pPr algn="l" indent="0" marL="0">
+              <a:lnSpc>
+                <a:spcPts val="1620"/>
+              </a:lnSpc>
+              <a:spcAft>
+                <a:spcPts val="300"/>
+              </a:spcAft>
+              <a:buNone/>
+            </a:pPr>
+            <a:r>
+              <a:rPr lang="en-US" sz="1200" dirty="0">
+                <a:solidFill>
+                  <a:srgbClr val="1C2833"/>
+                </a:solidFill>
+                <a:latin typeface="Arial" pitchFamily="34" charset="0"/>
+                <a:ea typeface="Arial" pitchFamily="34" charset="-122"/>
+                <a:cs typeface="Arial" pitchFamily="34" charset="-120"/>
+              </a:rPr>
+              <a:t> The honesty is the last thing the audience hears.</a:t>
+            </a:r>
+            <a:endParaRPr lang="en-US" sz="1200" dirty="0"/>
+          </a:p>
+        </p:txBody>
+      </p:sp>
+      <p:sp>
+        <p:nvSpPr>
+          <p:cNvPr id="6" name="Text 4"/>
           <p:cNvSpPr/>
           <p:nvPr/>
         </p:nvSpPr>
@@ -5715,7 +9192,7 @@
                 <a:ea typeface="Georgia" pitchFamily="34" charset="-122"/>
                 <a:cs typeface="Georgia" pitchFamily="34" charset="-120"/>
               </a:rPr>
-              <a:t>Differentiation</a:t>
+              <a:t>Core (8 min) (cont.)</a:t>
             </a:r>
             <a:endParaRPr lang="en-US" sz="1800" dirty="0"/>
           </a:p>
@@ -5730,7 +9207,7 @@
         <p:spPr>
           <a:xfrm>
             <a:off x="634901" y="883593"/>
-            <a:ext cx="8102798" cy="937022"/>
+            <a:ext cx="8102798" cy="487561"/>
           </a:xfrm>
           <a:prstGeom prst="rect">
             <a:avLst/>
@@ -5761,7 +9238,7 @@
                 <a:ea typeface="Arial" pitchFamily="34" charset="-122"/>
                 <a:cs typeface="Arial" pitchFamily="34" charset="-120"/>
               </a:rPr>
-              <a:t>One tier up:</a:t>
+              <a:t>The Q&amp;A move</a:t>
             </a:r>
             <a:pPr algn="l" indent="0" marL="0">
               <a:lnSpc>
@@ -5781,31 +9258,27 @@
                 <a:ea typeface="Arial" pitchFamily="34" charset="-122"/>
                 <a:cs typeface="Arial" pitchFamily="34" charset="-120"/>
               </a:rPr>
-              <a:t> Rehearse your 4-minute share once, then deliver it from memory without your notes for the second rehearsal. The memory pressure tightens the language. Bring notes tomorrow, but you may not need them.</a:t>
-            </a:r>
-            <a:endParaRPr lang="en-US" sz="1200" dirty="0"/>
-          </a:p>
-          <a:p>
-            <a:pPr algn="l" marL="342900" indent="-342900">
+              <a:t> (1 min). When a question is asked you don't know the answer to, say: </a:t>
+            </a:r>
+            <a:pPr algn="l" indent="0" marL="0">
               <a:lnSpc>
                 <a:spcPts val="1620"/>
               </a:lnSpc>
               <a:spcAft>
                 <a:spcPts val="300"/>
               </a:spcAft>
-              <a:buSzPct val="100000"/>
-              <a:buChar char="•"/>
-            </a:pPr>
-            <a:r>
-              <a:rPr lang="en-US" sz="1200" b="1" dirty="0">
-                <a:solidFill>
-                  <a:srgbClr val="1C2833"/>
-                </a:solidFill>
-                <a:latin typeface="Arial" pitchFamily="34" charset="0"/>
-                <a:ea typeface="Arial" pitchFamily="34" charset="-122"/>
-                <a:cs typeface="Arial" pitchFamily="34" charset="-120"/>
-              </a:rPr>
-              <a:t>One tier down:</a:t>
+              <a:buNone/>
+            </a:pPr>
+            <a:r>
+              <a:rPr lang="en-US" sz="1200" i="1" dirty="0">
+                <a:solidFill>
+                  <a:srgbClr val="1C2833"/>
+                </a:solidFill>
+                <a:latin typeface="Arial" pitchFamily="34" charset="0"/>
+                <a:ea typeface="Arial" pitchFamily="34" charset="-122"/>
+                <a:cs typeface="Arial" pitchFamily="34" charset="-120"/>
+              </a:rPr>
+              <a:t>"I don't know, but here's what I'd check…"</a:t>
             </a:r>
             <a:pPr algn="l" indent="0" marL="0">
               <a:lnSpc>
@@ -5825,7 +9298,7 @@
                 <a:ea typeface="Arial" pitchFamily="34" charset="-122"/>
                 <a:cs typeface="Arial" pitchFamily="34" charset="-120"/>
               </a:rPr>
-              <a:t> Use cue cards tomorrow — one card per section (Question / Process / Sources / Artefact / Reflection). Five cards. Bigger writing if it helps you see them.</a:t>
+              <a:t> This is honest and it shows you can reason.</a:t>
             </a:r>
             <a:endParaRPr lang="en-US" sz="1200" dirty="0"/>
           </a:p>
